--- a/docs/uni-submission/mid-semester-one.pptx
+++ b/docs/uni-submission/mid-semester-one.pptx
@@ -22,6 +22,673 @@
 </file>
 
 <file path=ppt/slideLayouts/slideLayout1.xml><?xml version="1.0" encoding="utf-8"?>
+<p:sldLayout xmlns:a="http://schemas.openxmlformats.org/drawingml/2006/main" xmlns:p="http://schemas.openxmlformats.org/presentationml/2006/main" xmlns:r="http://schemas.openxmlformats.org/officeDocument/2006/relationships" xmlns:p14="http://schemas.microsoft.com/office/powerpoint/2010/main" xmlns:p15="http://schemas.microsoft.com/office/powerpoint/2012/main" xmlns:mc="http://schemas.openxmlformats.org/markup-compatibility/2006" type="vertTx" preserve="1">
+  <p:cSld name="Title and Vertical Text">
+    <p:bg>
+      <p:bgPr>
+        <a:solidFill>
+          <a:srgbClr val="ffffff"/>
+        </a:solidFill>
+      </p:bgPr>
+    </p:bg>
+    <p:spTree>
+      <p:nvGrpSpPr>
+        <p:cNvPr id="1" name=""/>
+        <p:cNvGrpSpPr/>
+        <p:nvPr/>
+      </p:nvGrpSpPr>
+      <p:grpSpPr>
+        <a:xfrm>
+          <a:off x="0" y="0"/>
+          <a:ext cx="0" cy="0"/>
+          <a:chOff x="0" y="0"/>
+          <a:chExt cx="0" cy="0"/>
+        </a:xfrm>
+      </p:grpSpPr>
+      <p:sp>
+        <p:nvSpPr>
+          <p:cNvPr id="2" name="Rectangle 6"/>
+          <p:cNvSpPr/>
+          <p:nvPr/>
+        </p:nvSpPr>
+        <p:spPr>
+          <a:xfrm>
+            <a:off x="0" y="-6480"/>
+            <a:ext cx="12191400" cy="1343880"/>
+          </a:xfrm>
+          <a:prstGeom prst="rect">
+            <a:avLst/>
+          </a:prstGeom>
+          <a:solidFill>
+            <a:srgbClr val="0070c0"/>
+          </a:solidFill>
+          <a:ln>
+            <a:noFill/>
+          </a:ln>
+        </p:spPr>
+        <p:style>
+          <a:lnRef idx="2">
+            <a:schemeClr val="accent1">
+              <a:shade val="50000"/>
+            </a:schemeClr>
+          </a:lnRef>
+          <a:fillRef idx="1">
+            <a:schemeClr val="accent1"/>
+          </a:fillRef>
+          <a:effectRef idx="0">
+            <a:schemeClr val="accent1"/>
+          </a:effectRef>
+          <a:fontRef idx="minor"/>
+        </p:style>
+        <p:txBody>
+          <a:bodyPr lIns="90000" rIns="90000" tIns="45000" bIns="45000" anchor="ctr">
+            <a:noAutofit/>
+          </a:bodyPr>
+          <a:p>
+            <a:pPr algn="ctr" defTabSz="914400">
+              <a:lnSpc>
+                <a:spcPct val="100000"/>
+              </a:lnSpc>
+            </a:pPr>
+            <a:endParaRPr lang="en-US" sz="1800" b="0" u="none" strike="noStrike">
+              <a:solidFill>
+                <a:schemeClr val="lt1"/>
+              </a:solidFill>
+              <a:effectLst/>
+              <a:uFillTx/>
+              <a:latin typeface="Calibri"/>
+            </a:endParaRPr>
+          </a:p>
+        </p:txBody>
+      </p:sp>
+      <p:sp>
+        <p:nvSpPr>
+          <p:cNvPr id="3" name="TextBox 7"/>
+          <p:cNvSpPr/>
+          <p:nvPr/>
+        </p:nvSpPr>
+        <p:spPr>
+          <a:xfrm>
+            <a:off x="2196360" y="204120"/>
+            <a:ext cx="8376480" cy="922680"/>
+          </a:xfrm>
+          <a:prstGeom prst="rect">
+            <a:avLst/>
+          </a:prstGeom>
+          <a:noFill/>
+          <a:ln w="0">
+            <a:noFill/>
+          </a:ln>
+        </p:spPr>
+        <p:style>
+          <a:lnRef idx="0"/>
+          <a:fillRef idx="0"/>
+          <a:effectRef idx="0"/>
+          <a:fontRef idx="minor"/>
+        </p:style>
+        <p:txBody>
+          <a:bodyPr lIns="90000" rIns="90000" tIns="45000" bIns="45000" anchor="t">
+            <a:spAutoFit/>
+          </a:bodyPr>
+          <a:p>
+            <a:pPr defTabSz="914400">
+              <a:lnSpc>
+                <a:spcPct val="100000"/>
+              </a:lnSpc>
+            </a:pPr>
+            <a:r>
+              <a:rPr lang="en-US" sz="5400" b="0" u="none" strike="noStrike">
+                <a:solidFill>
+                  <a:schemeClr val="lt1"/>
+                </a:solidFill>
+                <a:effectLst/>
+                <a:uFillTx/>
+                <a:latin typeface="Bodoni MT"/>
+              </a:rPr>
+              <a:t>University of Dar es Salaam</a:t>
+            </a:r>
+            <a:endParaRPr lang="en-GB" sz="5400" b="0" u="none" strike="noStrike">
+              <a:solidFill>
+                <a:srgbClr val="000000"/>
+              </a:solidFill>
+              <a:effectLst/>
+              <a:uFillTx/>
+              <a:latin typeface="Arial"/>
+            </a:endParaRPr>
+          </a:p>
+        </p:txBody>
+      </p:sp>
+      <p:pic>
+        <p:nvPicPr>
+          <p:cNvPr id="4" name="Picture 10"/>
+          <p:cNvPicPr/>
+          <p:nvPr/>
+        </p:nvPicPr>
+        <p:blipFill>
+          <a:blip r:embed="rId2"/>
+          <a:srcRect l="4296" t="5704" r="15070" b="10047"/>
+          <a:stretch/>
+        </p:blipFill>
+        <p:spPr>
+          <a:xfrm>
+            <a:off x="838080" y="19800"/>
+            <a:ext cx="1236240" cy="1291320"/>
+          </a:xfrm>
+          <a:prstGeom prst="rect">
+            <a:avLst/>
+          </a:prstGeom>
+          <a:noFill/>
+          <a:ln w="0">
+            <a:noFill/>
+          </a:ln>
+        </p:spPr>
+      </p:pic>
+      <p:sp>
+        <p:nvSpPr>
+          <p:cNvPr id="5" name="PlaceHolder 1"/>
+          <p:cNvSpPr>
+            <a:spLocks noGrp="1"/>
+          </p:cNvSpPr>
+          <p:nvPr>
+            <p:ph type="title"/>
+          </p:nvPr>
+        </p:nvSpPr>
+        <p:spPr>
+          <a:xfrm>
+            <a:off x="838080" y="1401480"/>
+            <a:ext cx="10514880" cy="1324800"/>
+          </a:xfrm>
+          <a:prstGeom prst="rect">
+            <a:avLst/>
+          </a:prstGeom>
+          <a:noFill/>
+          <a:ln w="0">
+            <a:noFill/>
+          </a:ln>
+        </p:spPr>
+        <p:txBody>
+          <a:bodyPr lIns="91440" rIns="91440" tIns="45720" bIns="45720" anchor="ctr">
+            <a:noAutofit/>
+          </a:bodyPr>
+          <a:p>
+            <a:pPr indent="0" defTabSz="914400">
+              <a:lnSpc>
+                <a:spcPct val="90000"/>
+              </a:lnSpc>
+              <a:buNone/>
+              <a:tabLst>
+                <a:tab algn="l" pos="0"/>
+              </a:tabLst>
+            </a:pPr>
+            <a:r>
+              <a:rPr lang="en-US" sz="4400" b="1" u="none" strike="noStrike">
+                <a:solidFill>
+                  <a:schemeClr val="dk1"/>
+                </a:solidFill>
+                <a:effectLst/>
+                <a:uFillTx/>
+                <a:latin typeface="Calibri Light"/>
+              </a:rPr>
+              <a:t>Click to edit Master title style</a:t>
+            </a:r>
+            <a:endParaRPr lang="en-GB" sz="4400" b="0" u="none" strike="noStrike">
+              <a:solidFill>
+                <a:srgbClr val="000000"/>
+              </a:solidFill>
+              <a:effectLst/>
+              <a:uFillTx/>
+              <a:latin typeface="Arial"/>
+            </a:endParaRPr>
+          </a:p>
+        </p:txBody>
+      </p:sp>
+      <p:sp>
+        <p:nvSpPr>
+          <p:cNvPr id="6" name="PlaceHolder 2"/>
+          <p:cNvSpPr>
+            <a:spLocks noGrp="1"/>
+          </p:cNvSpPr>
+          <p:nvPr>
+            <p:ph type="body"/>
+          </p:nvPr>
+        </p:nvSpPr>
+        <p:spPr>
+          <a:xfrm>
+            <a:off x="838080" y="2727360"/>
+            <a:ext cx="10514880" cy="3449160"/>
+          </a:xfrm>
+          <a:prstGeom prst="rect">
+            <a:avLst/>
+          </a:prstGeom>
+          <a:noFill/>
+          <a:ln w="0">
+            <a:noFill/>
+          </a:ln>
+        </p:spPr>
+        <p:txBody>
+          <a:bodyPr lIns="91440" rIns="91440" tIns="45720" bIns="45720" anchor="t" vert="eaVert">
+            <a:noAutofit/>
+          </a:bodyPr>
+          <a:p>
+            <a:pPr marL="228600" indent="-228600" defTabSz="914400">
+              <a:lnSpc>
+                <a:spcPct val="90000"/>
+              </a:lnSpc>
+              <a:spcBef>
+                <a:spcPts val="1001"/>
+              </a:spcBef>
+              <a:buClr>
+                <a:srgbClr val="000000"/>
+              </a:buClr>
+              <a:buFont typeface="Arial"/>
+              <a:buChar char="•"/>
+            </a:pPr>
+            <a:r>
+              <a:rPr lang="en-US" sz="2800" b="0" u="none" strike="noStrike">
+                <a:solidFill>
+                  <a:schemeClr val="dk1"/>
+                </a:solidFill>
+                <a:effectLst/>
+                <a:uFillTx/>
+                <a:latin typeface="Calibri"/>
+              </a:rPr>
+              <a:t>Edit Master text styles</a:t>
+            </a:r>
+            <a:endParaRPr lang="en-GB" sz="2800" b="0" u="none" strike="noStrike">
+              <a:solidFill>
+                <a:srgbClr val="000000"/>
+              </a:solidFill>
+              <a:effectLst/>
+              <a:uFillTx/>
+              <a:latin typeface="Arial"/>
+            </a:endParaRPr>
+          </a:p>
+          <a:p>
+            <a:pPr marL="685800" lvl="1" indent="-228600" defTabSz="914400">
+              <a:lnSpc>
+                <a:spcPct val="90000"/>
+              </a:lnSpc>
+              <a:spcBef>
+                <a:spcPts val="499"/>
+              </a:spcBef>
+              <a:buClr>
+                <a:srgbClr val="000000"/>
+              </a:buClr>
+              <a:buFont typeface="Arial"/>
+              <a:buChar char="•"/>
+            </a:pPr>
+            <a:r>
+              <a:rPr lang="en-US" sz="2400" b="0" u="none" strike="noStrike">
+                <a:solidFill>
+                  <a:schemeClr val="dk1"/>
+                </a:solidFill>
+                <a:effectLst/>
+                <a:uFillTx/>
+                <a:latin typeface="Calibri"/>
+              </a:rPr>
+              <a:t>Second level</a:t>
+            </a:r>
+            <a:endParaRPr lang="en-GB" sz="2400" b="0" u="none" strike="noStrike">
+              <a:solidFill>
+                <a:srgbClr val="000000"/>
+              </a:solidFill>
+              <a:effectLst/>
+              <a:uFillTx/>
+              <a:latin typeface="Arial"/>
+            </a:endParaRPr>
+          </a:p>
+          <a:p>
+            <a:pPr marL="1143000" lvl="2" indent="-228600" defTabSz="914400">
+              <a:lnSpc>
+                <a:spcPct val="90000"/>
+              </a:lnSpc>
+              <a:spcBef>
+                <a:spcPts val="499"/>
+              </a:spcBef>
+              <a:buClr>
+                <a:srgbClr val="000000"/>
+              </a:buClr>
+              <a:buFont typeface="Arial"/>
+              <a:buChar char="•"/>
+            </a:pPr>
+            <a:r>
+              <a:rPr lang="en-US" sz="2000" b="0" u="none" strike="noStrike">
+                <a:solidFill>
+                  <a:schemeClr val="dk1"/>
+                </a:solidFill>
+                <a:effectLst/>
+                <a:uFillTx/>
+                <a:latin typeface="Calibri"/>
+              </a:rPr>
+              <a:t>Third level</a:t>
+            </a:r>
+            <a:endParaRPr lang="en-GB" sz="2000" b="0" u="none" strike="noStrike">
+              <a:solidFill>
+                <a:srgbClr val="000000"/>
+              </a:solidFill>
+              <a:effectLst/>
+              <a:uFillTx/>
+              <a:latin typeface="Arial"/>
+            </a:endParaRPr>
+          </a:p>
+          <a:p>
+            <a:pPr marL="1600200" lvl="3" indent="-228600" defTabSz="914400">
+              <a:lnSpc>
+                <a:spcPct val="90000"/>
+              </a:lnSpc>
+              <a:spcBef>
+                <a:spcPts val="499"/>
+              </a:spcBef>
+              <a:buClr>
+                <a:srgbClr val="000000"/>
+              </a:buClr>
+              <a:buFont typeface="Arial"/>
+              <a:buChar char="•"/>
+            </a:pPr>
+            <a:r>
+              <a:rPr lang="en-US" sz="1800" b="0" u="none" strike="noStrike">
+                <a:solidFill>
+                  <a:schemeClr val="dk1"/>
+                </a:solidFill>
+                <a:effectLst/>
+                <a:uFillTx/>
+                <a:latin typeface="Calibri"/>
+              </a:rPr>
+              <a:t>Fourth level</a:t>
+            </a:r>
+            <a:endParaRPr lang="en-GB" sz="1800" b="0" u="none" strike="noStrike">
+              <a:solidFill>
+                <a:srgbClr val="000000"/>
+              </a:solidFill>
+              <a:effectLst/>
+              <a:uFillTx/>
+              <a:latin typeface="Arial"/>
+            </a:endParaRPr>
+          </a:p>
+          <a:p>
+            <a:pPr marL="2057400" lvl="4" indent="-228600" defTabSz="914400">
+              <a:lnSpc>
+                <a:spcPct val="90000"/>
+              </a:lnSpc>
+              <a:spcBef>
+                <a:spcPts val="499"/>
+              </a:spcBef>
+              <a:buClr>
+                <a:srgbClr val="000000"/>
+              </a:buClr>
+              <a:buFont typeface="Arial"/>
+              <a:buChar char="•"/>
+            </a:pPr>
+            <a:r>
+              <a:rPr lang="en-US" sz="1800" b="0" u="none" strike="noStrike">
+                <a:solidFill>
+                  <a:schemeClr val="dk1"/>
+                </a:solidFill>
+                <a:effectLst/>
+                <a:uFillTx/>
+                <a:latin typeface="Calibri"/>
+              </a:rPr>
+              <a:t>Fifth level</a:t>
+            </a:r>
+            <a:endParaRPr lang="en-GB" sz="1800" b="0" u="none" strike="noStrike">
+              <a:solidFill>
+                <a:srgbClr val="000000"/>
+              </a:solidFill>
+              <a:effectLst/>
+              <a:uFillTx/>
+              <a:latin typeface="Arial"/>
+            </a:endParaRPr>
+          </a:p>
+        </p:txBody>
+      </p:sp>
+      <p:sp>
+        <p:nvSpPr>
+          <p:cNvPr id="7" name="PlaceHolder 3"/>
+          <p:cNvSpPr>
+            <a:spLocks noGrp="1"/>
+          </p:cNvSpPr>
+          <p:nvPr>
+            <p:ph type="dt" idx="1"/>
+          </p:nvPr>
+        </p:nvSpPr>
+        <p:spPr>
+          <a:xfrm>
+            <a:off x="838080" y="6356520"/>
+            <a:ext cx="2742480" cy="364320"/>
+          </a:xfrm>
+          <a:prstGeom prst="rect">
+            <a:avLst/>
+          </a:prstGeom>
+          <a:noFill/>
+          <a:ln w="0">
+            <a:noFill/>
+          </a:ln>
+        </p:spPr>
+        <p:txBody>
+          <a:bodyPr lIns="91440" rIns="91440" tIns="45720" bIns="45720" anchor="ctr">
+            <a:noAutofit/>
+          </a:bodyPr>
+          <a:lstStyle>
+            <a:lvl1pPr indent="0" defTabSz="914400">
+              <a:lnSpc>
+                <a:spcPct val="100000"/>
+              </a:lnSpc>
+              <a:buNone/>
+              <a:tabLst>
+                <a:tab algn="l" pos="0"/>
+              </a:tabLst>
+              <a:defRPr lang="en-US" sz="1200" b="0" u="none" strike="noStrike">
+                <a:solidFill>
+                  <a:schemeClr val="dk1">
+                    <a:tint val="75000"/>
+                  </a:schemeClr>
+                </a:solidFill>
+                <a:effectLst/>
+                <a:uFillTx/>
+                <a:latin typeface="Calibri"/>
+              </a:defRPr>
+            </a:lvl1pPr>
+          </a:lstStyle>
+          <a:p>
+            <a:pPr indent="0" defTabSz="914400">
+              <a:lnSpc>
+                <a:spcPct val="100000"/>
+              </a:lnSpc>
+              <a:buNone/>
+              <a:tabLst>
+                <a:tab algn="l" pos="0"/>
+              </a:tabLst>
+            </a:pPr>
+            <a:r>
+              <a:rPr lang="en-US" sz="1200" b="0" u="none" strike="noStrike">
+                <a:solidFill>
+                  <a:schemeClr val="dk1">
+                    <a:tint val="75000"/>
+                  </a:schemeClr>
+                </a:solidFill>
+                <a:effectLst/>
+                <a:uFillTx/>
+                <a:latin typeface="Calibri"/>
+              </a:rPr>
+              <a:t>&lt;date/time&gt;</a:t>
+            </a:r>
+            <a:endParaRPr lang="en-GB" sz="1200" b="0" u="none" strike="noStrike">
+              <a:solidFill>
+                <a:srgbClr val="000000"/>
+              </a:solidFill>
+              <a:effectLst/>
+              <a:uFillTx/>
+              <a:latin typeface="Times New Roman"/>
+            </a:endParaRPr>
+          </a:p>
+        </p:txBody>
+      </p:sp>
+      <p:sp>
+        <p:nvSpPr>
+          <p:cNvPr id="8" name="PlaceHolder 4"/>
+          <p:cNvSpPr>
+            <a:spLocks noGrp="1"/>
+          </p:cNvSpPr>
+          <p:nvPr>
+            <p:ph type="ftr" idx="2"/>
+          </p:nvPr>
+        </p:nvSpPr>
+        <p:spPr>
+          <a:xfrm>
+            <a:off x="4038480" y="6356520"/>
+            <a:ext cx="4114080" cy="364320"/>
+          </a:xfrm>
+          <a:prstGeom prst="rect">
+            <a:avLst/>
+          </a:prstGeom>
+          <a:noFill/>
+          <a:ln w="0">
+            <a:noFill/>
+          </a:ln>
+        </p:spPr>
+        <p:txBody>
+          <a:bodyPr lIns="91440" rIns="91440" tIns="45720" bIns="45720" anchor="ctr">
+            <a:noAutofit/>
+          </a:bodyPr>
+          <a:lstStyle>
+            <a:lvl1pPr indent="0" algn="ctr">
+              <a:lnSpc>
+                <a:spcPct val="100000"/>
+              </a:lnSpc>
+              <a:buNone/>
+              <a:tabLst>
+                <a:tab algn="l" pos="0"/>
+              </a:tabLst>
+              <a:defRPr lang="en-GB" sz="1400" b="0" u="none" strike="noStrike">
+                <a:solidFill>
+                  <a:srgbClr val="000000"/>
+                </a:solidFill>
+                <a:effectLst/>
+                <a:uFillTx/>
+                <a:latin typeface="Times New Roman"/>
+              </a:defRPr>
+            </a:lvl1pPr>
+          </a:lstStyle>
+          <a:p>
+            <a:pPr indent="0" algn="ctr">
+              <a:lnSpc>
+                <a:spcPct val="100000"/>
+              </a:lnSpc>
+              <a:buNone/>
+              <a:tabLst>
+                <a:tab algn="l" pos="0"/>
+              </a:tabLst>
+            </a:pPr>
+            <a:r>
+              <a:rPr lang="en-GB" sz="1400" b="0" u="none" strike="noStrike">
+                <a:solidFill>
+                  <a:srgbClr val="000000"/>
+                </a:solidFill>
+                <a:effectLst/>
+                <a:uFillTx/>
+                <a:latin typeface="Times New Roman"/>
+              </a:rPr>
+              <a:t>&lt;footer&gt;</a:t>
+            </a:r>
+            <a:endParaRPr lang="en-GB" sz="1400" b="0" u="none" strike="noStrike">
+              <a:solidFill>
+                <a:srgbClr val="000000"/>
+              </a:solidFill>
+              <a:effectLst/>
+              <a:uFillTx/>
+              <a:latin typeface="Times New Roman"/>
+            </a:endParaRPr>
+          </a:p>
+        </p:txBody>
+      </p:sp>
+      <p:sp>
+        <p:nvSpPr>
+          <p:cNvPr id="9" name="PlaceHolder 5"/>
+          <p:cNvSpPr>
+            <a:spLocks noGrp="1"/>
+          </p:cNvSpPr>
+          <p:nvPr>
+            <p:ph type="sldNum" idx="3"/>
+          </p:nvPr>
+        </p:nvSpPr>
+        <p:spPr>
+          <a:xfrm>
+            <a:off x="8610480" y="6356520"/>
+            <a:ext cx="2742480" cy="364320"/>
+          </a:xfrm>
+          <a:prstGeom prst="rect">
+            <a:avLst/>
+          </a:prstGeom>
+          <a:noFill/>
+          <a:ln w="0">
+            <a:noFill/>
+          </a:ln>
+        </p:spPr>
+        <p:txBody>
+          <a:bodyPr lIns="91440" rIns="91440" tIns="45720" bIns="45720" anchor="ctr">
+            <a:noAutofit/>
+          </a:bodyPr>
+          <a:lstStyle>
+            <a:lvl1pPr indent="0" algn="r" defTabSz="914400">
+              <a:lnSpc>
+                <a:spcPct val="100000"/>
+              </a:lnSpc>
+              <a:buNone/>
+              <a:tabLst>
+                <a:tab algn="l" pos="0"/>
+              </a:tabLst>
+              <a:defRPr lang="en-US" sz="1200" b="0" u="none" strike="noStrike">
+                <a:solidFill>
+                  <a:schemeClr val="dk1">
+                    <a:tint val="75000"/>
+                  </a:schemeClr>
+                </a:solidFill>
+                <a:effectLst/>
+                <a:uFillTx/>
+                <a:latin typeface="Calibri"/>
+              </a:defRPr>
+            </a:lvl1pPr>
+          </a:lstStyle>
+          <a:p>
+            <a:pPr indent="0" algn="r" defTabSz="914400">
+              <a:lnSpc>
+                <a:spcPct val="100000"/>
+              </a:lnSpc>
+              <a:buNone/>
+              <a:tabLst>
+                <a:tab algn="l" pos="0"/>
+              </a:tabLst>
+            </a:pPr>
+            <a:fld id="{7E2E39C5-712F-42C4-B2F1-9CE971BBB016}" type="slidenum">
+              <a:rPr lang="en-US" sz="1200" b="0" u="none" strike="noStrike">
+                <a:solidFill>
+                  <a:schemeClr val="dk1">
+                    <a:tint val="75000"/>
+                  </a:schemeClr>
+                </a:solidFill>
+                <a:effectLst/>
+                <a:uFillTx/>
+                <a:latin typeface="Calibri"/>
+              </a:rPr>
+              <a:t>&lt;number&gt;</a:t>
+            </a:fld>
+            <a:endParaRPr lang="en-GB" sz="1200" b="0" u="none" strike="noStrike">
+              <a:solidFill>
+                <a:srgbClr val="000000"/>
+              </a:solidFill>
+              <a:effectLst/>
+              <a:uFillTx/>
+              <a:latin typeface="Times New Roman"/>
+            </a:endParaRPr>
+          </a:p>
+        </p:txBody>
+      </p:sp>
+    </p:spTree>
+  </p:cSld>
+</p:sldLayout>
+</file>
+
+<file path=ppt/slideLayouts/slideLayout2.xml><?xml version="1.0" encoding="utf-8"?>
 <p:sldLayout xmlns:a="http://schemas.openxmlformats.org/drawingml/2006/main" xmlns:p="http://schemas.openxmlformats.org/presentationml/2006/main" xmlns:r="http://schemas.openxmlformats.org/officeDocument/2006/relationships" xmlns:p14="http://schemas.microsoft.com/office/powerpoint/2010/main" xmlns:p15="http://schemas.microsoft.com/office/powerpoint/2012/main" xmlns:mc="http://schemas.openxmlformats.org/markup-compatibility/2006" type="title" preserve="1">
   <p:cSld name="Title Slide">
     <p:bg>
@@ -47,14 +714,14 @@
       </p:grpSpPr>
       <p:sp>
         <p:nvSpPr>
-          <p:cNvPr id="2" name="Rectangle 6"/>
+          <p:cNvPr id="10" name="Rectangle 6"/>
           <p:cNvSpPr/>
           <p:nvPr/>
         </p:nvSpPr>
         <p:spPr>
           <a:xfrm>
             <a:off x="0" y="-6480"/>
-            <a:ext cx="12191760" cy="1344240"/>
+            <a:ext cx="12191400" cy="1343880"/>
           </a:xfrm>
           <a:prstGeom prst="rect">
             <a:avLst/>
@@ -103,14 +770,14 @@
       </p:sp>
       <p:sp>
         <p:nvSpPr>
-          <p:cNvPr id="3" name="TextBox 7"/>
+          <p:cNvPr id="11" name="TextBox 7"/>
           <p:cNvSpPr/>
           <p:nvPr/>
         </p:nvSpPr>
         <p:spPr>
           <a:xfrm>
             <a:off x="2196360" y="204120"/>
-            <a:ext cx="8376840" cy="923040"/>
+            <a:ext cx="8376480" cy="922680"/>
           </a:xfrm>
           <a:prstGeom prst="rect">
             <a:avLst/>
@@ -160,7 +827,7 @@
       </p:sp>
       <p:pic>
         <p:nvPicPr>
-          <p:cNvPr id="4" name="Picture 10"/>
+          <p:cNvPr id="12" name="Picture 10"/>
           <p:cNvPicPr/>
           <p:nvPr/>
         </p:nvPicPr>
@@ -172,7 +839,7 @@
         <p:spPr>
           <a:xfrm>
             <a:off x="838080" y="19800"/>
-            <a:ext cx="1236600" cy="1291680"/>
+            <a:ext cx="1236240" cy="1291320"/>
           </a:xfrm>
           <a:prstGeom prst="rect">
             <a:avLst/>
@@ -185,7 +852,7 @@
       </p:pic>
       <p:sp>
         <p:nvSpPr>
-          <p:cNvPr id="5" name="PlaceHolder 1"/>
+          <p:cNvPr id="13" name="PlaceHolder 1"/>
           <p:cNvSpPr>
             <a:spLocks noGrp="1"/>
           </p:cNvSpPr>
@@ -196,7 +863,7 @@
         <p:spPr>
           <a:xfrm>
             <a:off x="1523880" y="1405800"/>
-            <a:ext cx="9143640" cy="2103840"/>
+            <a:ext cx="9143280" cy="2103480"/>
           </a:xfrm>
           <a:prstGeom prst="rect">
             <a:avLst/>
@@ -216,6 +883,9 @@
                 <a:spcPct val="90000"/>
               </a:lnSpc>
               <a:buNone/>
+              <a:tabLst>
+                <a:tab algn="l" pos="0"/>
+              </a:tabLst>
             </a:pPr>
             <a:r>
               <a:rPr lang="en-US" sz="6000" b="1" u="none" strike="noStrike">
@@ -228,31 +898,31 @@
               </a:rPr>
               <a:t>Click to edit Master title style</a:t>
             </a:r>
-            <a:endParaRPr lang="en-US" sz="6000" b="0" u="none" strike="noStrike">
-              <a:solidFill>
-                <a:schemeClr val="dk1"/>
-              </a:solidFill>
-              <a:effectLst/>
-              <a:uFillTx/>
-              <a:latin typeface="Calibri"/>
-            </a:endParaRPr>
-          </a:p>
-        </p:txBody>
-      </p:sp>
-      <p:sp>
-        <p:nvSpPr>
-          <p:cNvPr id="6" name="PlaceHolder 2"/>
+            <a:endParaRPr lang="en-GB" sz="6000" b="0" u="none" strike="noStrike">
+              <a:solidFill>
+                <a:srgbClr val="000000"/>
+              </a:solidFill>
+              <a:effectLst/>
+              <a:uFillTx/>
+              <a:latin typeface="Arial"/>
+            </a:endParaRPr>
+          </a:p>
+        </p:txBody>
+      </p:sp>
+      <p:sp>
+        <p:nvSpPr>
+          <p:cNvPr id="14" name="PlaceHolder 2"/>
           <p:cNvSpPr>
             <a:spLocks noGrp="1"/>
           </p:cNvSpPr>
           <p:nvPr>
-            <p:ph type="dt" idx="1"/>
+            <p:ph type="dt" idx="4"/>
           </p:nvPr>
         </p:nvSpPr>
         <p:spPr>
           <a:xfrm>
             <a:off x="838080" y="6356520"/>
-            <a:ext cx="2742840" cy="364680"/>
+            <a:ext cx="2742480" cy="364320"/>
           </a:xfrm>
           <a:prstGeom prst="rect">
             <a:avLst/>
@@ -272,6 +942,9 @@
                 <a:spcPct val="100000"/>
               </a:lnSpc>
               <a:buNone/>
+              <a:tabLst>
+                <a:tab algn="l" pos="0"/>
+              </a:tabLst>
               <a:defRPr lang="en-US" sz="1200" b="0" u="none" strike="noStrike">
                 <a:solidFill>
                   <a:schemeClr val="dk1">
@@ -290,6 +963,9 @@
                 <a:spcPct val="100000"/>
               </a:lnSpc>
               <a:buNone/>
+              <a:tabLst>
+                <a:tab algn="l" pos="0"/>
+              </a:tabLst>
             </a:pPr>
             <a:r>
               <a:rPr lang="en-US" sz="1200" b="0" u="none" strike="noStrike">
@@ -317,18 +993,18 @@
       </p:sp>
       <p:sp>
         <p:nvSpPr>
-          <p:cNvPr id="7" name="PlaceHolder 3"/>
+          <p:cNvPr id="15" name="PlaceHolder 3"/>
           <p:cNvSpPr>
             <a:spLocks noGrp="1"/>
           </p:cNvSpPr>
           <p:nvPr>
-            <p:ph type="ftr" idx="2"/>
+            <p:ph type="ftr" idx="5"/>
           </p:nvPr>
         </p:nvSpPr>
         <p:spPr>
           <a:xfrm>
             <a:off x="4038480" y="6356520"/>
-            <a:ext cx="4114440" cy="364680"/>
+            <a:ext cx="4114080" cy="364320"/>
           </a:xfrm>
           <a:prstGeom prst="rect">
             <a:avLst/>
@@ -344,7 +1020,13 @@
           </a:bodyPr>
           <a:lstStyle>
             <a:lvl1pPr indent="0" algn="ctr">
+              <a:lnSpc>
+                <a:spcPct val="100000"/>
+              </a:lnSpc>
               <a:buNone/>
+              <a:tabLst>
+                <a:tab algn="l" pos="0"/>
+              </a:tabLst>
               <a:defRPr lang="en-GB" sz="1400" b="0" u="none" strike="noStrike">
                 <a:solidFill>
                   <a:srgbClr val="000000"/>
@@ -357,7 +1039,13 @@
           </a:lstStyle>
           <a:p>
             <a:pPr indent="0" algn="ctr">
+              <a:lnSpc>
+                <a:spcPct val="100000"/>
+              </a:lnSpc>
               <a:buNone/>
+              <a:tabLst>
+                <a:tab algn="l" pos="0"/>
+              </a:tabLst>
             </a:pPr>
             <a:r>
               <a:rPr lang="en-GB" sz="1400" b="0" u="none" strike="noStrike">
@@ -383,18 +1071,18 @@
       </p:sp>
       <p:sp>
         <p:nvSpPr>
-          <p:cNvPr id="8" name="PlaceHolder 4"/>
+          <p:cNvPr id="16" name="PlaceHolder 4"/>
           <p:cNvSpPr>
             <a:spLocks noGrp="1"/>
           </p:cNvSpPr>
           <p:nvPr>
-            <p:ph type="sldNum" idx="3"/>
+            <p:ph type="sldNum" idx="6"/>
           </p:nvPr>
         </p:nvSpPr>
         <p:spPr>
           <a:xfrm>
             <a:off x="8610480" y="6356520"/>
-            <a:ext cx="2742840" cy="364680"/>
+            <a:ext cx="2742480" cy="364320"/>
           </a:xfrm>
           <a:prstGeom prst="rect">
             <a:avLst/>
@@ -414,6 +1102,9 @@
                 <a:spcPct val="100000"/>
               </a:lnSpc>
               <a:buNone/>
+              <a:tabLst>
+                <a:tab algn="l" pos="0"/>
+              </a:tabLst>
               <a:defRPr lang="en-US" sz="1200" b="0" u="none" strike="noStrike">
                 <a:solidFill>
                   <a:schemeClr val="dk1">
@@ -432,8 +1123,11 @@
                 <a:spcPct val="100000"/>
               </a:lnSpc>
               <a:buNone/>
-            </a:pPr>
-            <a:fld id="{580B2549-E9A4-447F-829D-4AC0088600F5}" type="slidenum">
+              <a:tabLst>
+                <a:tab algn="l" pos="0"/>
+              </a:tabLst>
+            </a:pPr>
+            <a:fld id="{6FDB1DAA-9555-43C5-A953-7EFD0B586186}" type="slidenum">
               <a:rPr lang="en-US" sz="1200" b="0" u="none" strike="noStrike">
                 <a:solidFill>
                   <a:schemeClr val="dk1">
@@ -459,7 +1153,7 @@
       </p:sp>
       <p:sp>
         <p:nvSpPr>
-          <p:cNvPr id="9" name="PlaceHolder 5"/>
+          <p:cNvPr id="17" name="PlaceHolder 5"/>
           <p:cNvSpPr>
             <a:spLocks noGrp="1"/>
           </p:cNvSpPr>
@@ -470,7 +1164,7 @@
         <p:spPr>
           <a:xfrm>
             <a:off x="609480" y="1604520"/>
-            <a:ext cx="10972440" cy="3977280"/>
+            <a:ext cx="10972080" cy="3976920"/>
           </a:xfrm>
           <a:prstGeom prst="rect">
             <a:avLst/>
@@ -510,13 +1204,13 @@
               </a:rPr>
               <a:t>Click to edit the outline text format</a:t>
             </a:r>
-            <a:endParaRPr lang="en-US" sz="2800" b="0" u="none" strike="noStrike">
-              <a:solidFill>
-                <a:schemeClr val="dk1"/>
-              </a:solidFill>
-              <a:effectLst/>
-              <a:uFillTx/>
-              <a:latin typeface="Calibri"/>
+            <a:endParaRPr lang="en-GB" sz="2800" b="0" u="none" strike="noStrike">
+              <a:solidFill>
+                <a:srgbClr val="000000"/>
+              </a:solidFill>
+              <a:effectLst/>
+              <a:uFillTx/>
+              <a:latin typeface="Arial"/>
             </a:endParaRPr>
           </a:p>
           <a:p>
@@ -545,13 +1239,13 @@
               </a:rPr>
               <a:t>Second Outline Level</a:t>
             </a:r>
-            <a:endParaRPr lang="en-US" sz="2000" b="0" u="none" strike="noStrike">
-              <a:solidFill>
-                <a:schemeClr val="dk1"/>
-              </a:solidFill>
-              <a:effectLst/>
-              <a:uFillTx/>
-              <a:latin typeface="Calibri"/>
+            <a:endParaRPr lang="en-GB" sz="2000" b="0" u="none" strike="noStrike">
+              <a:solidFill>
+                <a:srgbClr val="000000"/>
+              </a:solidFill>
+              <a:effectLst/>
+              <a:uFillTx/>
+              <a:latin typeface="Arial"/>
             </a:endParaRPr>
           </a:p>
           <a:p>
@@ -580,13 +1274,13 @@
               </a:rPr>
               <a:t>Third Outline Level</a:t>
             </a:r>
-            <a:endParaRPr lang="en-US" sz="1800" b="0" u="none" strike="noStrike">
-              <a:solidFill>
-                <a:schemeClr val="dk1"/>
-              </a:solidFill>
-              <a:effectLst/>
-              <a:uFillTx/>
-              <a:latin typeface="Calibri"/>
+            <a:endParaRPr lang="en-GB" sz="1800" b="0" u="none" strike="noStrike">
+              <a:solidFill>
+                <a:srgbClr val="000000"/>
+              </a:solidFill>
+              <a:effectLst/>
+              <a:uFillTx/>
+              <a:latin typeface="Arial"/>
             </a:endParaRPr>
           </a:p>
           <a:p>
@@ -615,13 +1309,13 @@
               </a:rPr>
               <a:t>Fourth Outline Level</a:t>
             </a:r>
-            <a:endParaRPr lang="en-US" sz="1800" b="0" u="none" strike="noStrike">
-              <a:solidFill>
-                <a:schemeClr val="dk1"/>
-              </a:solidFill>
-              <a:effectLst/>
-              <a:uFillTx/>
-              <a:latin typeface="Calibri"/>
+            <a:endParaRPr lang="en-GB" sz="1800" b="0" u="none" strike="noStrike">
+              <a:solidFill>
+                <a:srgbClr val="000000"/>
+              </a:solidFill>
+              <a:effectLst/>
+              <a:uFillTx/>
+              <a:latin typeface="Arial"/>
             </a:endParaRPr>
           </a:p>
           <a:p>
@@ -650,13 +1344,13 @@
               </a:rPr>
               <a:t>Fifth Outline Level</a:t>
             </a:r>
-            <a:endParaRPr lang="en-US" sz="2000" b="0" u="none" strike="noStrike">
-              <a:solidFill>
-                <a:schemeClr val="dk1"/>
-              </a:solidFill>
-              <a:effectLst/>
-              <a:uFillTx/>
-              <a:latin typeface="Calibri"/>
+            <a:endParaRPr lang="en-GB" sz="2000" b="0" u="none" strike="noStrike">
+              <a:solidFill>
+                <a:srgbClr val="000000"/>
+              </a:solidFill>
+              <a:effectLst/>
+              <a:uFillTx/>
+              <a:latin typeface="Arial"/>
             </a:endParaRPr>
           </a:p>
           <a:p>
@@ -685,13 +1379,13 @@
               </a:rPr>
               <a:t>Sixth Outline Level</a:t>
             </a:r>
-            <a:endParaRPr lang="en-US" sz="2000" b="0" u="none" strike="noStrike">
-              <a:solidFill>
-                <a:schemeClr val="dk1"/>
-              </a:solidFill>
-              <a:effectLst/>
-              <a:uFillTx/>
-              <a:latin typeface="Calibri"/>
+            <a:endParaRPr lang="en-GB" sz="2000" b="0" u="none" strike="noStrike">
+              <a:solidFill>
+                <a:srgbClr val="000000"/>
+              </a:solidFill>
+              <a:effectLst/>
+              <a:uFillTx/>
+              <a:latin typeface="Arial"/>
             </a:endParaRPr>
           </a:p>
           <a:p>
@@ -720,13 +1414,13 @@
               </a:rPr>
               <a:t>Seventh Outline Level</a:t>
             </a:r>
-            <a:endParaRPr lang="en-US" sz="2000" b="0" u="none" strike="noStrike">
-              <a:solidFill>
-                <a:schemeClr val="dk1"/>
-              </a:solidFill>
-              <a:effectLst/>
-              <a:uFillTx/>
-              <a:latin typeface="Calibri"/>
+            <a:endParaRPr lang="en-GB" sz="2000" b="0" u="none" strike="noStrike">
+              <a:solidFill>
+                <a:srgbClr val="000000"/>
+              </a:solidFill>
+              <a:effectLst/>
+              <a:uFillTx/>
+              <a:latin typeface="Arial"/>
             </a:endParaRPr>
           </a:p>
         </p:txBody>
@@ -736,7 +1430,7 @@
 </p:sldLayout>
 </file>
 
-<file path=ppt/slideLayouts/slideLayout2.xml><?xml version="1.0" encoding="utf-8"?>
+<file path=ppt/slideLayouts/slideLayout3.xml><?xml version="1.0" encoding="utf-8"?>
 <p:sldLayout xmlns:a="http://schemas.openxmlformats.org/drawingml/2006/main" xmlns:p="http://schemas.openxmlformats.org/presentationml/2006/main" xmlns:r="http://schemas.openxmlformats.org/officeDocument/2006/relationships" xmlns:p14="http://schemas.microsoft.com/office/powerpoint/2010/main" xmlns:p15="http://schemas.microsoft.com/office/powerpoint/2012/main" xmlns:mc="http://schemas.openxmlformats.org/markup-compatibility/2006" type="obj" preserve="1">
   <p:cSld name="Title and Content">
     <p:bg>
@@ -762,14 +1456,14 @@
       </p:grpSpPr>
       <p:sp>
         <p:nvSpPr>
-          <p:cNvPr id="10" name="Rectangle 6"/>
+          <p:cNvPr id="18" name="Rectangle 6"/>
           <p:cNvSpPr/>
           <p:nvPr/>
         </p:nvSpPr>
         <p:spPr>
           <a:xfrm>
             <a:off x="0" y="-6480"/>
-            <a:ext cx="12191760" cy="1344240"/>
+            <a:ext cx="12191400" cy="1343880"/>
           </a:xfrm>
           <a:prstGeom prst="rect">
             <a:avLst/>
@@ -818,14 +1512,14 @@
       </p:sp>
       <p:sp>
         <p:nvSpPr>
-          <p:cNvPr id="11" name="TextBox 7"/>
+          <p:cNvPr id="19" name="TextBox 7"/>
           <p:cNvSpPr/>
           <p:nvPr/>
         </p:nvSpPr>
         <p:spPr>
           <a:xfrm>
             <a:off x="2196360" y="204120"/>
-            <a:ext cx="8376840" cy="923040"/>
+            <a:ext cx="8376480" cy="922680"/>
           </a:xfrm>
           <a:prstGeom prst="rect">
             <a:avLst/>
@@ -875,7 +1569,7 @@
       </p:sp>
       <p:pic>
         <p:nvPicPr>
-          <p:cNvPr id="18" name="Picture 10"/>
+          <p:cNvPr id="20" name="Picture 10"/>
           <p:cNvPicPr/>
           <p:nvPr/>
         </p:nvPicPr>
@@ -887,7 +1581,7 @@
         <p:spPr>
           <a:xfrm>
             <a:off x="838080" y="19800"/>
-            <a:ext cx="1236600" cy="1291680"/>
+            <a:ext cx="1236240" cy="1291320"/>
           </a:xfrm>
           <a:prstGeom prst="rect">
             <a:avLst/>
@@ -900,7 +1594,7 @@
       </p:pic>
       <p:sp>
         <p:nvSpPr>
-          <p:cNvPr id="19" name="PlaceHolder 1"/>
+          <p:cNvPr id="21" name="PlaceHolder 1"/>
           <p:cNvSpPr>
             <a:spLocks noGrp="1"/>
           </p:cNvSpPr>
@@ -911,7 +1605,7 @@
         <p:spPr>
           <a:xfrm>
             <a:off x="838080" y="1401480"/>
-            <a:ext cx="10515240" cy="1325160"/>
+            <a:ext cx="10514880" cy="1324800"/>
           </a:xfrm>
           <a:prstGeom prst="rect">
             <a:avLst/>
@@ -931,6 +1625,9 @@
                 <a:spcPct val="90000"/>
               </a:lnSpc>
               <a:buNone/>
+              <a:tabLst>
+                <a:tab algn="l" pos="0"/>
+              </a:tabLst>
             </a:pPr>
             <a:r>
               <a:rPr lang="en-US" sz="4400" b="1" u="none" strike="noStrike">
@@ -941,55 +1638,22 @@
                 <a:uFillTx/>
                 <a:latin typeface="Calibri Light"/>
               </a:rPr>
-              <a:t>Click to </a:t>
-            </a:r>
-            <a:r>
-              <a:rPr lang="en-US" sz="4400" b="1" u="none" strike="noStrike">
-                <a:solidFill>
-                  <a:schemeClr val="dk1"/>
-                </a:solidFill>
-                <a:effectLst/>
-                <a:uFillTx/>
-                <a:latin typeface="Calibri Light"/>
-              </a:rPr>
-              <a:t>edit </a:t>
-            </a:r>
-            <a:r>
-              <a:rPr lang="en-US" sz="4400" b="1" u="none" strike="noStrike">
-                <a:solidFill>
-                  <a:schemeClr val="dk1"/>
-                </a:solidFill>
-                <a:effectLst/>
-                <a:uFillTx/>
-                <a:latin typeface="Calibri Light"/>
-              </a:rPr>
-              <a:t>Master </a:t>
-            </a:r>
-            <a:r>
-              <a:rPr lang="en-US" sz="4400" b="1" u="none" strike="noStrike">
-                <a:solidFill>
-                  <a:schemeClr val="dk1"/>
-                </a:solidFill>
-                <a:effectLst/>
-                <a:uFillTx/>
-                <a:latin typeface="Calibri Light"/>
-              </a:rPr>
-              <a:t>title style</a:t>
-            </a:r>
-            <a:endParaRPr lang="en-US" sz="4400" b="0" u="none" strike="noStrike">
-              <a:solidFill>
-                <a:schemeClr val="dk1"/>
-              </a:solidFill>
-              <a:effectLst/>
-              <a:uFillTx/>
-              <a:latin typeface="Calibri"/>
-            </a:endParaRPr>
-          </a:p>
-        </p:txBody>
-      </p:sp>
-      <p:sp>
-        <p:nvSpPr>
-          <p:cNvPr id="20" name="PlaceHolder 2"/>
+              <a:t>Click to edit Master title style</a:t>
+            </a:r>
+            <a:endParaRPr lang="en-GB" sz="4400" b="0" u="none" strike="noStrike">
+              <a:solidFill>
+                <a:srgbClr val="000000"/>
+              </a:solidFill>
+              <a:effectLst/>
+              <a:uFillTx/>
+              <a:latin typeface="Arial"/>
+            </a:endParaRPr>
+          </a:p>
+        </p:txBody>
+      </p:sp>
+      <p:sp>
+        <p:nvSpPr>
+          <p:cNvPr id="22" name="PlaceHolder 2"/>
           <p:cNvSpPr>
             <a:spLocks noGrp="1"/>
           </p:cNvSpPr>
@@ -1000,7 +1664,7 @@
         <p:spPr>
           <a:xfrm>
             <a:off x="838080" y="2727360"/>
-            <a:ext cx="10515240" cy="3449520"/>
+            <a:ext cx="10514880" cy="3449160"/>
           </a:xfrm>
           <a:prstGeom prst="rect">
             <a:avLst/>
@@ -1039,13 +1703,13 @@
               </a:rPr>
               <a:t>Edit Master text styles</a:t>
             </a:r>
-            <a:endParaRPr lang="en-US" sz="2800" b="0" u="none" strike="noStrike">
-              <a:solidFill>
-                <a:schemeClr val="dk1"/>
-              </a:solidFill>
-              <a:effectLst/>
-              <a:uFillTx/>
-              <a:latin typeface="Calibri"/>
+            <a:endParaRPr lang="en-GB" sz="2800" b="0" u="none" strike="noStrike">
+              <a:solidFill>
+                <a:srgbClr val="000000"/>
+              </a:solidFill>
+              <a:effectLst/>
+              <a:uFillTx/>
+              <a:latin typeface="Arial"/>
             </a:endParaRPr>
           </a:p>
           <a:p>
@@ -1073,13 +1737,13 @@
               </a:rPr>
               <a:t>Second level</a:t>
             </a:r>
-            <a:endParaRPr lang="en-US" sz="2400" b="0" u="none" strike="noStrike">
-              <a:solidFill>
-                <a:schemeClr val="dk1"/>
-              </a:solidFill>
-              <a:effectLst/>
-              <a:uFillTx/>
-              <a:latin typeface="Calibri"/>
+            <a:endParaRPr lang="en-GB" sz="2400" b="0" u="none" strike="noStrike">
+              <a:solidFill>
+                <a:srgbClr val="000000"/>
+              </a:solidFill>
+              <a:effectLst/>
+              <a:uFillTx/>
+              <a:latin typeface="Arial"/>
             </a:endParaRPr>
           </a:p>
           <a:p>
@@ -1107,13 +1771,13 @@
               </a:rPr>
               <a:t>Third level</a:t>
             </a:r>
-            <a:endParaRPr lang="en-US" sz="2000" b="0" u="none" strike="noStrike">
-              <a:solidFill>
-                <a:schemeClr val="dk1"/>
-              </a:solidFill>
-              <a:effectLst/>
-              <a:uFillTx/>
-              <a:latin typeface="Calibri"/>
+            <a:endParaRPr lang="en-GB" sz="2000" b="0" u="none" strike="noStrike">
+              <a:solidFill>
+                <a:srgbClr val="000000"/>
+              </a:solidFill>
+              <a:effectLst/>
+              <a:uFillTx/>
+              <a:latin typeface="Arial"/>
             </a:endParaRPr>
           </a:p>
           <a:p>
@@ -1141,13 +1805,13 @@
               </a:rPr>
               <a:t>Fourth level</a:t>
             </a:r>
-            <a:endParaRPr lang="en-US" sz="1800" b="0" u="none" strike="noStrike">
-              <a:solidFill>
-                <a:schemeClr val="dk1"/>
-              </a:solidFill>
-              <a:effectLst/>
-              <a:uFillTx/>
-              <a:latin typeface="Calibri"/>
+            <a:endParaRPr lang="en-GB" sz="1800" b="0" u="none" strike="noStrike">
+              <a:solidFill>
+                <a:srgbClr val="000000"/>
+              </a:solidFill>
+              <a:effectLst/>
+              <a:uFillTx/>
+              <a:latin typeface="Arial"/>
             </a:endParaRPr>
           </a:p>
           <a:p>
@@ -1175,20 +1839,20 @@
               </a:rPr>
               <a:t>Fifth level</a:t>
             </a:r>
-            <a:endParaRPr lang="en-US" sz="1800" b="0" u="none" strike="noStrike">
-              <a:solidFill>
-                <a:schemeClr val="dk1"/>
-              </a:solidFill>
-              <a:effectLst/>
-              <a:uFillTx/>
-              <a:latin typeface="Calibri"/>
-            </a:endParaRPr>
-          </a:p>
-        </p:txBody>
-      </p:sp>
-      <p:sp>
-        <p:nvSpPr>
-          <p:cNvPr id="21" name="PlaceHolder 3"/>
+            <a:endParaRPr lang="en-GB" sz="1800" b="0" u="none" strike="noStrike">
+              <a:solidFill>
+                <a:srgbClr val="000000"/>
+              </a:solidFill>
+              <a:effectLst/>
+              <a:uFillTx/>
+              <a:latin typeface="Arial"/>
+            </a:endParaRPr>
+          </a:p>
+        </p:txBody>
+      </p:sp>
+      <p:sp>
+        <p:nvSpPr>
+          <p:cNvPr id="23" name="PlaceHolder 3"/>
           <p:cNvSpPr>
             <a:spLocks noGrp="1"/>
           </p:cNvSpPr>
@@ -1199,7 +1863,7 @@
         <p:spPr>
           <a:xfrm>
             <a:off x="838080" y="6356520"/>
-            <a:ext cx="2742840" cy="364680"/>
+            <a:ext cx="2742480" cy="364320"/>
           </a:xfrm>
           <a:prstGeom prst="rect">
             <a:avLst/>
@@ -1219,6 +1883,9 @@
                 <a:spcPct val="100000"/>
               </a:lnSpc>
               <a:buNone/>
+              <a:tabLst>
+                <a:tab algn="l" pos="0"/>
+              </a:tabLst>
               <a:defRPr lang="en-US" sz="1200" b="0" u="none" strike="noStrike">
                 <a:solidFill>
                   <a:schemeClr val="dk1">
@@ -1237,6 +1904,9 @@
                 <a:spcPct val="100000"/>
               </a:lnSpc>
               <a:buNone/>
+              <a:tabLst>
+                <a:tab algn="l" pos="0"/>
+              </a:tabLst>
             </a:pPr>
             <a:r>
               <a:rPr lang="en-US" sz="1200" b="0" u="none" strike="noStrike">
@@ -1264,7 +1934,7 @@
       </p:sp>
       <p:sp>
         <p:nvSpPr>
-          <p:cNvPr id="22" name="PlaceHolder 4"/>
+          <p:cNvPr id="24" name="PlaceHolder 4"/>
           <p:cNvSpPr>
             <a:spLocks noGrp="1"/>
           </p:cNvSpPr>
@@ -1275,7 +1945,7 @@
         <p:spPr>
           <a:xfrm>
             <a:off x="4038480" y="6356520"/>
-            <a:ext cx="4114440" cy="364680"/>
+            <a:ext cx="4114080" cy="364320"/>
           </a:xfrm>
           <a:prstGeom prst="rect">
             <a:avLst/>
@@ -1291,7 +1961,13 @@
           </a:bodyPr>
           <a:lstStyle>
             <a:lvl1pPr indent="0" algn="ctr">
+              <a:lnSpc>
+                <a:spcPct val="100000"/>
+              </a:lnSpc>
               <a:buNone/>
+              <a:tabLst>
+                <a:tab algn="l" pos="0"/>
+              </a:tabLst>
               <a:defRPr lang="en-GB" sz="1400" b="0" u="none" strike="noStrike">
                 <a:solidFill>
                   <a:srgbClr val="000000"/>
@@ -1304,7 +1980,13 @@
           </a:lstStyle>
           <a:p>
             <a:pPr indent="0" algn="ctr">
+              <a:lnSpc>
+                <a:spcPct val="100000"/>
+              </a:lnSpc>
               <a:buNone/>
+              <a:tabLst>
+                <a:tab algn="l" pos="0"/>
+              </a:tabLst>
             </a:pPr>
             <a:r>
               <a:rPr lang="en-GB" sz="1400" b="0" u="none" strike="noStrike">
@@ -1330,7 +2012,7 @@
       </p:sp>
       <p:sp>
         <p:nvSpPr>
-          <p:cNvPr id="23" name="PlaceHolder 5"/>
+          <p:cNvPr id="25" name="PlaceHolder 5"/>
           <p:cNvSpPr>
             <a:spLocks noGrp="1"/>
           </p:cNvSpPr>
@@ -1341,7 +2023,7 @@
         <p:spPr>
           <a:xfrm>
             <a:off x="8610480" y="6356520"/>
-            <a:ext cx="2742840" cy="364680"/>
+            <a:ext cx="2742480" cy="364320"/>
           </a:xfrm>
           <a:prstGeom prst="rect">
             <a:avLst/>
@@ -1361,6 +2043,9 @@
                 <a:spcPct val="100000"/>
               </a:lnSpc>
               <a:buNone/>
+              <a:tabLst>
+                <a:tab algn="l" pos="0"/>
+              </a:tabLst>
               <a:defRPr lang="en-US" sz="1200" b="0" u="none" strike="noStrike">
                 <a:solidFill>
                   <a:schemeClr val="dk1">
@@ -1379,8 +2064,11 @@
                 <a:spcPct val="100000"/>
               </a:lnSpc>
               <a:buNone/>
-            </a:pPr>
-            <a:fld id="{8A96C648-C4E6-4678-ADE1-FBE557B5AD70}" type="slidenum">
+              <a:tabLst>
+                <a:tab algn="l" pos="0"/>
+              </a:tabLst>
+            </a:pPr>
+            <a:fld id="{F64CB943-2F48-4A78-8ECD-F4CE7FA14DDF}" type="slidenum">
               <a:rPr lang="en-US" sz="1200" b="0" u="none" strike="noStrike">
                 <a:solidFill>
                   <a:schemeClr val="dk1">
@@ -1409,9 +2097,9 @@
 </p:sldLayout>
 </file>
 
-<file path=ppt/slideLayouts/slideLayout3.xml><?xml version="1.0" encoding="utf-8"?>
+<file path=ppt/slideLayouts/slideLayout4.xml><?xml version="1.0" encoding="utf-8"?>
 <p:sldLayout xmlns:a="http://schemas.openxmlformats.org/drawingml/2006/main" xmlns:p="http://schemas.openxmlformats.org/presentationml/2006/main" xmlns:r="http://schemas.openxmlformats.org/officeDocument/2006/relationships" xmlns:p14="http://schemas.microsoft.com/office/powerpoint/2010/main" xmlns:p15="http://schemas.microsoft.com/office/powerpoint/2012/main" xmlns:mc="http://schemas.openxmlformats.org/markup-compatibility/2006" type="tx" preserve="1">
-  <p:cSld name="Title and Content">
+  <p:cSld name="Default">
     <p:bg>
       <p:bgPr>
         <a:solidFill>
@@ -1435,14 +2123,14 @@
       </p:grpSpPr>
       <p:sp>
         <p:nvSpPr>
-          <p:cNvPr id="10" name="Rectangle 6"/>
+          <p:cNvPr id="26" name="Rectangle 6"/>
           <p:cNvSpPr/>
           <p:nvPr/>
         </p:nvSpPr>
         <p:spPr>
           <a:xfrm>
             <a:off x="0" y="-6480"/>
-            <a:ext cx="12191760" cy="1344240"/>
+            <a:ext cx="12191400" cy="1343880"/>
           </a:xfrm>
           <a:prstGeom prst="rect">
             <a:avLst/>
@@ -1491,14 +2179,14 @@
       </p:sp>
       <p:sp>
         <p:nvSpPr>
-          <p:cNvPr id="11" name="TextBox 7"/>
+          <p:cNvPr id="27" name="TextBox 7"/>
           <p:cNvSpPr/>
           <p:nvPr/>
         </p:nvSpPr>
         <p:spPr>
           <a:xfrm>
             <a:off x="2196360" y="204120"/>
-            <a:ext cx="8376840" cy="923040"/>
+            <a:ext cx="8376480" cy="922680"/>
           </a:xfrm>
           <a:prstGeom prst="rect">
             <a:avLst/>
@@ -1548,7 +2236,7 @@
       </p:sp>
       <p:pic>
         <p:nvPicPr>
-          <p:cNvPr id="12" name="Picture 10"/>
+          <p:cNvPr id="28" name="Picture 10"/>
           <p:cNvPicPr/>
           <p:nvPr/>
         </p:nvPicPr>
@@ -1560,7 +2248,7 @@
         <p:spPr>
           <a:xfrm>
             <a:off x="838080" y="19800"/>
-            <a:ext cx="1236600" cy="1291680"/>
+            <a:ext cx="1236240" cy="1291320"/>
           </a:xfrm>
           <a:prstGeom prst="rect">
             <a:avLst/>
@@ -1573,7 +2261,7 @@
       </p:pic>
       <p:sp>
         <p:nvSpPr>
-          <p:cNvPr id="13" name="PlaceHolder 1"/>
+          <p:cNvPr id="29" name="PlaceHolder 1"/>
           <p:cNvSpPr>
             <a:spLocks noGrp="1"/>
           </p:cNvSpPr>
@@ -1584,7 +2272,7 @@
         <p:spPr>
           <a:xfrm>
             <a:off x="838080" y="1401480"/>
-            <a:ext cx="10515240" cy="1325160"/>
+            <a:ext cx="10514880" cy="1324800"/>
           </a:xfrm>
           <a:prstGeom prst="rect">
             <a:avLst/>
@@ -1604,6 +2292,9 @@
                 <a:spcPct val="90000"/>
               </a:lnSpc>
               <a:buNone/>
+              <a:tabLst>
+                <a:tab algn="l" pos="0"/>
+              </a:tabLst>
             </a:pPr>
             <a:r>
               <a:rPr lang="en-US" sz="4400" b="1" u="none" strike="noStrike">
@@ -1614,55 +2305,22 @@
                 <a:uFillTx/>
                 <a:latin typeface="Calibri Light"/>
               </a:rPr>
-              <a:t>Click to </a:t>
-            </a:r>
-            <a:r>
-              <a:rPr lang="en-US" sz="4400" b="1" u="none" strike="noStrike">
-                <a:solidFill>
-                  <a:schemeClr val="dk1"/>
-                </a:solidFill>
-                <a:effectLst/>
-                <a:uFillTx/>
-                <a:latin typeface="Calibri Light"/>
-              </a:rPr>
-              <a:t>edit </a:t>
-            </a:r>
-            <a:r>
-              <a:rPr lang="en-US" sz="4400" b="1" u="none" strike="noStrike">
-                <a:solidFill>
-                  <a:schemeClr val="dk1"/>
-                </a:solidFill>
-                <a:effectLst/>
-                <a:uFillTx/>
-                <a:latin typeface="Calibri Light"/>
-              </a:rPr>
-              <a:t>Master </a:t>
-            </a:r>
-            <a:r>
-              <a:rPr lang="en-US" sz="4400" b="1" u="none" strike="noStrike">
-                <a:solidFill>
-                  <a:schemeClr val="dk1"/>
-                </a:solidFill>
-                <a:effectLst/>
-                <a:uFillTx/>
-                <a:latin typeface="Calibri Light"/>
-              </a:rPr>
-              <a:t>title style</a:t>
-            </a:r>
-            <a:endParaRPr lang="en-US" sz="4400" b="0" u="none" strike="noStrike">
-              <a:solidFill>
-                <a:schemeClr val="dk1"/>
-              </a:solidFill>
-              <a:effectLst/>
-              <a:uFillTx/>
-              <a:latin typeface="Calibri"/>
-            </a:endParaRPr>
-          </a:p>
-        </p:txBody>
-      </p:sp>
-      <p:sp>
-        <p:nvSpPr>
-          <p:cNvPr id="14" name="PlaceHolder 2"/>
+              <a:t>Click to edit Master title style</a:t>
+            </a:r>
+            <a:endParaRPr lang="en-GB" sz="4400" b="0" u="none" strike="noStrike">
+              <a:solidFill>
+                <a:srgbClr val="000000"/>
+              </a:solidFill>
+              <a:effectLst/>
+              <a:uFillTx/>
+              <a:latin typeface="Arial"/>
+            </a:endParaRPr>
+          </a:p>
+        </p:txBody>
+      </p:sp>
+      <p:sp>
+        <p:nvSpPr>
+          <p:cNvPr id="30" name="PlaceHolder 2"/>
           <p:cNvSpPr>
             <a:spLocks noGrp="1"/>
           </p:cNvSpPr>
@@ -1673,7 +2331,7 @@
         <p:spPr>
           <a:xfrm>
             <a:off x="838080" y="2727360"/>
-            <a:ext cx="10515240" cy="3449520"/>
+            <a:ext cx="10514880" cy="3449160"/>
           </a:xfrm>
           <a:prstGeom prst="rect">
             <a:avLst/>
@@ -1712,13 +2370,13 @@
               </a:rPr>
               <a:t>Edit Master text styles</a:t>
             </a:r>
-            <a:endParaRPr lang="en-US" sz="2800" b="0" u="none" strike="noStrike">
-              <a:solidFill>
-                <a:schemeClr val="dk1"/>
-              </a:solidFill>
-              <a:effectLst/>
-              <a:uFillTx/>
-              <a:latin typeface="Calibri"/>
+            <a:endParaRPr lang="en-GB" sz="2800" b="0" u="none" strike="noStrike">
+              <a:solidFill>
+                <a:srgbClr val="000000"/>
+              </a:solidFill>
+              <a:effectLst/>
+              <a:uFillTx/>
+              <a:latin typeface="Arial"/>
             </a:endParaRPr>
           </a:p>
           <a:p>
@@ -1746,13 +2404,13 @@
               </a:rPr>
               <a:t>Second level</a:t>
             </a:r>
-            <a:endParaRPr lang="en-US" sz="2400" b="0" u="none" strike="noStrike">
-              <a:solidFill>
-                <a:schemeClr val="dk1"/>
-              </a:solidFill>
-              <a:effectLst/>
-              <a:uFillTx/>
-              <a:latin typeface="Calibri"/>
+            <a:endParaRPr lang="en-GB" sz="2400" b="0" u="none" strike="noStrike">
+              <a:solidFill>
+                <a:srgbClr val="000000"/>
+              </a:solidFill>
+              <a:effectLst/>
+              <a:uFillTx/>
+              <a:latin typeface="Arial"/>
             </a:endParaRPr>
           </a:p>
           <a:p>
@@ -1780,13 +2438,13 @@
               </a:rPr>
               <a:t>Third level</a:t>
             </a:r>
-            <a:endParaRPr lang="en-US" sz="2000" b="0" u="none" strike="noStrike">
-              <a:solidFill>
-                <a:schemeClr val="dk1"/>
-              </a:solidFill>
-              <a:effectLst/>
-              <a:uFillTx/>
-              <a:latin typeface="Calibri"/>
+            <a:endParaRPr lang="en-GB" sz="2000" b="0" u="none" strike="noStrike">
+              <a:solidFill>
+                <a:srgbClr val="000000"/>
+              </a:solidFill>
+              <a:effectLst/>
+              <a:uFillTx/>
+              <a:latin typeface="Arial"/>
             </a:endParaRPr>
           </a:p>
           <a:p>
@@ -1814,13 +2472,13 @@
               </a:rPr>
               <a:t>Fourth level</a:t>
             </a:r>
-            <a:endParaRPr lang="en-US" sz="1800" b="0" u="none" strike="noStrike">
-              <a:solidFill>
-                <a:schemeClr val="dk1"/>
-              </a:solidFill>
-              <a:effectLst/>
-              <a:uFillTx/>
-              <a:latin typeface="Calibri"/>
+            <a:endParaRPr lang="en-GB" sz="1800" b="0" u="none" strike="noStrike">
+              <a:solidFill>
+                <a:srgbClr val="000000"/>
+              </a:solidFill>
+              <a:effectLst/>
+              <a:uFillTx/>
+              <a:latin typeface="Arial"/>
             </a:endParaRPr>
           </a:p>
           <a:p>
@@ -1848,31 +2506,31 @@
               </a:rPr>
               <a:t>Fifth level</a:t>
             </a:r>
-            <a:endParaRPr lang="en-US" sz="1800" b="0" u="none" strike="noStrike">
-              <a:solidFill>
-                <a:schemeClr val="dk1"/>
-              </a:solidFill>
-              <a:effectLst/>
-              <a:uFillTx/>
-              <a:latin typeface="Calibri"/>
-            </a:endParaRPr>
-          </a:p>
-        </p:txBody>
-      </p:sp>
-      <p:sp>
-        <p:nvSpPr>
-          <p:cNvPr id="15" name="PlaceHolder 3"/>
+            <a:endParaRPr lang="en-GB" sz="1800" b="0" u="none" strike="noStrike">
+              <a:solidFill>
+                <a:srgbClr val="000000"/>
+              </a:solidFill>
+              <a:effectLst/>
+              <a:uFillTx/>
+              <a:latin typeface="Arial"/>
+            </a:endParaRPr>
+          </a:p>
+        </p:txBody>
+      </p:sp>
+      <p:sp>
+        <p:nvSpPr>
+          <p:cNvPr id="31" name="PlaceHolder 3"/>
           <p:cNvSpPr>
             <a:spLocks noGrp="1"/>
           </p:cNvSpPr>
           <p:nvPr>
-            <p:ph type="dt" idx="4"/>
+            <p:ph type="dt" idx="10"/>
           </p:nvPr>
         </p:nvSpPr>
         <p:spPr>
           <a:xfrm>
             <a:off x="838080" y="6356520"/>
-            <a:ext cx="2742840" cy="364680"/>
+            <a:ext cx="2742480" cy="364320"/>
           </a:xfrm>
           <a:prstGeom prst="rect">
             <a:avLst/>
@@ -1892,6 +2550,9 @@
                 <a:spcPct val="100000"/>
               </a:lnSpc>
               <a:buNone/>
+              <a:tabLst>
+                <a:tab algn="l" pos="0"/>
+              </a:tabLst>
               <a:defRPr lang="en-US" sz="1200" b="0" u="none" strike="noStrike">
                 <a:solidFill>
                   <a:schemeClr val="dk1">
@@ -1910,6 +2571,9 @@
                 <a:spcPct val="100000"/>
               </a:lnSpc>
               <a:buNone/>
+              <a:tabLst>
+                <a:tab algn="l" pos="0"/>
+              </a:tabLst>
             </a:pPr>
             <a:r>
               <a:rPr lang="en-US" sz="1200" b="0" u="none" strike="noStrike">
@@ -1937,18 +2601,18 @@
       </p:sp>
       <p:sp>
         <p:nvSpPr>
-          <p:cNvPr id="16" name="PlaceHolder 4"/>
+          <p:cNvPr id="32" name="PlaceHolder 4"/>
           <p:cNvSpPr>
             <a:spLocks noGrp="1"/>
           </p:cNvSpPr>
           <p:nvPr>
-            <p:ph type="ftr" idx="5"/>
+            <p:ph type="ftr" idx="11"/>
           </p:nvPr>
         </p:nvSpPr>
         <p:spPr>
           <a:xfrm>
             <a:off x="4038480" y="6356520"/>
-            <a:ext cx="4114440" cy="364680"/>
+            <a:ext cx="4114080" cy="364320"/>
           </a:xfrm>
           <a:prstGeom prst="rect">
             <a:avLst/>
@@ -1964,7 +2628,13 @@
           </a:bodyPr>
           <a:lstStyle>
             <a:lvl1pPr indent="0" algn="ctr">
+              <a:lnSpc>
+                <a:spcPct val="100000"/>
+              </a:lnSpc>
               <a:buNone/>
+              <a:tabLst>
+                <a:tab algn="l" pos="0"/>
+              </a:tabLst>
               <a:defRPr lang="en-GB" sz="1400" b="0" u="none" strike="noStrike">
                 <a:solidFill>
                   <a:srgbClr val="000000"/>
@@ -1977,7 +2647,13 @@
           </a:lstStyle>
           <a:p>
             <a:pPr indent="0" algn="ctr">
+              <a:lnSpc>
+                <a:spcPct val="100000"/>
+              </a:lnSpc>
               <a:buNone/>
+              <a:tabLst>
+                <a:tab algn="l" pos="0"/>
+              </a:tabLst>
             </a:pPr>
             <a:r>
               <a:rPr lang="en-GB" sz="1400" b="0" u="none" strike="noStrike">
@@ -2003,18 +2679,18 @@
       </p:sp>
       <p:sp>
         <p:nvSpPr>
-          <p:cNvPr id="17" name="PlaceHolder 5"/>
+          <p:cNvPr id="33" name="PlaceHolder 5"/>
           <p:cNvSpPr>
             <a:spLocks noGrp="1"/>
           </p:cNvSpPr>
           <p:nvPr>
-            <p:ph type="sldNum" idx="6"/>
+            <p:ph type="sldNum" idx="12"/>
           </p:nvPr>
         </p:nvSpPr>
         <p:spPr>
           <a:xfrm>
             <a:off x="8610480" y="6356520"/>
-            <a:ext cx="2742840" cy="364680"/>
+            <a:ext cx="2742480" cy="364320"/>
           </a:xfrm>
           <a:prstGeom prst="rect">
             <a:avLst/>
@@ -2034,6 +2710,9 @@
                 <a:spcPct val="100000"/>
               </a:lnSpc>
               <a:buNone/>
+              <a:tabLst>
+                <a:tab algn="l" pos="0"/>
+              </a:tabLst>
               <a:defRPr lang="en-US" sz="1200" b="0" u="none" strike="noStrike">
                 <a:solidFill>
                   <a:schemeClr val="dk1">
@@ -2052,8 +2731,11 @@
                 <a:spcPct val="100000"/>
               </a:lnSpc>
               <a:buNone/>
-            </a:pPr>
-            <a:fld id="{045F0FF5-44AC-45F7-9D6C-5D228180D4DB}" type="slidenum">
+              <a:tabLst>
+                <a:tab algn="l" pos="0"/>
+              </a:tabLst>
+            </a:pPr>
+            <a:fld id="{545E7588-53E5-4844-9566-E215DA084F7D}" type="slidenum">
               <a:rPr lang="en-US" sz="1200" b="0" u="none" strike="noStrike">
                 <a:solidFill>
                   <a:schemeClr val="dk1">
@@ -2082,7 +2764,7 @@
 </p:sldLayout>
 </file>
 
-<file path=ppt/slideLayouts/slideLayout4.xml><?xml version="1.0" encoding="utf-8"?>
+<file path=ppt/slideLayouts/slideLayout5.xml><?xml version="1.0" encoding="utf-8"?>
 <p:sldLayout xmlns:a="http://schemas.openxmlformats.org/drawingml/2006/main" xmlns:p="http://schemas.openxmlformats.org/presentationml/2006/main" xmlns:r="http://schemas.openxmlformats.org/officeDocument/2006/relationships" xmlns:p14="http://schemas.microsoft.com/office/powerpoint/2010/main" xmlns:p15="http://schemas.microsoft.com/office/powerpoint/2012/main" xmlns:mc="http://schemas.openxmlformats.org/markup-compatibility/2006" type="blank" preserve="1">
   <p:cSld name="Section Header">
     <p:bg>
@@ -2108,14 +2790,14 @@
       </p:grpSpPr>
       <p:sp>
         <p:nvSpPr>
-          <p:cNvPr id="24" name="Rectangle 6"/>
+          <p:cNvPr id="34" name="Rectangle 6"/>
           <p:cNvSpPr/>
           <p:nvPr/>
         </p:nvSpPr>
         <p:spPr>
           <a:xfrm>
             <a:off x="0" y="-6480"/>
-            <a:ext cx="12191760" cy="1344240"/>
+            <a:ext cx="12191400" cy="1343880"/>
           </a:xfrm>
           <a:prstGeom prst="rect">
             <a:avLst/>
@@ -2164,14 +2846,14 @@
       </p:sp>
       <p:sp>
         <p:nvSpPr>
-          <p:cNvPr id="25" name="TextBox 7"/>
+          <p:cNvPr id="35" name="TextBox 7"/>
           <p:cNvSpPr/>
           <p:nvPr/>
         </p:nvSpPr>
         <p:spPr>
           <a:xfrm>
             <a:off x="2196360" y="204120"/>
-            <a:ext cx="8376840" cy="923040"/>
+            <a:ext cx="8376480" cy="922680"/>
           </a:xfrm>
           <a:prstGeom prst="rect">
             <a:avLst/>
@@ -2221,7 +2903,7 @@
       </p:sp>
       <p:pic>
         <p:nvPicPr>
-          <p:cNvPr id="26" name="Picture 10"/>
+          <p:cNvPr id="36" name="Picture 10"/>
           <p:cNvPicPr/>
           <p:nvPr/>
         </p:nvPicPr>
@@ -2233,7 +2915,7 @@
         <p:spPr>
           <a:xfrm>
             <a:off x="838080" y="19800"/>
-            <a:ext cx="1236600" cy="1291680"/>
+            <a:ext cx="1236240" cy="1291320"/>
           </a:xfrm>
           <a:prstGeom prst="rect">
             <a:avLst/>
@@ -2246,7 +2928,7 @@
       </p:pic>
       <p:sp>
         <p:nvSpPr>
-          <p:cNvPr id="27" name="PlaceHolder 1"/>
+          <p:cNvPr id="37" name="PlaceHolder 1"/>
           <p:cNvSpPr>
             <a:spLocks noGrp="1"/>
           </p:cNvSpPr>
@@ -2257,7 +2939,7 @@
         <p:spPr>
           <a:xfrm>
             <a:off x="831960" y="1709640"/>
-            <a:ext cx="10515240" cy="2852280"/>
+            <a:ext cx="10514880" cy="2851920"/>
           </a:xfrm>
           <a:prstGeom prst="rect">
             <a:avLst/>
@@ -2277,6 +2959,9 @@
                 <a:spcPct val="90000"/>
               </a:lnSpc>
               <a:buNone/>
+              <a:tabLst>
+                <a:tab algn="l" pos="0"/>
+              </a:tabLst>
             </a:pPr>
             <a:r>
               <a:rPr lang="en-US" sz="6000" b="1" u="none" strike="noStrike">
@@ -2289,20 +2974,20 @@
               </a:rPr>
               <a:t>Click to edit Master title style</a:t>
             </a:r>
-            <a:endParaRPr lang="en-US" sz="6000" b="0" u="none" strike="noStrike">
-              <a:solidFill>
-                <a:schemeClr val="dk1"/>
-              </a:solidFill>
-              <a:effectLst/>
-              <a:uFillTx/>
-              <a:latin typeface="Calibri"/>
-            </a:endParaRPr>
-          </a:p>
-        </p:txBody>
-      </p:sp>
-      <p:sp>
-        <p:nvSpPr>
-          <p:cNvPr id="28" name="PlaceHolder 2"/>
+            <a:endParaRPr lang="en-GB" sz="6000" b="0" u="none" strike="noStrike">
+              <a:solidFill>
+                <a:srgbClr val="000000"/>
+              </a:solidFill>
+              <a:effectLst/>
+              <a:uFillTx/>
+              <a:latin typeface="Arial"/>
+            </a:endParaRPr>
+          </a:p>
+        </p:txBody>
+      </p:sp>
+      <p:sp>
+        <p:nvSpPr>
+          <p:cNvPr id="38" name="PlaceHolder 2"/>
           <p:cNvSpPr>
             <a:spLocks noGrp="1"/>
           </p:cNvSpPr>
@@ -2313,7 +2998,7 @@
         <p:spPr>
           <a:xfrm>
             <a:off x="831960" y="4589640"/>
-            <a:ext cx="10515240" cy="1499760"/>
+            <a:ext cx="10514880" cy="1499400"/>
           </a:xfrm>
           <a:prstGeom prst="rect">
             <a:avLst/>
@@ -2353,31 +3038,31 @@
               </a:rPr>
               <a:t>Edit Master text styles</a:t>
             </a:r>
-            <a:endParaRPr lang="en-US" sz="2400" b="0" u="none" strike="noStrike">
-              <a:solidFill>
-                <a:schemeClr val="dk1"/>
-              </a:solidFill>
-              <a:effectLst/>
-              <a:uFillTx/>
-              <a:latin typeface="Calibri"/>
-            </a:endParaRPr>
-          </a:p>
-        </p:txBody>
-      </p:sp>
-      <p:sp>
-        <p:nvSpPr>
-          <p:cNvPr id="29" name="PlaceHolder 3"/>
+            <a:endParaRPr lang="en-GB" sz="2400" b="0" u="none" strike="noStrike">
+              <a:solidFill>
+                <a:srgbClr val="000000"/>
+              </a:solidFill>
+              <a:effectLst/>
+              <a:uFillTx/>
+              <a:latin typeface="Arial"/>
+            </a:endParaRPr>
+          </a:p>
+        </p:txBody>
+      </p:sp>
+      <p:sp>
+        <p:nvSpPr>
+          <p:cNvPr id="39" name="PlaceHolder 3"/>
           <p:cNvSpPr>
             <a:spLocks noGrp="1"/>
           </p:cNvSpPr>
           <p:nvPr>
-            <p:ph type="dt" idx="10"/>
+            <p:ph type="dt" idx="13"/>
           </p:nvPr>
         </p:nvSpPr>
         <p:spPr>
           <a:xfrm>
             <a:off x="838080" y="6356520"/>
-            <a:ext cx="2742840" cy="364680"/>
+            <a:ext cx="2742480" cy="364320"/>
           </a:xfrm>
           <a:prstGeom prst="rect">
             <a:avLst/>
@@ -2397,6 +3082,9 @@
                 <a:spcPct val="100000"/>
               </a:lnSpc>
               <a:buNone/>
+              <a:tabLst>
+                <a:tab algn="l" pos="0"/>
+              </a:tabLst>
               <a:defRPr lang="en-US" sz="1200" b="0" u="none" strike="noStrike">
                 <a:solidFill>
                   <a:schemeClr val="dk1">
@@ -2415,6 +3103,9 @@
                 <a:spcPct val="100000"/>
               </a:lnSpc>
               <a:buNone/>
+              <a:tabLst>
+                <a:tab algn="l" pos="0"/>
+              </a:tabLst>
             </a:pPr>
             <a:r>
               <a:rPr lang="en-US" sz="1200" b="0" u="none" strike="noStrike">
@@ -2442,18 +3133,18 @@
       </p:sp>
       <p:sp>
         <p:nvSpPr>
-          <p:cNvPr id="30" name="PlaceHolder 4"/>
+          <p:cNvPr id="40" name="PlaceHolder 4"/>
           <p:cNvSpPr>
             <a:spLocks noGrp="1"/>
           </p:cNvSpPr>
           <p:nvPr>
-            <p:ph type="ftr" idx="11"/>
+            <p:ph type="ftr" idx="14"/>
           </p:nvPr>
         </p:nvSpPr>
         <p:spPr>
           <a:xfrm>
             <a:off x="4038480" y="6356520"/>
-            <a:ext cx="4114440" cy="364680"/>
+            <a:ext cx="4114080" cy="364320"/>
           </a:xfrm>
           <a:prstGeom prst="rect">
             <a:avLst/>
@@ -2469,7 +3160,13 @@
           </a:bodyPr>
           <a:lstStyle>
             <a:lvl1pPr indent="0" algn="ctr">
+              <a:lnSpc>
+                <a:spcPct val="100000"/>
+              </a:lnSpc>
               <a:buNone/>
+              <a:tabLst>
+                <a:tab algn="l" pos="0"/>
+              </a:tabLst>
               <a:defRPr lang="en-GB" sz="1400" b="0" u="none" strike="noStrike">
                 <a:solidFill>
                   <a:srgbClr val="000000"/>
@@ -2482,7 +3179,13 @@
           </a:lstStyle>
           <a:p>
             <a:pPr indent="0" algn="ctr">
+              <a:lnSpc>
+                <a:spcPct val="100000"/>
+              </a:lnSpc>
               <a:buNone/>
+              <a:tabLst>
+                <a:tab algn="l" pos="0"/>
+              </a:tabLst>
             </a:pPr>
             <a:r>
               <a:rPr lang="en-GB" sz="1400" b="0" u="none" strike="noStrike">
@@ -2508,18 +3211,18 @@
       </p:sp>
       <p:sp>
         <p:nvSpPr>
-          <p:cNvPr id="31" name="PlaceHolder 5"/>
+          <p:cNvPr id="41" name="PlaceHolder 5"/>
           <p:cNvSpPr>
             <a:spLocks noGrp="1"/>
           </p:cNvSpPr>
           <p:nvPr>
-            <p:ph type="sldNum" idx="12"/>
+            <p:ph type="sldNum" idx="15"/>
           </p:nvPr>
         </p:nvSpPr>
         <p:spPr>
           <a:xfrm>
             <a:off x="8610480" y="6356520"/>
-            <a:ext cx="2742840" cy="364680"/>
+            <a:ext cx="2742480" cy="364320"/>
           </a:xfrm>
           <a:prstGeom prst="rect">
             <a:avLst/>
@@ -2539,6 +3242,9 @@
                 <a:spcPct val="100000"/>
               </a:lnSpc>
               <a:buNone/>
+              <a:tabLst>
+                <a:tab algn="l" pos="0"/>
+              </a:tabLst>
               <a:defRPr lang="en-US" sz="1200" b="0" u="none" strike="noStrike">
                 <a:solidFill>
                   <a:schemeClr val="dk1">
@@ -2557,8 +3263,11 @@
                 <a:spcPct val="100000"/>
               </a:lnSpc>
               <a:buNone/>
-            </a:pPr>
-            <a:fld id="{14FE7384-B554-44D8-AF88-9820A7B95A80}" type="slidenum">
+              <a:tabLst>
+                <a:tab algn="l" pos="0"/>
+              </a:tabLst>
+            </a:pPr>
+            <a:fld id="{131C0056-4AE5-4F6F-8015-25F564003FE3}" type="slidenum">
               <a:rPr lang="en-US" sz="1200" b="0" u="none" strike="noStrike">
                 <a:solidFill>
                   <a:schemeClr val="dk1">
@@ -2587,7 +3296,7 @@
 </p:sldLayout>
 </file>
 
-<file path=ppt/slideLayouts/slideLayout5.xml><?xml version="1.0" encoding="utf-8"?>
+<file path=ppt/slideLayouts/slideLayout6.xml><?xml version="1.0" encoding="utf-8"?>
 <p:sldLayout xmlns:a="http://schemas.openxmlformats.org/drawingml/2006/main" xmlns:p="http://schemas.openxmlformats.org/presentationml/2006/main" xmlns:r="http://schemas.openxmlformats.org/officeDocument/2006/relationships" xmlns:p14="http://schemas.microsoft.com/office/powerpoint/2010/main" xmlns:p15="http://schemas.microsoft.com/office/powerpoint/2012/main" xmlns:mc="http://schemas.openxmlformats.org/markup-compatibility/2006" type="twoObj" preserve="1">
   <p:cSld name="Two Content">
     <p:bg>
@@ -2613,14 +3322,14 @@
       </p:grpSpPr>
       <p:sp>
         <p:nvSpPr>
-          <p:cNvPr id="32" name="Rectangle 6"/>
+          <p:cNvPr id="42" name="Rectangle 6"/>
           <p:cNvSpPr/>
           <p:nvPr/>
         </p:nvSpPr>
         <p:spPr>
           <a:xfrm>
             <a:off x="0" y="-6480"/>
-            <a:ext cx="12191760" cy="1344240"/>
+            <a:ext cx="12191400" cy="1343880"/>
           </a:xfrm>
           <a:prstGeom prst="rect">
             <a:avLst/>
@@ -2669,14 +3378,14 @@
       </p:sp>
       <p:sp>
         <p:nvSpPr>
-          <p:cNvPr id="33" name="TextBox 7"/>
+          <p:cNvPr id="43" name="TextBox 7"/>
           <p:cNvSpPr/>
           <p:nvPr/>
         </p:nvSpPr>
         <p:spPr>
           <a:xfrm>
             <a:off x="2196360" y="204120"/>
-            <a:ext cx="8376840" cy="923040"/>
+            <a:ext cx="8376480" cy="922680"/>
           </a:xfrm>
           <a:prstGeom prst="rect">
             <a:avLst/>
@@ -2726,7 +3435,7 @@
       </p:sp>
       <p:pic>
         <p:nvPicPr>
-          <p:cNvPr id="34" name="Picture 10"/>
+          <p:cNvPr id="44" name="Picture 10"/>
           <p:cNvPicPr/>
           <p:nvPr/>
         </p:nvPicPr>
@@ -2738,7 +3447,7 @@
         <p:spPr>
           <a:xfrm>
             <a:off x="838080" y="19800"/>
-            <a:ext cx="1236600" cy="1291680"/>
+            <a:ext cx="1236240" cy="1291320"/>
           </a:xfrm>
           <a:prstGeom prst="rect">
             <a:avLst/>
@@ -2751,7 +3460,7 @@
       </p:pic>
       <p:sp>
         <p:nvSpPr>
-          <p:cNvPr id="35" name="PlaceHolder 1"/>
+          <p:cNvPr id="45" name="PlaceHolder 1"/>
           <p:cNvSpPr>
             <a:spLocks noGrp="1"/>
           </p:cNvSpPr>
@@ -2762,7 +3471,7 @@
         <p:spPr>
           <a:xfrm>
             <a:off x="838080" y="1401480"/>
-            <a:ext cx="10515240" cy="1325160"/>
+            <a:ext cx="10514880" cy="1324800"/>
           </a:xfrm>
           <a:prstGeom prst="rect">
             <a:avLst/>
@@ -2782,6 +3491,9 @@
                 <a:spcPct val="90000"/>
               </a:lnSpc>
               <a:buNone/>
+              <a:tabLst>
+                <a:tab algn="l" pos="0"/>
+              </a:tabLst>
             </a:pPr>
             <a:r>
               <a:rPr lang="en-US" sz="4400" b="1" u="none" strike="noStrike">
@@ -2794,20 +3506,20 @@
               </a:rPr>
               <a:t>Click to edit Master title style</a:t>
             </a:r>
-            <a:endParaRPr lang="en-US" sz="4400" b="0" u="none" strike="noStrike">
-              <a:solidFill>
-                <a:schemeClr val="dk1"/>
-              </a:solidFill>
-              <a:effectLst/>
-              <a:uFillTx/>
-              <a:latin typeface="Calibri"/>
-            </a:endParaRPr>
-          </a:p>
-        </p:txBody>
-      </p:sp>
-      <p:sp>
-        <p:nvSpPr>
-          <p:cNvPr id="36" name="PlaceHolder 2"/>
+            <a:endParaRPr lang="en-GB" sz="4400" b="0" u="none" strike="noStrike">
+              <a:solidFill>
+                <a:srgbClr val="000000"/>
+              </a:solidFill>
+              <a:effectLst/>
+              <a:uFillTx/>
+              <a:latin typeface="Arial"/>
+            </a:endParaRPr>
+          </a:p>
+        </p:txBody>
+      </p:sp>
+      <p:sp>
+        <p:nvSpPr>
+          <p:cNvPr id="46" name="PlaceHolder 2"/>
           <p:cNvSpPr>
             <a:spLocks noGrp="1"/>
           </p:cNvSpPr>
@@ -2818,7 +3530,7 @@
         <p:spPr>
           <a:xfrm>
             <a:off x="838080" y="2727360"/>
-            <a:ext cx="5181120" cy="3449520"/>
+            <a:ext cx="5180760" cy="3449160"/>
           </a:xfrm>
           <a:prstGeom prst="rect">
             <a:avLst/>
@@ -2857,13 +3569,13 @@
               </a:rPr>
               <a:t>Edit Master text styles</a:t>
             </a:r>
-            <a:endParaRPr lang="en-US" sz="2800" b="0" u="none" strike="noStrike">
-              <a:solidFill>
-                <a:schemeClr val="dk1"/>
-              </a:solidFill>
-              <a:effectLst/>
-              <a:uFillTx/>
-              <a:latin typeface="Calibri"/>
+            <a:endParaRPr lang="en-GB" sz="2800" b="0" u="none" strike="noStrike">
+              <a:solidFill>
+                <a:srgbClr val="000000"/>
+              </a:solidFill>
+              <a:effectLst/>
+              <a:uFillTx/>
+              <a:latin typeface="Arial"/>
             </a:endParaRPr>
           </a:p>
           <a:p>
@@ -2891,13 +3603,13 @@
               </a:rPr>
               <a:t>Second level</a:t>
             </a:r>
-            <a:endParaRPr lang="en-US" sz="2400" b="0" u="none" strike="noStrike">
-              <a:solidFill>
-                <a:schemeClr val="dk1"/>
-              </a:solidFill>
-              <a:effectLst/>
-              <a:uFillTx/>
-              <a:latin typeface="Calibri"/>
+            <a:endParaRPr lang="en-GB" sz="2400" b="0" u="none" strike="noStrike">
+              <a:solidFill>
+                <a:srgbClr val="000000"/>
+              </a:solidFill>
+              <a:effectLst/>
+              <a:uFillTx/>
+              <a:latin typeface="Arial"/>
             </a:endParaRPr>
           </a:p>
           <a:p>
@@ -2925,13 +3637,13 @@
               </a:rPr>
               <a:t>Third level</a:t>
             </a:r>
-            <a:endParaRPr lang="en-US" sz="2000" b="0" u="none" strike="noStrike">
-              <a:solidFill>
-                <a:schemeClr val="dk1"/>
-              </a:solidFill>
-              <a:effectLst/>
-              <a:uFillTx/>
-              <a:latin typeface="Calibri"/>
+            <a:endParaRPr lang="en-GB" sz="2000" b="0" u="none" strike="noStrike">
+              <a:solidFill>
+                <a:srgbClr val="000000"/>
+              </a:solidFill>
+              <a:effectLst/>
+              <a:uFillTx/>
+              <a:latin typeface="Arial"/>
             </a:endParaRPr>
           </a:p>
           <a:p>
@@ -2959,13 +3671,13 @@
               </a:rPr>
               <a:t>Fourth level</a:t>
             </a:r>
-            <a:endParaRPr lang="en-US" sz="1800" b="0" u="none" strike="noStrike">
-              <a:solidFill>
-                <a:schemeClr val="dk1"/>
-              </a:solidFill>
-              <a:effectLst/>
-              <a:uFillTx/>
-              <a:latin typeface="Calibri"/>
+            <a:endParaRPr lang="en-GB" sz="1800" b="0" u="none" strike="noStrike">
+              <a:solidFill>
+                <a:srgbClr val="000000"/>
+              </a:solidFill>
+              <a:effectLst/>
+              <a:uFillTx/>
+              <a:latin typeface="Arial"/>
             </a:endParaRPr>
           </a:p>
           <a:p>
@@ -2993,20 +3705,20 @@
               </a:rPr>
               <a:t>Fifth level</a:t>
             </a:r>
-            <a:endParaRPr lang="en-US" sz="1800" b="0" u="none" strike="noStrike">
-              <a:solidFill>
-                <a:schemeClr val="dk1"/>
-              </a:solidFill>
-              <a:effectLst/>
-              <a:uFillTx/>
-              <a:latin typeface="Calibri"/>
-            </a:endParaRPr>
-          </a:p>
-        </p:txBody>
-      </p:sp>
-      <p:sp>
-        <p:nvSpPr>
-          <p:cNvPr id="37" name="PlaceHolder 3"/>
+            <a:endParaRPr lang="en-GB" sz="1800" b="0" u="none" strike="noStrike">
+              <a:solidFill>
+                <a:srgbClr val="000000"/>
+              </a:solidFill>
+              <a:effectLst/>
+              <a:uFillTx/>
+              <a:latin typeface="Arial"/>
+            </a:endParaRPr>
+          </a:p>
+        </p:txBody>
+      </p:sp>
+      <p:sp>
+        <p:nvSpPr>
+          <p:cNvPr id="47" name="PlaceHolder 3"/>
           <p:cNvSpPr>
             <a:spLocks noGrp="1"/>
           </p:cNvSpPr>
@@ -3017,7 +3729,7 @@
         <p:spPr>
           <a:xfrm>
             <a:off x="6172200" y="2727360"/>
-            <a:ext cx="5181120" cy="3449520"/>
+            <a:ext cx="5180760" cy="3449160"/>
           </a:xfrm>
           <a:prstGeom prst="rect">
             <a:avLst/>
@@ -3056,13 +3768,13 @@
               </a:rPr>
               <a:t>Edit Master text styles</a:t>
             </a:r>
-            <a:endParaRPr lang="en-US" sz="2800" b="0" u="none" strike="noStrike">
-              <a:solidFill>
-                <a:schemeClr val="dk1"/>
-              </a:solidFill>
-              <a:effectLst/>
-              <a:uFillTx/>
-              <a:latin typeface="Calibri"/>
+            <a:endParaRPr lang="en-GB" sz="2800" b="0" u="none" strike="noStrike">
+              <a:solidFill>
+                <a:srgbClr val="000000"/>
+              </a:solidFill>
+              <a:effectLst/>
+              <a:uFillTx/>
+              <a:latin typeface="Arial"/>
             </a:endParaRPr>
           </a:p>
           <a:p>
@@ -3090,13 +3802,13 @@
               </a:rPr>
               <a:t>Second level</a:t>
             </a:r>
-            <a:endParaRPr lang="en-US" sz="2400" b="0" u="none" strike="noStrike">
-              <a:solidFill>
-                <a:schemeClr val="dk1"/>
-              </a:solidFill>
-              <a:effectLst/>
-              <a:uFillTx/>
-              <a:latin typeface="Calibri"/>
+            <a:endParaRPr lang="en-GB" sz="2400" b="0" u="none" strike="noStrike">
+              <a:solidFill>
+                <a:srgbClr val="000000"/>
+              </a:solidFill>
+              <a:effectLst/>
+              <a:uFillTx/>
+              <a:latin typeface="Arial"/>
             </a:endParaRPr>
           </a:p>
           <a:p>
@@ -3124,13 +3836,13 @@
               </a:rPr>
               <a:t>Third level</a:t>
             </a:r>
-            <a:endParaRPr lang="en-US" sz="2000" b="0" u="none" strike="noStrike">
-              <a:solidFill>
-                <a:schemeClr val="dk1"/>
-              </a:solidFill>
-              <a:effectLst/>
-              <a:uFillTx/>
-              <a:latin typeface="Calibri"/>
+            <a:endParaRPr lang="en-GB" sz="2000" b="0" u="none" strike="noStrike">
+              <a:solidFill>
+                <a:srgbClr val="000000"/>
+              </a:solidFill>
+              <a:effectLst/>
+              <a:uFillTx/>
+              <a:latin typeface="Arial"/>
             </a:endParaRPr>
           </a:p>
           <a:p>
@@ -3158,13 +3870,13 @@
               </a:rPr>
               <a:t>Fourth level</a:t>
             </a:r>
-            <a:endParaRPr lang="en-US" sz="1800" b="0" u="none" strike="noStrike">
-              <a:solidFill>
-                <a:schemeClr val="dk1"/>
-              </a:solidFill>
-              <a:effectLst/>
-              <a:uFillTx/>
-              <a:latin typeface="Calibri"/>
+            <a:endParaRPr lang="en-GB" sz="1800" b="0" u="none" strike="noStrike">
+              <a:solidFill>
+                <a:srgbClr val="000000"/>
+              </a:solidFill>
+              <a:effectLst/>
+              <a:uFillTx/>
+              <a:latin typeface="Arial"/>
             </a:endParaRPr>
           </a:p>
           <a:p>
@@ -3192,31 +3904,31 @@
               </a:rPr>
               <a:t>Fifth level</a:t>
             </a:r>
-            <a:endParaRPr lang="en-US" sz="1800" b="0" u="none" strike="noStrike">
-              <a:solidFill>
-                <a:schemeClr val="dk1"/>
-              </a:solidFill>
-              <a:effectLst/>
-              <a:uFillTx/>
-              <a:latin typeface="Calibri"/>
-            </a:endParaRPr>
-          </a:p>
-        </p:txBody>
-      </p:sp>
-      <p:sp>
-        <p:nvSpPr>
-          <p:cNvPr id="38" name="PlaceHolder 4"/>
+            <a:endParaRPr lang="en-GB" sz="1800" b="0" u="none" strike="noStrike">
+              <a:solidFill>
+                <a:srgbClr val="000000"/>
+              </a:solidFill>
+              <a:effectLst/>
+              <a:uFillTx/>
+              <a:latin typeface="Arial"/>
+            </a:endParaRPr>
+          </a:p>
+        </p:txBody>
+      </p:sp>
+      <p:sp>
+        <p:nvSpPr>
+          <p:cNvPr id="48" name="PlaceHolder 4"/>
           <p:cNvSpPr>
             <a:spLocks noGrp="1"/>
           </p:cNvSpPr>
           <p:nvPr>
-            <p:ph type="dt" idx="13"/>
+            <p:ph type="dt" idx="16"/>
           </p:nvPr>
         </p:nvSpPr>
         <p:spPr>
           <a:xfrm>
             <a:off x="838080" y="6356520"/>
-            <a:ext cx="2742840" cy="364680"/>
+            <a:ext cx="2742480" cy="364320"/>
           </a:xfrm>
           <a:prstGeom prst="rect">
             <a:avLst/>
@@ -3236,6 +3948,9 @@
                 <a:spcPct val="100000"/>
               </a:lnSpc>
               <a:buNone/>
+              <a:tabLst>
+                <a:tab algn="l" pos="0"/>
+              </a:tabLst>
               <a:defRPr lang="en-US" sz="1200" b="0" u="none" strike="noStrike">
                 <a:solidFill>
                   <a:schemeClr val="dk1">
@@ -3254,6 +3969,9 @@
                 <a:spcPct val="100000"/>
               </a:lnSpc>
               <a:buNone/>
+              <a:tabLst>
+                <a:tab algn="l" pos="0"/>
+              </a:tabLst>
             </a:pPr>
             <a:r>
               <a:rPr lang="en-US" sz="1200" b="0" u="none" strike="noStrike">
@@ -3281,18 +3999,18 @@
       </p:sp>
       <p:sp>
         <p:nvSpPr>
-          <p:cNvPr id="39" name="PlaceHolder 5"/>
+          <p:cNvPr id="49" name="PlaceHolder 5"/>
           <p:cNvSpPr>
             <a:spLocks noGrp="1"/>
           </p:cNvSpPr>
           <p:nvPr>
-            <p:ph type="ftr" idx="14"/>
+            <p:ph type="ftr" idx="17"/>
           </p:nvPr>
         </p:nvSpPr>
         <p:spPr>
           <a:xfrm>
             <a:off x="4038480" y="6356520"/>
-            <a:ext cx="4114440" cy="364680"/>
+            <a:ext cx="4114080" cy="364320"/>
           </a:xfrm>
           <a:prstGeom prst="rect">
             <a:avLst/>
@@ -3308,7 +4026,13 @@
           </a:bodyPr>
           <a:lstStyle>
             <a:lvl1pPr indent="0" algn="ctr">
+              <a:lnSpc>
+                <a:spcPct val="100000"/>
+              </a:lnSpc>
               <a:buNone/>
+              <a:tabLst>
+                <a:tab algn="l" pos="0"/>
+              </a:tabLst>
               <a:defRPr lang="en-GB" sz="1400" b="0" u="none" strike="noStrike">
                 <a:solidFill>
                   <a:srgbClr val="000000"/>
@@ -3321,7 +4045,13 @@
           </a:lstStyle>
           <a:p>
             <a:pPr indent="0" algn="ctr">
+              <a:lnSpc>
+                <a:spcPct val="100000"/>
+              </a:lnSpc>
               <a:buNone/>
+              <a:tabLst>
+                <a:tab algn="l" pos="0"/>
+              </a:tabLst>
             </a:pPr>
             <a:r>
               <a:rPr lang="en-GB" sz="1400" b="0" u="none" strike="noStrike">
@@ -3347,18 +4077,18 @@
       </p:sp>
       <p:sp>
         <p:nvSpPr>
-          <p:cNvPr id="40" name="PlaceHolder 6"/>
+          <p:cNvPr id="50" name="PlaceHolder 6"/>
           <p:cNvSpPr>
             <a:spLocks noGrp="1"/>
           </p:cNvSpPr>
           <p:nvPr>
-            <p:ph type="sldNum" idx="15"/>
+            <p:ph type="sldNum" idx="18"/>
           </p:nvPr>
         </p:nvSpPr>
         <p:spPr>
           <a:xfrm>
             <a:off x="8610480" y="6356520"/>
-            <a:ext cx="2742840" cy="364680"/>
+            <a:ext cx="2742480" cy="364320"/>
           </a:xfrm>
           <a:prstGeom prst="rect">
             <a:avLst/>
@@ -3378,6 +4108,9 @@
                 <a:spcPct val="100000"/>
               </a:lnSpc>
               <a:buNone/>
+              <a:tabLst>
+                <a:tab algn="l" pos="0"/>
+              </a:tabLst>
               <a:defRPr lang="en-US" sz="1200" b="0" u="none" strike="noStrike">
                 <a:solidFill>
                   <a:schemeClr val="dk1">
@@ -3396,8 +4129,11 @@
                 <a:spcPct val="100000"/>
               </a:lnSpc>
               <a:buNone/>
-            </a:pPr>
-            <a:fld id="{270F9FBE-31DC-422D-AE4C-E9CD38B7632A}" type="slidenum">
+              <a:tabLst>
+                <a:tab algn="l" pos="0"/>
+              </a:tabLst>
+            </a:pPr>
+            <a:fld id="{E778DC9F-89F0-4A6C-8544-AABBEE78B77D}" type="slidenum">
               <a:rPr lang="en-US" sz="1200" b="0" u="none" strike="noStrike">
                 <a:solidFill>
                   <a:schemeClr val="dk1">
@@ -3426,7 +4162,7 @@
 </p:sldLayout>
 </file>
 
-<file path=ppt/slideLayouts/slideLayout6.xml><?xml version="1.0" encoding="utf-8"?>
+<file path=ppt/slideLayouts/slideLayout7.xml><?xml version="1.0" encoding="utf-8"?>
 <p:sldLayout xmlns:a="http://schemas.openxmlformats.org/drawingml/2006/main" xmlns:p="http://schemas.openxmlformats.org/presentationml/2006/main" xmlns:r="http://schemas.openxmlformats.org/officeDocument/2006/relationships" xmlns:p14="http://schemas.microsoft.com/office/powerpoint/2010/main" xmlns:p15="http://schemas.microsoft.com/office/powerpoint/2012/main" xmlns:mc="http://schemas.openxmlformats.org/markup-compatibility/2006" type="titleOnly" preserve="1">
   <p:cSld name="Title Only">
     <p:bg>
@@ -3452,14 +4188,14 @@
       </p:grpSpPr>
       <p:sp>
         <p:nvSpPr>
-          <p:cNvPr id="41" name="Rectangle 6"/>
+          <p:cNvPr id="51" name="Rectangle 6"/>
           <p:cNvSpPr/>
           <p:nvPr/>
         </p:nvSpPr>
         <p:spPr>
           <a:xfrm>
             <a:off x="0" y="-6480"/>
-            <a:ext cx="12191760" cy="1344240"/>
+            <a:ext cx="12191400" cy="1343880"/>
           </a:xfrm>
           <a:prstGeom prst="rect">
             <a:avLst/>
@@ -3508,14 +4244,14 @@
       </p:sp>
       <p:sp>
         <p:nvSpPr>
-          <p:cNvPr id="42" name="TextBox 7"/>
+          <p:cNvPr id="52" name="TextBox 7"/>
           <p:cNvSpPr/>
           <p:nvPr/>
         </p:nvSpPr>
         <p:spPr>
           <a:xfrm>
             <a:off x="2196360" y="204120"/>
-            <a:ext cx="8376840" cy="923040"/>
+            <a:ext cx="8376480" cy="922680"/>
           </a:xfrm>
           <a:prstGeom prst="rect">
             <a:avLst/>
@@ -3565,7 +4301,7 @@
       </p:sp>
       <p:pic>
         <p:nvPicPr>
-          <p:cNvPr id="43" name="Picture 10"/>
+          <p:cNvPr id="53" name="Picture 10"/>
           <p:cNvPicPr/>
           <p:nvPr/>
         </p:nvPicPr>
@@ -3577,7 +4313,7 @@
         <p:spPr>
           <a:xfrm>
             <a:off x="838080" y="19800"/>
-            <a:ext cx="1236600" cy="1291680"/>
+            <a:ext cx="1236240" cy="1291320"/>
           </a:xfrm>
           <a:prstGeom prst="rect">
             <a:avLst/>
@@ -3590,7 +4326,7 @@
       </p:pic>
       <p:sp>
         <p:nvSpPr>
-          <p:cNvPr id="44" name="PlaceHolder 1"/>
+          <p:cNvPr id="54" name="PlaceHolder 1"/>
           <p:cNvSpPr>
             <a:spLocks noGrp="1"/>
           </p:cNvSpPr>
@@ -3601,7 +4337,7 @@
         <p:spPr>
           <a:xfrm>
             <a:off x="838080" y="1401480"/>
-            <a:ext cx="10515240" cy="1325160"/>
+            <a:ext cx="10514880" cy="1324800"/>
           </a:xfrm>
           <a:prstGeom prst="rect">
             <a:avLst/>
@@ -3621,6 +4357,9 @@
                 <a:spcPct val="90000"/>
               </a:lnSpc>
               <a:buNone/>
+              <a:tabLst>
+                <a:tab algn="l" pos="0"/>
+              </a:tabLst>
             </a:pPr>
             <a:r>
               <a:rPr lang="en-US" sz="4400" b="1" u="none" strike="noStrike">
@@ -3633,31 +4372,31 @@
               </a:rPr>
               <a:t>Click to edit Master title style</a:t>
             </a:r>
-            <a:endParaRPr lang="en-US" sz="4400" b="0" u="none" strike="noStrike">
-              <a:solidFill>
-                <a:schemeClr val="dk1"/>
-              </a:solidFill>
-              <a:effectLst/>
-              <a:uFillTx/>
-              <a:latin typeface="Calibri"/>
-            </a:endParaRPr>
-          </a:p>
-        </p:txBody>
-      </p:sp>
-      <p:sp>
-        <p:nvSpPr>
-          <p:cNvPr id="45" name="PlaceHolder 2"/>
+            <a:endParaRPr lang="en-GB" sz="4400" b="0" u="none" strike="noStrike">
+              <a:solidFill>
+                <a:srgbClr val="000000"/>
+              </a:solidFill>
+              <a:effectLst/>
+              <a:uFillTx/>
+              <a:latin typeface="Arial"/>
+            </a:endParaRPr>
+          </a:p>
+        </p:txBody>
+      </p:sp>
+      <p:sp>
+        <p:nvSpPr>
+          <p:cNvPr id="55" name="PlaceHolder 2"/>
           <p:cNvSpPr>
             <a:spLocks noGrp="1"/>
           </p:cNvSpPr>
           <p:nvPr>
-            <p:ph type="dt" idx="16"/>
+            <p:ph type="dt" idx="19"/>
           </p:nvPr>
         </p:nvSpPr>
         <p:spPr>
           <a:xfrm>
             <a:off x="838080" y="6356520"/>
-            <a:ext cx="2742840" cy="364680"/>
+            <a:ext cx="2742480" cy="364320"/>
           </a:xfrm>
           <a:prstGeom prst="rect">
             <a:avLst/>
@@ -3677,6 +4416,9 @@
                 <a:spcPct val="100000"/>
               </a:lnSpc>
               <a:buNone/>
+              <a:tabLst>
+                <a:tab algn="l" pos="0"/>
+              </a:tabLst>
               <a:defRPr lang="en-US" sz="1200" b="0" u="none" strike="noStrike">
                 <a:solidFill>
                   <a:schemeClr val="dk1">
@@ -3695,6 +4437,9 @@
                 <a:spcPct val="100000"/>
               </a:lnSpc>
               <a:buNone/>
+              <a:tabLst>
+                <a:tab algn="l" pos="0"/>
+              </a:tabLst>
             </a:pPr>
             <a:r>
               <a:rPr lang="en-US" sz="1200" b="0" u="none" strike="noStrike">
@@ -3722,18 +4467,18 @@
       </p:sp>
       <p:sp>
         <p:nvSpPr>
-          <p:cNvPr id="46" name="PlaceHolder 3"/>
+          <p:cNvPr id="56" name="PlaceHolder 3"/>
           <p:cNvSpPr>
             <a:spLocks noGrp="1"/>
           </p:cNvSpPr>
           <p:nvPr>
-            <p:ph type="ftr" idx="17"/>
+            <p:ph type="ftr" idx="20"/>
           </p:nvPr>
         </p:nvSpPr>
         <p:spPr>
           <a:xfrm>
             <a:off x="4038480" y="6356520"/>
-            <a:ext cx="4114440" cy="364680"/>
+            <a:ext cx="4114080" cy="364320"/>
           </a:xfrm>
           <a:prstGeom prst="rect">
             <a:avLst/>
@@ -3749,7 +4494,13 @@
           </a:bodyPr>
           <a:lstStyle>
             <a:lvl1pPr indent="0" algn="ctr">
+              <a:lnSpc>
+                <a:spcPct val="100000"/>
+              </a:lnSpc>
               <a:buNone/>
+              <a:tabLst>
+                <a:tab algn="l" pos="0"/>
+              </a:tabLst>
               <a:defRPr lang="en-GB" sz="1400" b="0" u="none" strike="noStrike">
                 <a:solidFill>
                   <a:srgbClr val="000000"/>
@@ -3762,7 +4513,13 @@
           </a:lstStyle>
           <a:p>
             <a:pPr indent="0" algn="ctr">
+              <a:lnSpc>
+                <a:spcPct val="100000"/>
+              </a:lnSpc>
               <a:buNone/>
+              <a:tabLst>
+                <a:tab algn="l" pos="0"/>
+              </a:tabLst>
             </a:pPr>
             <a:r>
               <a:rPr lang="en-GB" sz="1400" b="0" u="none" strike="noStrike">
@@ -3788,18 +4545,18 @@
       </p:sp>
       <p:sp>
         <p:nvSpPr>
-          <p:cNvPr id="47" name="PlaceHolder 4"/>
+          <p:cNvPr id="57" name="PlaceHolder 4"/>
           <p:cNvSpPr>
             <a:spLocks noGrp="1"/>
           </p:cNvSpPr>
           <p:nvPr>
-            <p:ph type="sldNum" idx="18"/>
+            <p:ph type="sldNum" idx="21"/>
           </p:nvPr>
         </p:nvSpPr>
         <p:spPr>
           <a:xfrm>
             <a:off x="8610480" y="6356520"/>
-            <a:ext cx="2742840" cy="364680"/>
+            <a:ext cx="2742480" cy="364320"/>
           </a:xfrm>
           <a:prstGeom prst="rect">
             <a:avLst/>
@@ -3819,6 +4576,9 @@
                 <a:spcPct val="100000"/>
               </a:lnSpc>
               <a:buNone/>
+              <a:tabLst>
+                <a:tab algn="l" pos="0"/>
+              </a:tabLst>
               <a:defRPr lang="en-US" sz="1200" b="0" u="none" strike="noStrike">
                 <a:solidFill>
                   <a:schemeClr val="dk1">
@@ -3837,8 +4597,11 @@
                 <a:spcPct val="100000"/>
               </a:lnSpc>
               <a:buNone/>
-            </a:pPr>
-            <a:fld id="{FF814694-B6B5-41FA-B8D8-EB2EBE48DE3E}" type="slidenum">
+              <a:tabLst>
+                <a:tab algn="l" pos="0"/>
+              </a:tabLst>
+            </a:pPr>
+            <a:fld id="{109C82FB-9F9B-4E30-A5E1-0DC14DF6511A}" type="slidenum">
               <a:rPr lang="en-US" sz="1200" b="0" u="none" strike="noStrike">
                 <a:solidFill>
                   <a:schemeClr val="dk1">
@@ -3867,7 +4630,7 @@
 </p:sldLayout>
 </file>
 
-<file path=ppt/slideLayouts/slideLayout7.xml><?xml version="1.0" encoding="utf-8"?>
+<file path=ppt/slideLayouts/slideLayout8.xml><?xml version="1.0" encoding="utf-8"?>
 <p:sldLayout xmlns:a="http://schemas.openxmlformats.org/drawingml/2006/main" xmlns:p="http://schemas.openxmlformats.org/presentationml/2006/main" xmlns:r="http://schemas.openxmlformats.org/officeDocument/2006/relationships" xmlns:p14="http://schemas.microsoft.com/office/powerpoint/2010/main" xmlns:p15="http://schemas.microsoft.com/office/powerpoint/2012/main" xmlns:mc="http://schemas.openxmlformats.org/markup-compatibility/2006" type="blank" preserve="1">
   <p:cSld name="Blank">
     <p:bg>
@@ -3893,14 +4656,14 @@
       </p:grpSpPr>
       <p:sp>
         <p:nvSpPr>
-          <p:cNvPr id="48" name="Rectangle 6"/>
+          <p:cNvPr id="58" name="Rectangle 6"/>
           <p:cNvSpPr/>
           <p:nvPr/>
         </p:nvSpPr>
         <p:spPr>
           <a:xfrm>
             <a:off x="0" y="-6480"/>
-            <a:ext cx="12191760" cy="1344240"/>
+            <a:ext cx="12191400" cy="1343880"/>
           </a:xfrm>
           <a:prstGeom prst="rect">
             <a:avLst/>
@@ -3949,14 +4712,14 @@
       </p:sp>
       <p:sp>
         <p:nvSpPr>
-          <p:cNvPr id="49" name="TextBox 7"/>
+          <p:cNvPr id="59" name="TextBox 7"/>
           <p:cNvSpPr/>
           <p:nvPr/>
         </p:nvSpPr>
         <p:spPr>
           <a:xfrm>
             <a:off x="2196360" y="204120"/>
-            <a:ext cx="8376840" cy="923040"/>
+            <a:ext cx="8376480" cy="922680"/>
           </a:xfrm>
           <a:prstGeom prst="rect">
             <a:avLst/>
@@ -4006,7 +4769,7 @@
       </p:sp>
       <p:pic>
         <p:nvPicPr>
-          <p:cNvPr id="50" name="Picture 10"/>
+          <p:cNvPr id="60" name="Picture 10"/>
           <p:cNvPicPr/>
           <p:nvPr/>
         </p:nvPicPr>
@@ -4018,7 +4781,7 @@
         <p:spPr>
           <a:xfrm>
             <a:off x="838080" y="19800"/>
-            <a:ext cx="1236600" cy="1291680"/>
+            <a:ext cx="1236240" cy="1291320"/>
           </a:xfrm>
           <a:prstGeom prst="rect">
             <a:avLst/>
@@ -4031,18 +4794,18 @@
       </p:pic>
       <p:sp>
         <p:nvSpPr>
-          <p:cNvPr id="51" name="PlaceHolder 1"/>
+          <p:cNvPr id="61" name="PlaceHolder 1"/>
           <p:cNvSpPr>
             <a:spLocks noGrp="1"/>
           </p:cNvSpPr>
           <p:nvPr>
-            <p:ph type="dt" idx="19"/>
+            <p:ph type="dt" idx="22"/>
           </p:nvPr>
         </p:nvSpPr>
         <p:spPr>
           <a:xfrm>
             <a:off x="838080" y="6356520"/>
-            <a:ext cx="2742840" cy="364680"/>
+            <a:ext cx="2742480" cy="364320"/>
           </a:xfrm>
           <a:prstGeom prst="rect">
             <a:avLst/>
@@ -4062,6 +4825,9 @@
                 <a:spcPct val="100000"/>
               </a:lnSpc>
               <a:buNone/>
+              <a:tabLst>
+                <a:tab algn="l" pos="0"/>
+              </a:tabLst>
               <a:defRPr lang="en-US" sz="1200" b="0" u="none" strike="noStrike">
                 <a:solidFill>
                   <a:schemeClr val="dk1">
@@ -4080,6 +4846,9 @@
                 <a:spcPct val="100000"/>
               </a:lnSpc>
               <a:buNone/>
+              <a:tabLst>
+                <a:tab algn="l" pos="0"/>
+              </a:tabLst>
             </a:pPr>
             <a:r>
               <a:rPr lang="en-US" sz="1200" b="0" u="none" strike="noStrike">
@@ -4107,18 +4876,18 @@
       </p:sp>
       <p:sp>
         <p:nvSpPr>
-          <p:cNvPr id="52" name="PlaceHolder 2"/>
+          <p:cNvPr id="62" name="PlaceHolder 2"/>
           <p:cNvSpPr>
             <a:spLocks noGrp="1"/>
           </p:cNvSpPr>
           <p:nvPr>
-            <p:ph type="ftr" idx="20"/>
+            <p:ph type="ftr" idx="23"/>
           </p:nvPr>
         </p:nvSpPr>
         <p:spPr>
           <a:xfrm>
             <a:off x="4038480" y="6356520"/>
-            <a:ext cx="4114440" cy="364680"/>
+            <a:ext cx="4114080" cy="364320"/>
           </a:xfrm>
           <a:prstGeom prst="rect">
             <a:avLst/>
@@ -4134,7 +4903,13 @@
           </a:bodyPr>
           <a:lstStyle>
             <a:lvl1pPr indent="0" algn="ctr">
+              <a:lnSpc>
+                <a:spcPct val="100000"/>
+              </a:lnSpc>
               <a:buNone/>
+              <a:tabLst>
+                <a:tab algn="l" pos="0"/>
+              </a:tabLst>
               <a:defRPr lang="en-GB" sz="1400" b="0" u="none" strike="noStrike">
                 <a:solidFill>
                   <a:srgbClr val="000000"/>
@@ -4147,7 +4922,13 @@
           </a:lstStyle>
           <a:p>
             <a:pPr indent="0" algn="ctr">
+              <a:lnSpc>
+                <a:spcPct val="100000"/>
+              </a:lnSpc>
               <a:buNone/>
+              <a:tabLst>
+                <a:tab algn="l" pos="0"/>
+              </a:tabLst>
             </a:pPr>
             <a:r>
               <a:rPr lang="en-GB" sz="1400" b="0" u="none" strike="noStrike">
@@ -4173,18 +4954,18 @@
       </p:sp>
       <p:sp>
         <p:nvSpPr>
-          <p:cNvPr id="53" name="PlaceHolder 3"/>
+          <p:cNvPr id="63" name="PlaceHolder 3"/>
           <p:cNvSpPr>
             <a:spLocks noGrp="1"/>
           </p:cNvSpPr>
           <p:nvPr>
-            <p:ph type="sldNum" idx="21"/>
+            <p:ph type="sldNum" idx="24"/>
           </p:nvPr>
         </p:nvSpPr>
         <p:spPr>
           <a:xfrm>
             <a:off x="8610480" y="6356520"/>
-            <a:ext cx="2742840" cy="364680"/>
+            <a:ext cx="2742480" cy="364320"/>
           </a:xfrm>
           <a:prstGeom prst="rect">
             <a:avLst/>
@@ -4204,6 +4985,9 @@
                 <a:spcPct val="100000"/>
               </a:lnSpc>
               <a:buNone/>
+              <a:tabLst>
+                <a:tab algn="l" pos="0"/>
+              </a:tabLst>
               <a:defRPr lang="en-US" sz="1200" b="0" u="none" strike="noStrike">
                 <a:solidFill>
                   <a:schemeClr val="dk1">
@@ -4222,8 +5006,11 @@
                 <a:spcPct val="100000"/>
               </a:lnSpc>
               <a:buNone/>
-            </a:pPr>
-            <a:fld id="{1EB6715D-06CB-40B2-AC9A-1C8153873136}" type="slidenum">
+              <a:tabLst>
+                <a:tab algn="l" pos="0"/>
+              </a:tabLst>
+            </a:pPr>
+            <a:fld id="{408FBEA7-4F52-4215-B98B-1E4210D6AF6D}" type="slidenum">
               <a:rPr lang="en-US" sz="1200" b="0" u="none" strike="noStrike">
                 <a:solidFill>
                   <a:schemeClr val="dk1">
@@ -4252,7 +5039,7 @@
 </p:sldLayout>
 </file>
 
-<file path=ppt/slideLayouts/slideLayout8.xml><?xml version="1.0" encoding="utf-8"?>
+<file path=ppt/slideLayouts/slideLayout9.xml><?xml version="1.0" encoding="utf-8"?>
 <p:sldLayout xmlns:a="http://schemas.openxmlformats.org/drawingml/2006/main" xmlns:p="http://schemas.openxmlformats.org/presentationml/2006/main" xmlns:r="http://schemas.openxmlformats.org/officeDocument/2006/relationships" xmlns:p14="http://schemas.microsoft.com/office/powerpoint/2010/main" xmlns:p15="http://schemas.microsoft.com/office/powerpoint/2012/main" xmlns:mc="http://schemas.openxmlformats.org/markup-compatibility/2006" type="blank" preserve="1">
   <p:cSld name="Picture with Caption">
     <p:bg>
@@ -4278,14 +5065,14 @@
       </p:grpSpPr>
       <p:sp>
         <p:nvSpPr>
-          <p:cNvPr id="54" name="Rectangle 6"/>
+          <p:cNvPr id="64" name="Rectangle 6"/>
           <p:cNvSpPr/>
           <p:nvPr/>
         </p:nvSpPr>
         <p:spPr>
           <a:xfrm>
             <a:off x="0" y="-6480"/>
-            <a:ext cx="12191760" cy="1344240"/>
+            <a:ext cx="12191400" cy="1343880"/>
           </a:xfrm>
           <a:prstGeom prst="rect">
             <a:avLst/>
@@ -4334,14 +5121,14 @@
       </p:sp>
       <p:sp>
         <p:nvSpPr>
-          <p:cNvPr id="55" name="TextBox 7"/>
+          <p:cNvPr id="65" name="TextBox 7"/>
           <p:cNvSpPr/>
           <p:nvPr/>
         </p:nvSpPr>
         <p:spPr>
           <a:xfrm>
             <a:off x="2196360" y="204120"/>
-            <a:ext cx="8376840" cy="923040"/>
+            <a:ext cx="8376480" cy="922680"/>
           </a:xfrm>
           <a:prstGeom prst="rect">
             <a:avLst/>
@@ -4391,7 +5178,7 @@
       </p:sp>
       <p:pic>
         <p:nvPicPr>
-          <p:cNvPr id="56" name="Picture 10"/>
+          <p:cNvPr id="66" name="Picture 10"/>
           <p:cNvPicPr/>
           <p:nvPr/>
         </p:nvPicPr>
@@ -4403,7 +5190,7 @@
         <p:spPr>
           <a:xfrm>
             <a:off x="838080" y="19800"/>
-            <a:ext cx="1236600" cy="1291680"/>
+            <a:ext cx="1236240" cy="1291320"/>
           </a:xfrm>
           <a:prstGeom prst="rect">
             <a:avLst/>
@@ -4416,7 +5203,7 @@
       </p:pic>
       <p:sp>
         <p:nvSpPr>
-          <p:cNvPr id="57" name="PlaceHolder 1"/>
+          <p:cNvPr id="67" name="PlaceHolder 1"/>
           <p:cNvSpPr>
             <a:spLocks noGrp="1"/>
           </p:cNvSpPr>
@@ -4427,7 +5214,7 @@
         <p:spPr>
           <a:xfrm>
             <a:off x="839880" y="1363680"/>
-            <a:ext cx="3931920" cy="1057320"/>
+            <a:ext cx="3931560" cy="1056960"/>
           </a:xfrm>
           <a:prstGeom prst="rect">
             <a:avLst/>
@@ -4447,6 +5234,9 @@
                 <a:spcPct val="90000"/>
               </a:lnSpc>
               <a:buNone/>
+              <a:tabLst>
+                <a:tab algn="l" pos="0"/>
+              </a:tabLst>
             </a:pPr>
             <a:r>
               <a:rPr lang="en-US" sz="3200" b="1" u="none" strike="noStrike">
@@ -4457,22 +5247,44 @@
                 <a:uFillTx/>
                 <a:latin typeface="Calibri Light"/>
               </a:rPr>
-              <a:t>Click to edit Master title style</a:t>
-            </a:r>
-            <a:endParaRPr lang="en-US" sz="3200" b="0" u="none" strike="noStrike">
-              <a:solidFill>
-                <a:schemeClr val="dk1"/>
-              </a:solidFill>
-              <a:effectLst/>
-              <a:uFillTx/>
-              <a:latin typeface="Calibri"/>
-            </a:endParaRPr>
-          </a:p>
-        </p:txBody>
-      </p:sp>
-      <p:sp>
-        <p:nvSpPr>
-          <p:cNvPr id="58" name="PlaceHolder 2"/>
+              <a:t>Click to edit </a:t>
+            </a:r>
+            <a:r>
+              <a:rPr lang="en-US" sz="3200" b="1" u="none" strike="noStrike">
+                <a:solidFill>
+                  <a:schemeClr val="dk1"/>
+                </a:solidFill>
+                <a:effectLst/>
+                <a:uFillTx/>
+                <a:latin typeface="Calibri Light"/>
+              </a:rPr>
+              <a:t>Master title </a:t>
+            </a:r>
+            <a:r>
+              <a:rPr lang="en-US" sz="3200" b="1" u="none" strike="noStrike">
+                <a:solidFill>
+                  <a:schemeClr val="dk1"/>
+                </a:solidFill>
+                <a:effectLst/>
+                <a:uFillTx/>
+                <a:latin typeface="Calibri Light"/>
+              </a:rPr>
+              <a:t>style</a:t>
+            </a:r>
+            <a:endParaRPr lang="en-GB" sz="3200" b="0" u="none" strike="noStrike">
+              <a:solidFill>
+                <a:srgbClr val="000000"/>
+              </a:solidFill>
+              <a:effectLst/>
+              <a:uFillTx/>
+              <a:latin typeface="Arial"/>
+            </a:endParaRPr>
+          </a:p>
+        </p:txBody>
+      </p:sp>
+      <p:sp>
+        <p:nvSpPr>
+          <p:cNvPr id="68" name="PlaceHolder 2"/>
           <p:cNvSpPr>
             <a:spLocks noGrp="1"/>
           </p:cNvSpPr>
@@ -4483,7 +5295,7 @@
         <p:spPr>
           <a:xfrm>
             <a:off x="5183280" y="1363680"/>
-            <a:ext cx="6171840" cy="4496760"/>
+            <a:ext cx="6171480" cy="4496400"/>
           </a:xfrm>
           <a:prstGeom prst="rect">
             <a:avLst/>
@@ -4523,13 +5335,13 @@
               </a:rPr>
               <a:t>Click to edit the outline text format</a:t>
             </a:r>
-            <a:endParaRPr lang="en-US" sz="3200" b="0" u="none" strike="noStrike">
-              <a:solidFill>
-                <a:schemeClr val="dk1"/>
-              </a:solidFill>
-              <a:effectLst/>
-              <a:uFillTx/>
-              <a:latin typeface="Calibri"/>
+            <a:endParaRPr lang="en-GB" sz="3200" b="0" u="none" strike="noStrike">
+              <a:solidFill>
+                <a:srgbClr val="000000"/>
+              </a:solidFill>
+              <a:effectLst/>
+              <a:uFillTx/>
+              <a:latin typeface="Arial"/>
             </a:endParaRPr>
           </a:p>
           <a:p>
@@ -4558,13 +5370,13 @@
               </a:rPr>
               <a:t>Second Outline Level</a:t>
             </a:r>
-            <a:endParaRPr lang="en-US" sz="3200" b="0" u="none" strike="noStrike">
-              <a:solidFill>
-                <a:schemeClr val="dk1"/>
-              </a:solidFill>
-              <a:effectLst/>
-              <a:uFillTx/>
-              <a:latin typeface="Calibri"/>
+            <a:endParaRPr lang="en-GB" sz="3200" b="0" u="none" strike="noStrike">
+              <a:solidFill>
+                <a:srgbClr val="000000"/>
+              </a:solidFill>
+              <a:effectLst/>
+              <a:uFillTx/>
+              <a:latin typeface="Arial"/>
             </a:endParaRPr>
           </a:p>
           <a:p>
@@ -4593,13 +5405,13 @@
               </a:rPr>
               <a:t>Third Outline Level</a:t>
             </a:r>
-            <a:endParaRPr lang="en-US" sz="3200" b="0" u="none" strike="noStrike">
-              <a:solidFill>
-                <a:schemeClr val="dk1"/>
-              </a:solidFill>
-              <a:effectLst/>
-              <a:uFillTx/>
-              <a:latin typeface="Calibri"/>
+            <a:endParaRPr lang="en-GB" sz="3200" b="0" u="none" strike="noStrike">
+              <a:solidFill>
+                <a:srgbClr val="000000"/>
+              </a:solidFill>
+              <a:effectLst/>
+              <a:uFillTx/>
+              <a:latin typeface="Arial"/>
             </a:endParaRPr>
           </a:p>
           <a:p>
@@ -4628,13 +5440,13 @@
               </a:rPr>
               <a:t>Fourth Outline Level</a:t>
             </a:r>
-            <a:endParaRPr lang="en-US" sz="3200" b="0" u="none" strike="noStrike">
-              <a:solidFill>
-                <a:schemeClr val="dk1"/>
-              </a:solidFill>
-              <a:effectLst/>
-              <a:uFillTx/>
-              <a:latin typeface="Calibri"/>
+            <a:endParaRPr lang="en-GB" sz="3200" b="0" u="none" strike="noStrike">
+              <a:solidFill>
+                <a:srgbClr val="000000"/>
+              </a:solidFill>
+              <a:effectLst/>
+              <a:uFillTx/>
+              <a:latin typeface="Arial"/>
             </a:endParaRPr>
           </a:p>
           <a:p>
@@ -4663,13 +5475,13 @@
               </a:rPr>
               <a:t>Fifth Outline Level</a:t>
             </a:r>
-            <a:endParaRPr lang="en-US" sz="3200" b="0" u="none" strike="noStrike">
-              <a:solidFill>
-                <a:schemeClr val="dk1"/>
-              </a:solidFill>
-              <a:effectLst/>
-              <a:uFillTx/>
-              <a:latin typeface="Calibri"/>
+            <a:endParaRPr lang="en-GB" sz="3200" b="0" u="none" strike="noStrike">
+              <a:solidFill>
+                <a:srgbClr val="000000"/>
+              </a:solidFill>
+              <a:effectLst/>
+              <a:uFillTx/>
+              <a:latin typeface="Arial"/>
             </a:endParaRPr>
           </a:p>
           <a:p>
@@ -4698,13 +5510,13 @@
               </a:rPr>
               <a:t>Sixth Outline Level</a:t>
             </a:r>
-            <a:endParaRPr lang="en-US" sz="3200" b="0" u="none" strike="noStrike">
-              <a:solidFill>
-                <a:schemeClr val="dk1"/>
-              </a:solidFill>
-              <a:effectLst/>
-              <a:uFillTx/>
-              <a:latin typeface="Calibri"/>
+            <a:endParaRPr lang="en-GB" sz="3200" b="0" u="none" strike="noStrike">
+              <a:solidFill>
+                <a:srgbClr val="000000"/>
+              </a:solidFill>
+              <a:effectLst/>
+              <a:uFillTx/>
+              <a:latin typeface="Arial"/>
             </a:endParaRPr>
           </a:p>
           <a:p>
@@ -4733,20 +5545,20 @@
               </a:rPr>
               <a:t>Seventh Outline Level</a:t>
             </a:r>
-            <a:endParaRPr lang="en-US" sz="3200" b="0" u="none" strike="noStrike">
-              <a:solidFill>
-                <a:schemeClr val="dk1"/>
-              </a:solidFill>
-              <a:effectLst/>
-              <a:uFillTx/>
-              <a:latin typeface="Calibri"/>
-            </a:endParaRPr>
-          </a:p>
-        </p:txBody>
-      </p:sp>
-      <p:sp>
-        <p:nvSpPr>
-          <p:cNvPr id="59" name="PlaceHolder 3"/>
+            <a:endParaRPr lang="en-GB" sz="3200" b="0" u="none" strike="noStrike">
+              <a:solidFill>
+                <a:srgbClr val="000000"/>
+              </a:solidFill>
+              <a:effectLst/>
+              <a:uFillTx/>
+              <a:latin typeface="Arial"/>
+            </a:endParaRPr>
+          </a:p>
+        </p:txBody>
+      </p:sp>
+      <p:sp>
+        <p:nvSpPr>
+          <p:cNvPr id="69" name="PlaceHolder 3"/>
           <p:cNvSpPr>
             <a:spLocks noGrp="1"/>
           </p:cNvSpPr>
@@ -4757,7 +5569,7 @@
         <p:spPr>
           <a:xfrm>
             <a:off x="839880" y="2421720"/>
-            <a:ext cx="3931920" cy="3447000"/>
+            <a:ext cx="3931560" cy="3446640"/>
           </a:xfrm>
           <a:prstGeom prst="rect">
             <a:avLst/>
@@ -4795,660 +5607,20 @@
               </a:rPr>
               <a:t>Edit Master text styles</a:t>
             </a:r>
-            <a:endParaRPr lang="en-US" sz="1600" b="0" u="none" strike="noStrike">
-              <a:solidFill>
-                <a:schemeClr val="dk1"/>
-              </a:solidFill>
-              <a:effectLst/>
-              <a:uFillTx/>
-              <a:latin typeface="Calibri"/>
-            </a:endParaRPr>
-          </a:p>
-        </p:txBody>
-      </p:sp>
-      <p:sp>
-        <p:nvSpPr>
-          <p:cNvPr id="60" name="PlaceHolder 4"/>
-          <p:cNvSpPr>
-            <a:spLocks noGrp="1"/>
-          </p:cNvSpPr>
-          <p:nvPr>
-            <p:ph type="dt" idx="22"/>
-          </p:nvPr>
-        </p:nvSpPr>
-        <p:spPr>
-          <a:xfrm>
-            <a:off x="838080" y="6356520"/>
-            <a:ext cx="2742840" cy="364680"/>
-          </a:xfrm>
-          <a:prstGeom prst="rect">
-            <a:avLst/>
-          </a:prstGeom>
-          <a:noFill/>
-          <a:ln w="0">
-            <a:noFill/>
-          </a:ln>
-        </p:spPr>
-        <p:txBody>
-          <a:bodyPr lIns="91440" rIns="91440" tIns="45720" bIns="45720" anchor="ctr">
-            <a:noAutofit/>
-          </a:bodyPr>
-          <a:lstStyle>
-            <a:lvl1pPr indent="0" defTabSz="914400">
-              <a:lnSpc>
-                <a:spcPct val="100000"/>
-              </a:lnSpc>
-              <a:buNone/>
-              <a:defRPr lang="en-US" sz="1200" b="0" u="none" strike="noStrike">
-                <a:solidFill>
-                  <a:schemeClr val="dk1">
-                    <a:tint val="75000"/>
-                  </a:schemeClr>
-                </a:solidFill>
-                <a:effectLst/>
-                <a:uFillTx/>
-                <a:latin typeface="Calibri"/>
-              </a:defRPr>
-            </a:lvl1pPr>
-          </a:lstStyle>
-          <a:p>
-            <a:pPr indent="0" defTabSz="914400">
-              <a:lnSpc>
-                <a:spcPct val="100000"/>
-              </a:lnSpc>
-              <a:buNone/>
-            </a:pPr>
-            <a:r>
-              <a:rPr lang="en-US" sz="1200" b="0" u="none" strike="noStrike">
-                <a:solidFill>
-                  <a:schemeClr val="dk1">
-                    <a:tint val="75000"/>
-                  </a:schemeClr>
-                </a:solidFill>
-                <a:effectLst/>
-                <a:uFillTx/>
-                <a:latin typeface="Calibri"/>
-              </a:rPr>
-              <a:t>&lt;date/time&gt;</a:t>
-            </a:r>
-            <a:endParaRPr lang="en-GB" sz="1200" b="0" u="none" strike="noStrike">
-              <a:solidFill>
-                <a:srgbClr val="000000"/>
-              </a:solidFill>
-              <a:effectLst/>
-              <a:uFillTx/>
-              <a:latin typeface="Times New Roman"/>
-            </a:endParaRPr>
-          </a:p>
-        </p:txBody>
-      </p:sp>
-      <p:sp>
-        <p:nvSpPr>
-          <p:cNvPr id="61" name="PlaceHolder 5"/>
-          <p:cNvSpPr>
-            <a:spLocks noGrp="1"/>
-          </p:cNvSpPr>
-          <p:nvPr>
-            <p:ph type="ftr" idx="23"/>
-          </p:nvPr>
-        </p:nvSpPr>
-        <p:spPr>
-          <a:xfrm>
-            <a:off x="4038480" y="6356520"/>
-            <a:ext cx="4114440" cy="364680"/>
-          </a:xfrm>
-          <a:prstGeom prst="rect">
-            <a:avLst/>
-          </a:prstGeom>
-          <a:noFill/>
-          <a:ln w="0">
-            <a:noFill/>
-          </a:ln>
-        </p:spPr>
-        <p:txBody>
-          <a:bodyPr lIns="91440" rIns="91440" tIns="45720" bIns="45720" anchor="ctr">
-            <a:noAutofit/>
-          </a:bodyPr>
-          <a:lstStyle>
-            <a:lvl1pPr indent="0" algn="ctr">
-              <a:buNone/>
-              <a:defRPr lang="en-GB" sz="1400" b="0" u="none" strike="noStrike">
-                <a:solidFill>
-                  <a:srgbClr val="000000"/>
-                </a:solidFill>
-                <a:effectLst/>
-                <a:uFillTx/>
-                <a:latin typeface="Times New Roman"/>
-              </a:defRPr>
-            </a:lvl1pPr>
-          </a:lstStyle>
-          <a:p>
-            <a:pPr indent="0" algn="ctr">
-              <a:buNone/>
-            </a:pPr>
-            <a:r>
-              <a:rPr lang="en-GB" sz="1400" b="0" u="none" strike="noStrike">
-                <a:solidFill>
-                  <a:srgbClr val="000000"/>
-                </a:solidFill>
-                <a:effectLst/>
-                <a:uFillTx/>
-                <a:latin typeface="Times New Roman"/>
-              </a:rPr>
-              <a:t>&lt;footer&gt;</a:t>
-            </a:r>
-            <a:endParaRPr lang="en-GB" sz="1400" b="0" u="none" strike="noStrike">
-              <a:solidFill>
-                <a:srgbClr val="000000"/>
-              </a:solidFill>
-              <a:effectLst/>
-              <a:uFillTx/>
-              <a:latin typeface="Times New Roman"/>
-            </a:endParaRPr>
-          </a:p>
-        </p:txBody>
-      </p:sp>
-      <p:sp>
-        <p:nvSpPr>
-          <p:cNvPr id="62" name="PlaceHolder 6"/>
-          <p:cNvSpPr>
-            <a:spLocks noGrp="1"/>
-          </p:cNvSpPr>
-          <p:nvPr>
-            <p:ph type="sldNum" idx="24"/>
-          </p:nvPr>
-        </p:nvSpPr>
-        <p:spPr>
-          <a:xfrm>
-            <a:off x="8610480" y="6356520"/>
-            <a:ext cx="2742840" cy="364680"/>
-          </a:xfrm>
-          <a:prstGeom prst="rect">
-            <a:avLst/>
-          </a:prstGeom>
-          <a:noFill/>
-          <a:ln w="0">
-            <a:noFill/>
-          </a:ln>
-        </p:spPr>
-        <p:txBody>
-          <a:bodyPr lIns="91440" rIns="91440" tIns="45720" bIns="45720" anchor="ctr">
-            <a:noAutofit/>
-          </a:bodyPr>
-          <a:lstStyle>
-            <a:lvl1pPr indent="0" algn="r" defTabSz="914400">
-              <a:lnSpc>
-                <a:spcPct val="100000"/>
-              </a:lnSpc>
-              <a:buNone/>
-              <a:defRPr lang="en-US" sz="1200" b="0" u="none" strike="noStrike">
-                <a:solidFill>
-                  <a:schemeClr val="dk1">
-                    <a:tint val="75000"/>
-                  </a:schemeClr>
-                </a:solidFill>
-                <a:effectLst/>
-                <a:uFillTx/>
-                <a:latin typeface="Calibri"/>
-              </a:defRPr>
-            </a:lvl1pPr>
-          </a:lstStyle>
-          <a:p>
-            <a:pPr indent="0" algn="r" defTabSz="914400">
-              <a:lnSpc>
-                <a:spcPct val="100000"/>
-              </a:lnSpc>
-              <a:buNone/>
-            </a:pPr>
-            <a:fld id="{0EE5B9F4-3A45-4BD8-BAC3-51C175B9C0FD}" type="slidenum">
-              <a:rPr lang="en-US" sz="1200" b="0" u="none" strike="noStrike">
-                <a:solidFill>
-                  <a:schemeClr val="dk1">
-                    <a:tint val="75000"/>
-                  </a:schemeClr>
-                </a:solidFill>
-                <a:effectLst/>
-                <a:uFillTx/>
-                <a:latin typeface="Calibri"/>
-              </a:rPr>
-              <a:t>&lt;number&gt;</a:t>
-            </a:fld>
-            <a:endParaRPr lang="en-GB" sz="1200" b="0" u="none" strike="noStrike">
-              <a:solidFill>
-                <a:srgbClr val="000000"/>
-              </a:solidFill>
-              <a:effectLst/>
-              <a:uFillTx/>
-              <a:latin typeface="Times New Roman"/>
-            </a:endParaRPr>
-          </a:p>
-        </p:txBody>
-      </p:sp>
-    </p:spTree>
-  </p:cSld>
-</p:sldLayout>
-</file>
-
-<file path=ppt/slideLayouts/slideLayout9.xml><?xml version="1.0" encoding="utf-8"?>
-<p:sldLayout xmlns:a="http://schemas.openxmlformats.org/drawingml/2006/main" xmlns:p="http://schemas.openxmlformats.org/presentationml/2006/main" xmlns:r="http://schemas.openxmlformats.org/officeDocument/2006/relationships" xmlns:p14="http://schemas.microsoft.com/office/powerpoint/2010/main" xmlns:p15="http://schemas.microsoft.com/office/powerpoint/2012/main" xmlns:mc="http://schemas.openxmlformats.org/markup-compatibility/2006" type="vertTx" preserve="1">
-  <p:cSld name="Title and Vertical Text">
-    <p:bg>
-      <p:bgPr>
-        <a:solidFill>
-          <a:srgbClr val="ffffff"/>
-        </a:solidFill>
-      </p:bgPr>
-    </p:bg>
-    <p:spTree>
-      <p:nvGrpSpPr>
-        <p:cNvPr id="1" name=""/>
-        <p:cNvGrpSpPr/>
-        <p:nvPr/>
-      </p:nvGrpSpPr>
-      <p:grpSpPr>
-        <a:xfrm>
-          <a:off x="0" y="0"/>
-          <a:ext cx="0" cy="0"/>
-          <a:chOff x="0" y="0"/>
-          <a:chExt cx="0" cy="0"/>
-        </a:xfrm>
-      </p:grpSpPr>
-      <p:sp>
-        <p:nvSpPr>
-          <p:cNvPr id="63" name="Rectangle 6"/>
-          <p:cNvSpPr/>
-          <p:nvPr/>
-        </p:nvSpPr>
-        <p:spPr>
-          <a:xfrm>
-            <a:off x="0" y="-6480"/>
-            <a:ext cx="12191760" cy="1344240"/>
-          </a:xfrm>
-          <a:prstGeom prst="rect">
-            <a:avLst/>
-          </a:prstGeom>
-          <a:solidFill>
-            <a:srgbClr val="0070c0"/>
-          </a:solidFill>
-          <a:ln>
-            <a:noFill/>
-          </a:ln>
-        </p:spPr>
-        <p:style>
-          <a:lnRef idx="2">
-            <a:schemeClr val="accent1">
-              <a:shade val="50000"/>
-            </a:schemeClr>
-          </a:lnRef>
-          <a:fillRef idx="1">
-            <a:schemeClr val="accent1"/>
-          </a:fillRef>
-          <a:effectRef idx="0">
-            <a:schemeClr val="accent1"/>
-          </a:effectRef>
-          <a:fontRef idx="minor"/>
-        </p:style>
-        <p:txBody>
-          <a:bodyPr lIns="90000" rIns="90000" tIns="45000" bIns="45000" anchor="ctr">
-            <a:noAutofit/>
-          </a:bodyPr>
-          <a:p>
-            <a:pPr algn="ctr" defTabSz="914400">
-              <a:lnSpc>
-                <a:spcPct val="100000"/>
-              </a:lnSpc>
-            </a:pPr>
-            <a:endParaRPr lang="en-US" sz="1800" b="0" u="none" strike="noStrike">
-              <a:solidFill>
-                <a:schemeClr val="lt1"/>
-              </a:solidFill>
-              <a:effectLst/>
-              <a:uFillTx/>
-              <a:latin typeface="Calibri"/>
-            </a:endParaRPr>
-          </a:p>
-        </p:txBody>
-      </p:sp>
-      <p:sp>
-        <p:nvSpPr>
-          <p:cNvPr id="64" name="TextBox 7"/>
-          <p:cNvSpPr/>
-          <p:nvPr/>
-        </p:nvSpPr>
-        <p:spPr>
-          <a:xfrm>
-            <a:off x="2196360" y="204120"/>
-            <a:ext cx="8376840" cy="923040"/>
-          </a:xfrm>
-          <a:prstGeom prst="rect">
-            <a:avLst/>
-          </a:prstGeom>
-          <a:noFill/>
-          <a:ln w="0">
-            <a:noFill/>
-          </a:ln>
-        </p:spPr>
-        <p:style>
-          <a:lnRef idx="0"/>
-          <a:fillRef idx="0"/>
-          <a:effectRef idx="0"/>
-          <a:fontRef idx="minor"/>
-        </p:style>
-        <p:txBody>
-          <a:bodyPr lIns="90000" rIns="90000" tIns="45000" bIns="45000" anchor="t">
-            <a:spAutoFit/>
-          </a:bodyPr>
-          <a:p>
-            <a:pPr defTabSz="914400">
-              <a:lnSpc>
-                <a:spcPct val="100000"/>
-              </a:lnSpc>
-            </a:pPr>
-            <a:r>
-              <a:rPr lang="en-US" sz="5400" b="0" u="none" strike="noStrike">
-                <a:solidFill>
-                  <a:schemeClr val="lt1"/>
-                </a:solidFill>
-                <a:effectLst/>
-                <a:uFillTx/>
-                <a:latin typeface="Bodoni MT"/>
-              </a:rPr>
-              <a:t>University of Dar es Salaam</a:t>
-            </a:r>
-            <a:endParaRPr lang="en-GB" sz="5400" b="0" u="none" strike="noStrike">
-              <a:solidFill>
-                <a:srgbClr val="000000"/>
-              </a:solidFill>
-              <a:effectLst/>
-              <a:uFillTx/>
-              <a:latin typeface="Arial"/>
-            </a:endParaRPr>
-          </a:p>
-        </p:txBody>
-      </p:sp>
-      <p:pic>
-        <p:nvPicPr>
-          <p:cNvPr id="65" name="Picture 10"/>
-          <p:cNvPicPr/>
-          <p:nvPr/>
-        </p:nvPicPr>
-        <p:blipFill>
-          <a:blip r:embed="rId2"/>
-          <a:srcRect l="4296" t="5704" r="15070" b="10047"/>
-          <a:stretch/>
-        </p:blipFill>
-        <p:spPr>
-          <a:xfrm>
-            <a:off x="838080" y="19800"/>
-            <a:ext cx="1236600" cy="1291680"/>
-          </a:xfrm>
-          <a:prstGeom prst="rect">
-            <a:avLst/>
-          </a:prstGeom>
-          <a:noFill/>
-          <a:ln w="0">
-            <a:noFill/>
-          </a:ln>
-        </p:spPr>
-      </p:pic>
-      <p:sp>
-        <p:nvSpPr>
-          <p:cNvPr id="66" name="PlaceHolder 1"/>
-          <p:cNvSpPr>
-            <a:spLocks noGrp="1"/>
-          </p:cNvSpPr>
-          <p:nvPr>
-            <p:ph type="title"/>
-          </p:nvPr>
-        </p:nvSpPr>
-        <p:spPr>
-          <a:xfrm>
-            <a:off x="838080" y="1401480"/>
-            <a:ext cx="10515240" cy="1325160"/>
-          </a:xfrm>
-          <a:prstGeom prst="rect">
-            <a:avLst/>
-          </a:prstGeom>
-          <a:noFill/>
-          <a:ln w="0">
-            <a:noFill/>
-          </a:ln>
-        </p:spPr>
-        <p:txBody>
-          <a:bodyPr lIns="91440" rIns="91440" tIns="45720" bIns="45720" anchor="ctr">
-            <a:noAutofit/>
-          </a:bodyPr>
-          <a:p>
-            <a:pPr indent="0" defTabSz="914400">
-              <a:lnSpc>
-                <a:spcPct val="90000"/>
-              </a:lnSpc>
-              <a:buNone/>
-            </a:pPr>
-            <a:r>
-              <a:rPr lang="en-US" sz="4400" b="1" u="none" strike="noStrike">
-                <a:solidFill>
-                  <a:schemeClr val="dk1"/>
-                </a:solidFill>
-                <a:effectLst/>
-                <a:uFillTx/>
-                <a:latin typeface="Calibri Light"/>
-              </a:rPr>
-              <a:t>Click to edit Master title style</a:t>
-            </a:r>
-            <a:endParaRPr lang="en-US" sz="4400" b="0" u="none" strike="noStrike">
-              <a:solidFill>
-                <a:schemeClr val="dk1"/>
-              </a:solidFill>
-              <a:effectLst/>
-              <a:uFillTx/>
-              <a:latin typeface="Calibri"/>
-            </a:endParaRPr>
-          </a:p>
-        </p:txBody>
-      </p:sp>
-      <p:sp>
-        <p:nvSpPr>
-          <p:cNvPr id="67" name="PlaceHolder 2"/>
-          <p:cNvSpPr>
-            <a:spLocks noGrp="1"/>
-          </p:cNvSpPr>
-          <p:nvPr>
-            <p:ph type="body"/>
-          </p:nvPr>
-        </p:nvSpPr>
-        <p:spPr>
-          <a:xfrm>
-            <a:off x="838080" y="2727360"/>
-            <a:ext cx="10515240" cy="3449520"/>
-          </a:xfrm>
-          <a:prstGeom prst="rect">
-            <a:avLst/>
-          </a:prstGeom>
-          <a:noFill/>
-          <a:ln w="0">
-            <a:noFill/>
-          </a:ln>
-        </p:spPr>
-        <p:txBody>
-          <a:bodyPr lIns="91440" rIns="91440" tIns="45720" bIns="45720" anchor="t" vert="eaVert">
-            <a:noAutofit/>
-          </a:bodyPr>
-          <a:p>
-            <a:pPr marL="228600" indent="-228600" defTabSz="914400">
-              <a:lnSpc>
-                <a:spcPct val="90000"/>
-              </a:lnSpc>
-              <a:spcBef>
-                <a:spcPts val="1001"/>
-              </a:spcBef>
-              <a:buClr>
-                <a:srgbClr val="000000"/>
-              </a:buClr>
-              <a:buFont typeface="Arial"/>
-              <a:buChar char="•"/>
-            </a:pPr>
-            <a:r>
-              <a:rPr lang="en-US" sz="2800" b="0" u="none" strike="noStrike">
-                <a:solidFill>
-                  <a:schemeClr val="dk1"/>
-                </a:solidFill>
-                <a:effectLst/>
-                <a:uFillTx/>
-                <a:latin typeface="Calibri"/>
-              </a:rPr>
-              <a:t>Edit Master text styles</a:t>
-            </a:r>
-            <a:endParaRPr lang="en-US" sz="2800" b="0" u="none" strike="noStrike">
-              <a:solidFill>
-                <a:schemeClr val="dk1"/>
-              </a:solidFill>
-              <a:effectLst/>
-              <a:uFillTx/>
-              <a:latin typeface="Calibri"/>
-            </a:endParaRPr>
-          </a:p>
-          <a:p>
-            <a:pPr marL="685800" lvl="1" indent="-228600" defTabSz="914400">
-              <a:lnSpc>
-                <a:spcPct val="90000"/>
-              </a:lnSpc>
-              <a:spcBef>
-                <a:spcPts val="499"/>
-              </a:spcBef>
-              <a:buClr>
-                <a:srgbClr val="000000"/>
-              </a:buClr>
-              <a:buFont typeface="Arial"/>
-              <a:buChar char="•"/>
-            </a:pPr>
-            <a:r>
-              <a:rPr lang="en-US" sz="2400" b="0" u="none" strike="noStrike">
-                <a:solidFill>
-                  <a:schemeClr val="dk1"/>
-                </a:solidFill>
-                <a:effectLst/>
-                <a:uFillTx/>
-                <a:latin typeface="Calibri"/>
-              </a:rPr>
-              <a:t>Second level</a:t>
-            </a:r>
-            <a:endParaRPr lang="en-US" sz="2400" b="0" u="none" strike="noStrike">
-              <a:solidFill>
-                <a:schemeClr val="dk1"/>
-              </a:solidFill>
-              <a:effectLst/>
-              <a:uFillTx/>
-              <a:latin typeface="Calibri"/>
-            </a:endParaRPr>
-          </a:p>
-          <a:p>
-            <a:pPr marL="1143000" lvl="2" indent="-228600" defTabSz="914400">
-              <a:lnSpc>
-                <a:spcPct val="90000"/>
-              </a:lnSpc>
-              <a:spcBef>
-                <a:spcPts val="499"/>
-              </a:spcBef>
-              <a:buClr>
-                <a:srgbClr val="000000"/>
-              </a:buClr>
-              <a:buFont typeface="Arial"/>
-              <a:buChar char="•"/>
-            </a:pPr>
-            <a:r>
-              <a:rPr lang="en-US" sz="2000" b="0" u="none" strike="noStrike">
-                <a:solidFill>
-                  <a:schemeClr val="dk1"/>
-                </a:solidFill>
-                <a:effectLst/>
-                <a:uFillTx/>
-                <a:latin typeface="Calibri"/>
-              </a:rPr>
-              <a:t>Third level</a:t>
-            </a:r>
-            <a:endParaRPr lang="en-US" sz="2000" b="0" u="none" strike="noStrike">
-              <a:solidFill>
-                <a:schemeClr val="dk1"/>
-              </a:solidFill>
-              <a:effectLst/>
-              <a:uFillTx/>
-              <a:latin typeface="Calibri"/>
-            </a:endParaRPr>
-          </a:p>
-          <a:p>
-            <a:pPr marL="1600200" lvl="3" indent="-228600" defTabSz="914400">
-              <a:lnSpc>
-                <a:spcPct val="90000"/>
-              </a:lnSpc>
-              <a:spcBef>
-                <a:spcPts val="499"/>
-              </a:spcBef>
-              <a:buClr>
-                <a:srgbClr val="000000"/>
-              </a:buClr>
-              <a:buFont typeface="Arial"/>
-              <a:buChar char="•"/>
-            </a:pPr>
-            <a:r>
-              <a:rPr lang="en-US" sz="1800" b="0" u="none" strike="noStrike">
-                <a:solidFill>
-                  <a:schemeClr val="dk1"/>
-                </a:solidFill>
-                <a:effectLst/>
-                <a:uFillTx/>
-                <a:latin typeface="Calibri"/>
-              </a:rPr>
-              <a:t>Fourth level</a:t>
-            </a:r>
-            <a:endParaRPr lang="en-US" sz="1800" b="0" u="none" strike="noStrike">
-              <a:solidFill>
-                <a:schemeClr val="dk1"/>
-              </a:solidFill>
-              <a:effectLst/>
-              <a:uFillTx/>
-              <a:latin typeface="Calibri"/>
-            </a:endParaRPr>
-          </a:p>
-          <a:p>
-            <a:pPr marL="2057400" lvl="4" indent="-228600" defTabSz="914400">
-              <a:lnSpc>
-                <a:spcPct val="90000"/>
-              </a:lnSpc>
-              <a:spcBef>
-                <a:spcPts val="499"/>
-              </a:spcBef>
-              <a:buClr>
-                <a:srgbClr val="000000"/>
-              </a:buClr>
-              <a:buFont typeface="Arial"/>
-              <a:buChar char="•"/>
-            </a:pPr>
-            <a:r>
-              <a:rPr lang="en-US" sz="1800" b="0" u="none" strike="noStrike">
-                <a:solidFill>
-                  <a:schemeClr val="dk1"/>
-                </a:solidFill>
-                <a:effectLst/>
-                <a:uFillTx/>
-                <a:latin typeface="Calibri"/>
-              </a:rPr>
-              <a:t>Fifth level</a:t>
-            </a:r>
-            <a:endParaRPr lang="en-US" sz="1800" b="0" u="none" strike="noStrike">
-              <a:solidFill>
-                <a:schemeClr val="dk1"/>
-              </a:solidFill>
-              <a:effectLst/>
-              <a:uFillTx/>
-              <a:latin typeface="Calibri"/>
-            </a:endParaRPr>
-          </a:p>
-        </p:txBody>
-      </p:sp>
-      <p:sp>
-        <p:nvSpPr>
-          <p:cNvPr id="68" name="PlaceHolder 3"/>
+            <a:endParaRPr lang="en-GB" sz="1600" b="0" u="none" strike="noStrike">
+              <a:solidFill>
+                <a:srgbClr val="000000"/>
+              </a:solidFill>
+              <a:effectLst/>
+              <a:uFillTx/>
+              <a:latin typeface="Arial"/>
+            </a:endParaRPr>
+          </a:p>
+        </p:txBody>
+      </p:sp>
+      <p:sp>
+        <p:nvSpPr>
+          <p:cNvPr id="70" name="PlaceHolder 4"/>
           <p:cNvSpPr>
             <a:spLocks noGrp="1"/>
           </p:cNvSpPr>
@@ -5459,7 +5631,7 @@
         <p:spPr>
           <a:xfrm>
             <a:off x="838080" y="6356520"/>
-            <a:ext cx="2742840" cy="364680"/>
+            <a:ext cx="2742480" cy="364320"/>
           </a:xfrm>
           <a:prstGeom prst="rect">
             <a:avLst/>
@@ -5479,6 +5651,9 @@
                 <a:spcPct val="100000"/>
               </a:lnSpc>
               <a:buNone/>
+              <a:tabLst>
+                <a:tab algn="l" pos="0"/>
+              </a:tabLst>
               <a:defRPr lang="en-US" sz="1200" b="0" u="none" strike="noStrike">
                 <a:solidFill>
                   <a:schemeClr val="dk1">
@@ -5497,6 +5672,9 @@
                 <a:spcPct val="100000"/>
               </a:lnSpc>
               <a:buNone/>
+              <a:tabLst>
+                <a:tab algn="l" pos="0"/>
+              </a:tabLst>
             </a:pPr>
             <a:r>
               <a:rPr lang="en-US" sz="1200" b="0" u="none" strike="noStrike">
@@ -5524,7 +5702,7 @@
       </p:sp>
       <p:sp>
         <p:nvSpPr>
-          <p:cNvPr id="69" name="PlaceHolder 4"/>
+          <p:cNvPr id="71" name="PlaceHolder 5"/>
           <p:cNvSpPr>
             <a:spLocks noGrp="1"/>
           </p:cNvSpPr>
@@ -5535,7 +5713,7 @@
         <p:spPr>
           <a:xfrm>
             <a:off x="4038480" y="6356520"/>
-            <a:ext cx="4114440" cy="364680"/>
+            <a:ext cx="4114080" cy="364320"/>
           </a:xfrm>
           <a:prstGeom prst="rect">
             <a:avLst/>
@@ -5551,7 +5729,13 @@
           </a:bodyPr>
           <a:lstStyle>
             <a:lvl1pPr indent="0" algn="ctr">
+              <a:lnSpc>
+                <a:spcPct val="100000"/>
+              </a:lnSpc>
               <a:buNone/>
+              <a:tabLst>
+                <a:tab algn="l" pos="0"/>
+              </a:tabLst>
               <a:defRPr lang="en-GB" sz="1400" b="0" u="none" strike="noStrike">
                 <a:solidFill>
                   <a:srgbClr val="000000"/>
@@ -5564,7 +5748,13 @@
           </a:lstStyle>
           <a:p>
             <a:pPr indent="0" algn="ctr">
+              <a:lnSpc>
+                <a:spcPct val="100000"/>
+              </a:lnSpc>
               <a:buNone/>
+              <a:tabLst>
+                <a:tab algn="l" pos="0"/>
+              </a:tabLst>
             </a:pPr>
             <a:r>
               <a:rPr lang="en-GB" sz="1400" b="0" u="none" strike="noStrike">
@@ -5590,7 +5780,7 @@
       </p:sp>
       <p:sp>
         <p:nvSpPr>
-          <p:cNvPr id="70" name="PlaceHolder 5"/>
+          <p:cNvPr id="72" name="PlaceHolder 6"/>
           <p:cNvSpPr>
             <a:spLocks noGrp="1"/>
           </p:cNvSpPr>
@@ -5601,7 +5791,7 @@
         <p:spPr>
           <a:xfrm>
             <a:off x="8610480" y="6356520"/>
-            <a:ext cx="2742840" cy="364680"/>
+            <a:ext cx="2742480" cy="364320"/>
           </a:xfrm>
           <a:prstGeom prst="rect">
             <a:avLst/>
@@ -5621,6 +5811,9 @@
                 <a:spcPct val="100000"/>
               </a:lnSpc>
               <a:buNone/>
+              <a:tabLst>
+                <a:tab algn="l" pos="0"/>
+              </a:tabLst>
               <a:defRPr lang="en-US" sz="1200" b="0" u="none" strike="noStrike">
                 <a:solidFill>
                   <a:schemeClr val="dk1">
@@ -5639,8 +5832,11 @@
                 <a:spcPct val="100000"/>
               </a:lnSpc>
               <a:buNone/>
-            </a:pPr>
-            <a:fld id="{14905938-7889-4420-8455-136CE05CF573}" type="slidenum">
+              <a:tabLst>
+                <a:tab algn="l" pos="0"/>
+              </a:tabLst>
+            </a:pPr>
+            <a:fld id="{F23A2042-9308-4E13-84E8-24D637C4E25C}" type="slidenum">
               <a:rPr lang="en-US" sz="1200" b="0" u="none" strike="noStrike">
                 <a:solidFill>
                   <a:schemeClr val="dk1">
@@ -5722,7 +5918,7 @@
       </p:grpSpPr>
       <p:sp>
         <p:nvSpPr>
-          <p:cNvPr id="71" name="PlaceHolder 1"/>
+          <p:cNvPr id="73" name="PlaceHolder 1"/>
           <p:cNvSpPr>
             <a:spLocks noGrp="1"/>
           </p:cNvSpPr>
@@ -5733,7 +5929,7 @@
         <p:spPr>
           <a:xfrm>
             <a:off x="1092960" y="1405800"/>
-            <a:ext cx="10005840" cy="1294200"/>
+            <a:ext cx="10005480" cy="1293840"/>
           </a:xfrm>
           <a:prstGeom prst="rect">
             <a:avLst/>
@@ -5759,9 +5955,12 @@
                 <a:spcPts val="567"/>
               </a:spcAft>
               <a:buNone/>
-            </a:pPr>
-            <a:r>
-              <a:rPr lang="en-US" sz="4000" b="1" u="none" strike="noStrike">
+              <a:tabLst>
+                <a:tab algn="l" pos="0"/>
+              </a:tabLst>
+            </a:pPr>
+            <a:r>
+              <a:rPr lang="en-GB" sz="4000" b="1" u="none" strike="noStrike">
                 <a:solidFill>
                   <a:schemeClr val="dk1"/>
                 </a:solidFill>
@@ -5771,26 +5970,25 @@
               </a:rPr>
               <a:t>FINAL YEAR PROJECT PROGRESS PRESENTATION</a:t>
             </a:r>
-            <a:endParaRPr lang="en-US" sz="4000" b="0" u="none" strike="noStrike">
-              <a:solidFill>
-                <a:schemeClr val="dk1"/>
-              </a:solidFill>
-              <a:effectLst/>
-              <a:uFillTx/>
-              <a:latin typeface="Times New Roman"/>
-              <a:ea typeface="Noto Sans CJK SC"/>
+            <a:endParaRPr lang="en-GB" sz="4000" b="0" u="none" strike="noStrike">
+              <a:solidFill>
+                <a:srgbClr val="000000"/>
+              </a:solidFill>
+              <a:effectLst/>
+              <a:uFillTx/>
+              <a:latin typeface="Arial"/>
             </a:endParaRPr>
           </a:p>
         </p:txBody>
       </p:sp>
       <p:graphicFrame>
         <p:nvGraphicFramePr>
-          <p:cNvPr id="72" name="Table 1"/>
+          <p:cNvPr id="74" name="Table 1"/>
           <p:cNvGraphicFramePr/>
           <p:nvPr/>
         </p:nvGraphicFramePr>
         <p:xfrm>
-          <a:off x="367920" y="2815560"/>
+          <a:off x="447120" y="3179160"/>
           <a:ext cx="11519640" cy="3356280"/>
         </p:xfrm>
         <a:graphic>
@@ -5814,7 +6012,7 @@
                         </a:lnSpc>
                       </a:pPr>
                       <a:r>
-                        <a:rPr lang="en-US" sz="2600" b="1" u="none" strike="noStrike">
+                        <a:rPr lang="en-GB" sz="2600" b="1" u="none" strike="noStrike">
                           <a:solidFill>
                             <a:schemeClr val="dk1"/>
                           </a:solidFill>
@@ -5830,7 +6028,7 @@
                         </a:solidFill>
                         <a:effectLst/>
                         <a:uFillTx/>
-                        <a:latin typeface="Times New Roman"/>
+                        <a:latin typeface="Arial"/>
                       </a:endParaRPr>
                     </a:p>
                   </a:txBody>
@@ -5882,7 +6080,7 @@
                         </a:solidFill>
                         <a:effectLst/>
                         <a:uFillTx/>
-                        <a:latin typeface="Times New Roman"/>
+                        <a:latin typeface="Arial"/>
                       </a:endParaRPr>
                     </a:p>
                     <a:p>
@@ -5911,7 +6109,7 @@
                         </a:solidFill>
                         <a:effectLst/>
                         <a:uFillTx/>
-                        <a:latin typeface="Times New Roman"/>
+                        <a:latin typeface="Arial"/>
                       </a:endParaRPr>
                     </a:p>
                   </a:txBody>
@@ -5965,7 +6163,7 @@
                         </a:solidFill>
                         <a:effectLst/>
                         <a:uFillTx/>
-                        <a:latin typeface="Times New Roman"/>
+                        <a:latin typeface="Arial"/>
                       </a:endParaRPr>
                     </a:p>
                   </a:txBody>
@@ -6017,7 +6215,7 @@
                         </a:solidFill>
                         <a:effectLst/>
                         <a:uFillTx/>
-                        <a:latin typeface="Times New Roman"/>
+                        <a:latin typeface="Arial"/>
                       </a:endParaRPr>
                     </a:p>
                   </a:txBody>
@@ -6071,7 +6269,7 @@
                         </a:solidFill>
                         <a:effectLst/>
                         <a:uFillTx/>
-                        <a:latin typeface="Times New Roman"/>
+                        <a:latin typeface="Arial"/>
                       </a:endParaRPr>
                     </a:p>
                   </a:txBody>
@@ -6115,7 +6313,7 @@
                           <a:uFillTx/>
                           <a:latin typeface="Times New Roman"/>
                         </a:rPr>
-                        <a:t>Design and Implementation of an Automated Card Issuance System</a:t>
+                        <a:t>Design and Implementation of an Automated ID Card Issuance System</a:t>
                       </a:r>
                       <a:endParaRPr lang="en-GB" sz="2600" b="0" u="none" strike="noStrike">
                         <a:solidFill>
@@ -6123,7 +6321,7 @@
                         </a:solidFill>
                         <a:effectLst/>
                         <a:uFillTx/>
-                        <a:latin typeface="Times New Roman"/>
+                        <a:latin typeface="Arial"/>
                       </a:endParaRPr>
                     </a:p>
                   </a:txBody>
@@ -6154,6 +6352,14 @@
       </p:graphicFrame>
     </p:spTree>
   </p:cSld>
+  <mc:AlternateContent>
+    <mc:Choice Requires="p14">
+      <p:transition spd="slow" p14:dur="2000"/>
+    </mc:Choice>
+    <mc:Fallback>
+      <p:transition spd="slow"/>
+    </mc:Fallback>
+  </mc:AlternateContent>
 </p:sld>
 </file>
 
@@ -6176,7 +6382,7 @@
       </p:grpSpPr>
       <p:sp>
         <p:nvSpPr>
-          <p:cNvPr id="99" name="PlaceHolder 1"/>
+          <p:cNvPr id="101" name="PlaceHolder 1"/>
           <p:cNvSpPr>
             <a:spLocks noGrp="1"/>
           </p:cNvSpPr>
@@ -6187,7 +6393,7 @@
         <p:spPr>
           <a:xfrm>
             <a:off x="2160000" y="2766240"/>
-            <a:ext cx="7920000" cy="1913760"/>
+            <a:ext cx="7919640" cy="1913400"/>
           </a:xfrm>
           <a:prstGeom prst="rect">
             <a:avLst/>
@@ -6207,9 +6413,12 @@
                 <a:spcPct val="90000"/>
               </a:lnSpc>
               <a:buNone/>
-            </a:pPr>
-            <a:r>
-              <a:rPr lang="en-US" sz="9600" b="1" u="none" strike="noStrike">
+              <a:tabLst>
+                <a:tab algn="l" pos="0"/>
+              </a:tabLst>
+            </a:pPr>
+            <a:r>
+              <a:rPr lang="en-GB" sz="9600" b="1" u="none" strike="noStrike">
                 <a:solidFill>
                   <a:schemeClr val="dk1"/>
                 </a:solidFill>
@@ -6219,13 +6428,13 @@
               </a:rPr>
               <a:t>THANK YOU!</a:t>
             </a:r>
-            <a:endParaRPr lang="en-US" sz="9600" b="0" u="none" strike="noStrike">
-              <a:solidFill>
-                <a:schemeClr val="dk1"/>
-              </a:solidFill>
-              <a:effectLst/>
-              <a:uFillTx/>
-              <a:latin typeface="Times New Roman"/>
+            <a:endParaRPr lang="en-GB" sz="9600" b="0" u="none" strike="noStrike">
+              <a:solidFill>
+                <a:srgbClr val="000000"/>
+              </a:solidFill>
+              <a:effectLst/>
+              <a:uFillTx/>
+              <a:latin typeface="Arial"/>
             </a:endParaRPr>
           </a:p>
         </p:txBody>
@@ -6244,7 +6453,7 @@
         <p:txBody>
           <a:bodyPr/>
           <a:p>
-            <a:fld id="{F54C8542-42D2-489A-ABE6-B49E090C7752}" type="slidenum">
+            <a:fld id="{8D0D01ED-F0F6-447A-B417-DC22E3173DB1}" type="slidenum">
               <a:t>10</a:t>
             </a:fld>
           </a:p>
@@ -6264,7 +6473,7 @@
         <p:txBody>
           <a:bodyPr/>
           <a:p>
-            <a:fld id="{B0B158F2-DE6F-426A-B85F-DFF276754B50}" type="datetime1">
+            <a:fld id="{73D2B345-F23C-4A9A-BAD8-2B5395A9F9C6}" type="datetime1">
               <a:rPr lang="en-GB"/>
               <a:t>16/01/2026</a:t>
             </a:fld>
@@ -6273,6 +6482,14 @@
       </p:sp>
     </p:spTree>
   </p:cSld>
+  <mc:AlternateContent>
+    <mc:Choice Requires="p14">
+      <p:transition spd="slow" p14:dur="2000"/>
+    </mc:Choice>
+    <mc:Fallback>
+      <p:transition spd="slow"/>
+    </mc:Fallback>
+  </mc:AlternateContent>
 </p:sld>
 </file>
 
@@ -6295,7 +6512,7 @@
       </p:grpSpPr>
       <p:sp>
         <p:nvSpPr>
-          <p:cNvPr id="73" name="PlaceHolder 1"/>
+          <p:cNvPr id="75" name="PlaceHolder 1"/>
           <p:cNvSpPr>
             <a:spLocks noGrp="1"/>
           </p:cNvSpPr>
@@ -6306,7 +6523,7 @@
         <p:spPr>
           <a:xfrm>
             <a:off x="838080" y="1401480"/>
-            <a:ext cx="10515240" cy="1325160"/>
+            <a:ext cx="10514880" cy="1324800"/>
           </a:xfrm>
           <a:prstGeom prst="rect">
             <a:avLst/>
@@ -6326,9 +6543,12 @@
                 <a:spcPct val="90000"/>
               </a:lnSpc>
               <a:buNone/>
-            </a:pPr>
-            <a:r>
-              <a:rPr lang="en-US" sz="6000" b="1" u="none" strike="noStrike">
+              <a:tabLst>
+                <a:tab algn="l" pos="0"/>
+              </a:tabLst>
+            </a:pPr>
+            <a:r>
+              <a:rPr lang="en-GB" sz="6000" b="1" u="none" strike="noStrike">
                 <a:solidFill>
                   <a:schemeClr val="dk1"/>
                 </a:solidFill>
@@ -6338,20 +6558,20 @@
               </a:rPr>
               <a:t>Introduction</a:t>
             </a:r>
-            <a:endParaRPr lang="en-US" sz="6000" b="0" u="none" strike="noStrike">
-              <a:solidFill>
-                <a:schemeClr val="dk1"/>
-              </a:solidFill>
-              <a:effectLst/>
-              <a:uFillTx/>
-              <a:latin typeface="Times New Roman"/>
-            </a:endParaRPr>
-          </a:p>
-        </p:txBody>
-      </p:sp>
-      <p:sp>
-        <p:nvSpPr>
-          <p:cNvPr id="74" name="PlaceHolder 2"/>
+            <a:endParaRPr lang="en-GB" sz="6000" b="0" u="none" strike="noStrike">
+              <a:solidFill>
+                <a:srgbClr val="000000"/>
+              </a:solidFill>
+              <a:effectLst/>
+              <a:uFillTx/>
+              <a:latin typeface="Arial"/>
+            </a:endParaRPr>
+          </a:p>
+        </p:txBody>
+      </p:sp>
+      <p:sp>
+        <p:nvSpPr>
+          <p:cNvPr id="76" name="PlaceHolder 2"/>
           <p:cNvSpPr>
             <a:spLocks noGrp="1"/>
           </p:cNvSpPr>
@@ -6362,7 +6582,7 @@
         <p:spPr>
           <a:xfrm>
             <a:off x="824760" y="2850480"/>
-            <a:ext cx="10515240" cy="3449520"/>
+            <a:ext cx="10514880" cy="3449160"/>
           </a:xfrm>
           <a:prstGeom prst="rect">
             <a:avLst/>
@@ -6377,17 +6597,24 @@
             <a:noAutofit/>
           </a:bodyPr>
           <a:p>
-            <a:pPr marL="228600" indent="0" algn="just" defTabSz="914400">
+            <a:pPr marL="228600" algn="just" defTabSz="914400">
               <a:lnSpc>
                 <a:spcPct val="150000"/>
               </a:lnSpc>
               <a:spcBef>
                 <a:spcPts val="1001"/>
               </a:spcBef>
-              <a:buNone/>
-            </a:pPr>
-            <a:r>
-              <a:rPr lang="en-US" sz="3200" b="0" u="none" strike="noStrike">
+              <a:buClr>
+                <a:srgbClr val="000000"/>
+              </a:buClr>
+              <a:buFont typeface="Symbol" charset="2"/>
+              <a:buChar char=""/>
+              <a:tabLst>
+                <a:tab algn="l" pos="0"/>
+              </a:tabLst>
+            </a:pPr>
+            <a:r>
+              <a:rPr lang="en-GB" sz="2600" b="0" u="none" strike="noStrike">
                 <a:solidFill>
                   <a:schemeClr val="dk1"/>
                 </a:solidFill>
@@ -6395,10 +6622,36 @@
                 <a:uFillTx/>
                 <a:latin typeface="Times New Roman"/>
               </a:rPr>
-              <a:t>The project aims to develop a prototype for an Automated </a:t>
-            </a:r>
-            <a:r>
-              <a:rPr lang="en-US" sz="3200" b="0" u="none" strike="noStrike">
+              <a:t>The project aims to develop a prototype for an Automated Card Issuance System to streamline the collection of pre-printed ID Cards for registered students.</a:t>
+            </a:r>
+            <a:endParaRPr lang="en-GB" sz="2600" b="0" u="none" strike="noStrike">
+              <a:solidFill>
+                <a:srgbClr val="000000"/>
+              </a:solidFill>
+              <a:effectLst/>
+              <a:uFillTx/>
+              <a:latin typeface="Arial"/>
+            </a:endParaRPr>
+          </a:p>
+          <a:p>
+            <a:pPr marL="228600" algn="just" defTabSz="914400">
+              <a:lnSpc>
+                <a:spcPct val="150000"/>
+              </a:lnSpc>
+              <a:spcBef>
+                <a:spcPts val="1001"/>
+              </a:spcBef>
+              <a:buClr>
+                <a:srgbClr val="000000"/>
+              </a:buClr>
+              <a:buFont typeface="Symbol" charset="2"/>
+              <a:buChar char=""/>
+              <a:tabLst>
+                <a:tab algn="l" pos="0"/>
+              </a:tabLst>
+            </a:pPr>
+            <a:r>
+              <a:rPr lang="en-GB" sz="2600" b="0" u="none" strike="noStrike">
                 <a:solidFill>
                   <a:schemeClr val="dk1"/>
                 </a:solidFill>
@@ -6406,26 +6659,15 @@
                 <a:uFillTx/>
                 <a:latin typeface="Times New Roman"/>
               </a:rPr>
-              <a:t>Card Issuance System to streamline the collection of pre-</a:t>
-            </a:r>
-            <a:r>
-              <a:rPr lang="en-US" sz="3200" b="0" u="none" strike="noStrike">
-                <a:solidFill>
-                  <a:schemeClr val="dk1"/>
-                </a:solidFill>
-                <a:effectLst/>
-                <a:uFillTx/>
-                <a:latin typeface="Times New Roman"/>
-              </a:rPr>
-              <a:t>printed ID Cards for registered students.</a:t>
-            </a:r>
-            <a:endParaRPr lang="en-US" sz="3200" b="0" u="none" strike="noStrike">
-              <a:solidFill>
-                <a:schemeClr val="dk1"/>
-              </a:solidFill>
-              <a:effectLst/>
-              <a:uFillTx/>
-              <a:latin typeface="Times New Roman"/>
+              <a:t>Registered students will be able to return their expired cards and retrieve their valid ID cards for that particular academic year.</a:t>
+            </a:r>
+            <a:endParaRPr lang="en-GB" sz="2600" b="0" u="none" strike="noStrike">
+              <a:solidFill>
+                <a:srgbClr val="000000"/>
+              </a:solidFill>
+              <a:effectLst/>
+              <a:uFillTx/>
+              <a:latin typeface="Arial"/>
             </a:endParaRPr>
           </a:p>
         </p:txBody>
@@ -6444,7 +6686,7 @@
         <p:txBody>
           <a:bodyPr/>
           <a:p>
-            <a:fld id="{0E4BD5D7-DB46-4227-AA74-EE5622A382F9}" type="slidenum">
+            <a:fld id="{6EAB0EFE-492C-4D4A-B885-67BFC44D0840}" type="slidenum">
               <a:t>2</a:t>
             </a:fld>
           </a:p>
@@ -6464,7 +6706,7 @@
         <p:txBody>
           <a:bodyPr/>
           <a:p>
-            <a:fld id="{02AC3A29-555E-44A2-81BA-AAC2A459C9BB}" type="datetime1">
+            <a:fld id="{F200455A-164A-45B3-BC45-B9C372CB17D3}" type="datetime1">
               <a:rPr lang="en-GB"/>
               <a:t>16/01/2026</a:t>
             </a:fld>
@@ -6473,6 +6715,14 @@
       </p:sp>
     </p:spTree>
   </p:cSld>
+  <mc:AlternateContent>
+    <mc:Choice Requires="p14">
+      <p:transition spd="slow" p14:dur="2000"/>
+    </mc:Choice>
+    <mc:Fallback>
+      <p:transition spd="slow"/>
+    </mc:Fallback>
+  </mc:AlternateContent>
 </p:sld>
 </file>
 
@@ -6495,7 +6745,7 @@
       </p:grpSpPr>
       <p:sp>
         <p:nvSpPr>
-          <p:cNvPr id="75" name="PlaceHolder 1"/>
+          <p:cNvPr id="77" name="PlaceHolder 1"/>
           <p:cNvSpPr>
             <a:spLocks noGrp="1"/>
           </p:cNvSpPr>
@@ -6506,7 +6756,7 @@
         <p:spPr>
           <a:xfrm>
             <a:off x="838080" y="1401480"/>
-            <a:ext cx="10515240" cy="1325160"/>
+            <a:ext cx="10514880" cy="1324800"/>
           </a:xfrm>
           <a:prstGeom prst="rect">
             <a:avLst/>
@@ -6526,9 +6776,12 @@
                 <a:spcPct val="90000"/>
               </a:lnSpc>
               <a:buNone/>
-            </a:pPr>
-            <a:r>
-              <a:rPr lang="en-US" sz="6000" b="1" u="none" strike="noStrike">
+              <a:tabLst>
+                <a:tab algn="l" pos="0"/>
+              </a:tabLst>
+            </a:pPr>
+            <a:r>
+              <a:rPr lang="en-GB" sz="6000" b="1" u="none" strike="noStrike">
                 <a:solidFill>
                   <a:schemeClr val="dk1"/>
                 </a:solidFill>
@@ -6538,20 +6791,20 @@
               </a:rPr>
               <a:t>Problem Statement</a:t>
             </a:r>
-            <a:endParaRPr lang="en-US" sz="6000" b="0" u="none" strike="noStrike">
-              <a:solidFill>
-                <a:schemeClr val="dk1"/>
-              </a:solidFill>
-              <a:effectLst/>
-              <a:uFillTx/>
-              <a:latin typeface="Times New Roman"/>
-            </a:endParaRPr>
-          </a:p>
-        </p:txBody>
-      </p:sp>
-      <p:sp>
-        <p:nvSpPr>
-          <p:cNvPr id="76" name="PlaceHolder 2"/>
+            <a:endParaRPr lang="en-GB" sz="6000" b="0" u="none" strike="noStrike">
+              <a:solidFill>
+                <a:srgbClr val="000000"/>
+              </a:solidFill>
+              <a:effectLst/>
+              <a:uFillTx/>
+              <a:latin typeface="Arial"/>
+            </a:endParaRPr>
+          </a:p>
+        </p:txBody>
+      </p:sp>
+      <p:sp>
+        <p:nvSpPr>
+          <p:cNvPr id="78" name="PlaceHolder 2"/>
           <p:cNvSpPr>
             <a:spLocks noGrp="1"/>
           </p:cNvSpPr>
@@ -6562,7 +6815,7 @@
         <p:spPr>
           <a:xfrm>
             <a:off x="838080" y="2727360"/>
-            <a:ext cx="10515240" cy="3449520"/>
+            <a:ext cx="10514880" cy="3449160"/>
           </a:xfrm>
           <a:prstGeom prst="rect">
             <a:avLst/>
@@ -6585,9 +6838,12 @@
                 <a:spcPts val="1417"/>
               </a:spcBef>
               <a:buNone/>
-            </a:pPr>
-            <a:r>
-              <a:rPr lang="en-US" sz="3200" b="0" u="none" strike="noStrike">
+              <a:tabLst>
+                <a:tab algn="l" pos="0"/>
+              </a:tabLst>
+            </a:pPr>
+            <a:r>
+              <a:rPr lang="en-GB" sz="3200" b="0" u="none" strike="noStrike">
                 <a:solidFill>
                   <a:schemeClr val="dk1"/>
                 </a:solidFill>
@@ -6595,48 +6851,15 @@
                 <a:uFillTx/>
                 <a:latin typeface="Times New Roman"/>
               </a:rPr>
-              <a:t>The current ID Card Issuance process for registered </a:t>
-            </a:r>
-            <a:r>
-              <a:rPr lang="en-US" sz="3200" b="0" u="none" strike="noStrike">
-                <a:solidFill>
-                  <a:schemeClr val="dk1"/>
-                </a:solidFill>
-                <a:effectLst/>
-                <a:uFillTx/>
-                <a:latin typeface="Times New Roman"/>
-              </a:rPr>
-              <a:t>students at the University of Dar es Salaam faces long </a:t>
-            </a:r>
-            <a:r>
-              <a:rPr lang="en-US" sz="3200" b="0" u="none" strike="noStrike">
-                <a:solidFill>
-                  <a:schemeClr val="dk1"/>
-                </a:solidFill>
-                <a:effectLst/>
-                <a:uFillTx/>
-                <a:latin typeface="Times New Roman"/>
-              </a:rPr>
-              <a:t>waiting period, narrow working windows and staff </a:t>
-            </a:r>
-            <a:r>
-              <a:rPr lang="en-US" sz="3200" b="0" u="none" strike="noStrike">
-                <a:solidFill>
-                  <a:schemeClr val="dk1"/>
-                </a:solidFill>
-                <a:effectLst/>
-                <a:uFillTx/>
-                <a:latin typeface="Times New Roman"/>
-              </a:rPr>
-              <a:t>exhaustion due to large number of students</a:t>
-            </a:r>
-            <a:endParaRPr lang="en-US" sz="3200" b="0" u="none" strike="noStrike">
-              <a:solidFill>
-                <a:schemeClr val="dk1"/>
-              </a:solidFill>
-              <a:effectLst/>
-              <a:uFillTx/>
-              <a:latin typeface="Times New Roman"/>
+              <a:t>The current ID Card Issuance process for registered students at the University of Dar es Salaam faces long waiting period, narrow working windows and staff exhaustion due to large number of students</a:t>
+            </a:r>
+            <a:endParaRPr lang="en-GB" sz="3200" b="0" u="none" strike="noStrike">
+              <a:solidFill>
+                <a:srgbClr val="000000"/>
+              </a:solidFill>
+              <a:effectLst/>
+              <a:uFillTx/>
+              <a:latin typeface="Arial"/>
             </a:endParaRPr>
           </a:p>
         </p:txBody>
@@ -6655,7 +6878,7 @@
         <p:txBody>
           <a:bodyPr/>
           <a:p>
-            <a:fld id="{3E2B2D1D-79BC-4FD0-B6A0-B2E26B95AE77}" type="slidenum">
+            <a:fld id="{D9B97175-C0F4-4CD5-9CD3-B5A5D3501533}" type="slidenum">
               <a:t>3</a:t>
             </a:fld>
           </a:p>
@@ -6675,7 +6898,7 @@
         <p:txBody>
           <a:bodyPr/>
           <a:p>
-            <a:fld id="{8B4AE2CB-D547-4407-BC5B-C8E1B3DFA947}" type="datetime1">
+            <a:fld id="{49A44765-19E3-4B87-A571-28D25C91D8BF}" type="datetime1">
               <a:rPr lang="en-GB"/>
               <a:t>16/01/2026</a:t>
             </a:fld>
@@ -6684,6 +6907,14 @@
       </p:sp>
     </p:spTree>
   </p:cSld>
+  <mc:AlternateContent>
+    <mc:Choice Requires="p14">
+      <p:transition spd="slow" p14:dur="2000"/>
+    </mc:Choice>
+    <mc:Fallback>
+      <p:transition spd="slow"/>
+    </mc:Fallback>
+  </mc:AlternateContent>
 </p:sld>
 </file>
 
@@ -6706,7 +6937,7 @@
       </p:grpSpPr>
       <p:sp>
         <p:nvSpPr>
-          <p:cNvPr id="77" name="PlaceHolder 1"/>
+          <p:cNvPr id="79" name="PlaceHolder 1"/>
           <p:cNvSpPr>
             <a:spLocks noGrp="1"/>
           </p:cNvSpPr>
@@ -6717,7 +6948,7 @@
         <p:spPr>
           <a:xfrm>
             <a:off x="838080" y="1401480"/>
-            <a:ext cx="10515240" cy="938520"/>
+            <a:ext cx="10514880" cy="938160"/>
           </a:xfrm>
           <a:prstGeom prst="rect">
             <a:avLst/>
@@ -6737,9 +6968,12 @@
                 <a:spcPct val="90000"/>
               </a:lnSpc>
               <a:buNone/>
-            </a:pPr>
-            <a:r>
-              <a:rPr lang="en-US" sz="5400" b="1" u="none" strike="noStrike">
+              <a:tabLst>
+                <a:tab algn="l" pos="0"/>
+              </a:tabLst>
+            </a:pPr>
+            <a:r>
+              <a:rPr lang="en-GB" sz="5400" b="1" u="none" strike="noStrike">
                 <a:solidFill>
                   <a:schemeClr val="dk1"/>
                 </a:solidFill>
@@ -6749,20 +6983,20 @@
               </a:rPr>
               <a:t>Proposed Solution</a:t>
             </a:r>
-            <a:endParaRPr lang="en-US" sz="5400" b="0" u="none" strike="noStrike">
-              <a:solidFill>
-                <a:schemeClr val="dk1"/>
-              </a:solidFill>
-              <a:effectLst/>
-              <a:uFillTx/>
-              <a:latin typeface="Times New Roman"/>
-            </a:endParaRPr>
-          </a:p>
-        </p:txBody>
-      </p:sp>
-      <p:sp>
-        <p:nvSpPr>
-          <p:cNvPr id="78" name="PlaceHolder 2"/>
+            <a:endParaRPr lang="en-GB" sz="5400" b="0" u="none" strike="noStrike">
+              <a:solidFill>
+                <a:srgbClr val="000000"/>
+              </a:solidFill>
+              <a:effectLst/>
+              <a:uFillTx/>
+              <a:latin typeface="Arial"/>
+            </a:endParaRPr>
+          </a:p>
+        </p:txBody>
+      </p:sp>
+      <p:sp>
+        <p:nvSpPr>
+          <p:cNvPr id="80" name="PlaceHolder 2"/>
           <p:cNvSpPr>
             <a:spLocks noGrp="1"/>
           </p:cNvSpPr>
@@ -6773,7 +7007,7 @@
         <p:spPr>
           <a:xfrm>
             <a:off x="360000" y="2340000"/>
-            <a:ext cx="10993320" cy="512640"/>
+            <a:ext cx="10992960" cy="512280"/>
           </a:xfrm>
           <a:prstGeom prst="rect">
             <a:avLst/>
@@ -6796,9 +7030,12 @@
                 <a:spcPts val="1001"/>
               </a:spcBef>
               <a:buNone/>
-            </a:pPr>
-            <a:r>
-              <a:rPr lang="en-US" sz="2800" b="0" u="none" strike="noStrike">
+              <a:tabLst>
+                <a:tab algn="l" pos="0"/>
+              </a:tabLst>
+            </a:pPr>
+            <a:r>
+              <a:rPr lang="en-GB" sz="2800" b="0" u="none" strike="noStrike">
                 <a:solidFill>
                   <a:schemeClr val="dk1"/>
                 </a:solidFill>
@@ -6808,27 +7045,27 @@
               </a:rPr>
               <a:t>An automated card issuance system for secure, on-demand card retrieval</a:t>
             </a:r>
-            <a:endParaRPr lang="en-US" sz="2800" b="0" u="none" strike="noStrike">
-              <a:solidFill>
-                <a:schemeClr val="dk1"/>
-              </a:solidFill>
-              <a:effectLst/>
-              <a:uFillTx/>
-              <a:latin typeface="Times New Roman"/>
-            </a:endParaRPr>
-          </a:p>
-        </p:txBody>
-      </p:sp>
-      <p:sp>
-        <p:nvSpPr>
-          <p:cNvPr id="79" name=""/>
+            <a:endParaRPr lang="en-GB" sz="2800" b="0" u="none" strike="noStrike">
+              <a:solidFill>
+                <a:srgbClr val="000000"/>
+              </a:solidFill>
+              <a:effectLst/>
+              <a:uFillTx/>
+              <a:latin typeface="Arial"/>
+            </a:endParaRPr>
+          </a:p>
+        </p:txBody>
+      </p:sp>
+      <p:sp>
+        <p:nvSpPr>
+          <p:cNvPr id="81" name=""/>
           <p:cNvSpPr/>
           <p:nvPr/>
         </p:nvSpPr>
         <p:spPr>
           <a:xfrm>
             <a:off x="1620000" y="2880000"/>
-            <a:ext cx="3960000" cy="1440000"/>
+            <a:ext cx="3959640" cy="1439640"/>
           </a:xfrm>
           <a:prstGeom prst="flowChartAlternateProcess">
             <a:avLst/>
@@ -6850,7 +7087,7 @@
             </a:solidFill>
           </a:ln>
           <a:effectLst>
-            <a:outerShdw dist="101823" dir="2700000" rotWithShape="0">
+            <a:outerShdw dir="2700000" dist="101823" rotWithShape="0">
               <a:srgbClr val="808080"/>
             </a:outerShdw>
           </a:effectLst>
@@ -6895,7 +7132,6 @@
               <a:effectLst/>
               <a:uFillTx/>
               <a:latin typeface="Arial"/>
-              <a:ea typeface="Noto Sans CJK SC"/>
             </a:endParaRPr>
           </a:p>
           <a:p>
@@ -6928,21 +7164,20 @@
               <a:effectLst/>
               <a:uFillTx/>
               <a:latin typeface="Arial"/>
-              <a:ea typeface="Noto Sans CJK SC"/>
-            </a:endParaRPr>
-          </a:p>
-        </p:txBody>
-      </p:sp>
-      <p:sp>
-        <p:nvSpPr>
-          <p:cNvPr id="80" name=""/>
+            </a:endParaRPr>
+          </a:p>
+        </p:txBody>
+      </p:sp>
+      <p:sp>
+        <p:nvSpPr>
+          <p:cNvPr id="82" name=""/>
           <p:cNvSpPr/>
           <p:nvPr/>
         </p:nvSpPr>
         <p:spPr>
           <a:xfrm>
             <a:off x="6480000" y="2880000"/>
-            <a:ext cx="3780000" cy="1440000"/>
+            <a:ext cx="3779640" cy="1439640"/>
           </a:xfrm>
           <a:prstGeom prst="flowChartAlternateProcess">
             <a:avLst/>
@@ -6964,7 +7199,7 @@
             </a:solidFill>
           </a:ln>
           <a:effectLst>
-            <a:outerShdw dist="101823" dir="2700000" rotWithShape="0">
+            <a:outerShdw dir="2700000" dist="101823" rotWithShape="0">
               <a:srgbClr val="808080"/>
             </a:outerShdw>
           </a:effectLst>
@@ -7020,18 +7255,7 @@
                 <a:uFillTx/>
                 <a:latin typeface="Times New Roman"/>
               </a:rPr>
-              <a:t>SMS (OTP) for student </a:t>
-            </a:r>
-            <a:r>
-              <a:rPr lang="en-GB" sz="2100" b="0" u="none" strike="noStrike">
-                <a:solidFill>
-                  <a:srgbClr val="000000"/>
-                </a:solidFill>
-                <a:effectLst/>
-                <a:uFillTx/>
-                <a:latin typeface="Times New Roman"/>
-              </a:rPr>
-              <a:t>verification</a:t>
+              <a:t>SMS (OTP) for student verification</a:t>
             </a:r>
             <a:endParaRPr lang="en-GB" sz="2100" b="0" u="none" strike="noStrike">
               <a:solidFill>
@@ -7046,14 +7270,14 @@
       </p:sp>
       <p:sp>
         <p:nvSpPr>
-          <p:cNvPr id="81" name=""/>
+          <p:cNvPr id="83" name=""/>
           <p:cNvSpPr/>
           <p:nvPr/>
         </p:nvSpPr>
         <p:spPr>
           <a:xfrm>
             <a:off x="1620000" y="4680000"/>
-            <a:ext cx="3960000" cy="1620000"/>
+            <a:ext cx="3959640" cy="1619640"/>
           </a:xfrm>
           <a:prstGeom prst="flowChartAlternateProcess">
             <a:avLst/>
@@ -7075,7 +7299,7 @@
             </a:solidFill>
           </a:ln>
           <a:effectLst>
-            <a:outerShdw dist="101823" dir="2700000" rotWithShape="0">
+            <a:outerShdw dir="2700000" dist="101823" rotWithShape="0">
               <a:srgbClr val="808080"/>
             </a:outerShdw>
           </a:effectLst>
@@ -7146,14 +7370,14 @@
       </p:sp>
       <p:sp>
         <p:nvSpPr>
-          <p:cNvPr id="82" name=""/>
+          <p:cNvPr id="84" name=""/>
           <p:cNvSpPr/>
           <p:nvPr/>
         </p:nvSpPr>
         <p:spPr>
           <a:xfrm>
             <a:off x="6480000" y="4680000"/>
-            <a:ext cx="3780000" cy="1620000"/>
+            <a:ext cx="3779640" cy="1619640"/>
           </a:xfrm>
           <a:prstGeom prst="flowChartAlternateProcess">
             <a:avLst/>
@@ -7175,7 +7399,7 @@
             </a:solidFill>
           </a:ln>
           <a:effectLst>
-            <a:outerShdw dist="101823" dir="2700000" rotWithShape="0">
+            <a:outerShdw dir="2700000" dist="101823" rotWithShape="0">
               <a:srgbClr val="808080"/>
             </a:outerShdw>
           </a:effectLst>
@@ -7258,7 +7482,7 @@
         <p:txBody>
           <a:bodyPr/>
           <a:p>
-            <a:fld id="{5C18B50A-99C1-4007-84F2-DA5FA2400107}" type="slidenum">
+            <a:fld id="{76F27FCA-DFB5-46E4-BA20-F2EDD25C803D}" type="slidenum">
               <a:t>4</a:t>
             </a:fld>
           </a:p>
@@ -7278,7 +7502,7 @@
         <p:txBody>
           <a:bodyPr/>
           <a:p>
-            <a:fld id="{12C6F432-8D67-400C-B2A7-2EC500C8DD02}" type="datetime1">
+            <a:fld id="{B59CBC03-8DEB-4480-BCAC-215458873A88}" type="datetime1">
               <a:rPr lang="en-GB"/>
               <a:t>16/01/2026</a:t>
             </a:fld>
@@ -7309,7 +7533,7 @@
       </p:grpSpPr>
       <p:sp>
         <p:nvSpPr>
-          <p:cNvPr id="83" name="PlaceHolder 1"/>
+          <p:cNvPr id="85" name="PlaceHolder 1"/>
           <p:cNvSpPr>
             <a:spLocks noGrp="1"/>
           </p:cNvSpPr>
@@ -7320,7 +7544,7 @@
         <p:spPr>
           <a:xfrm>
             <a:off x="900000" y="1413360"/>
-            <a:ext cx="10515240" cy="926640"/>
+            <a:ext cx="10514880" cy="926280"/>
           </a:xfrm>
           <a:prstGeom prst="rect">
             <a:avLst/>
@@ -7340,9 +7564,12 @@
                 <a:spcPct val="90000"/>
               </a:lnSpc>
               <a:buNone/>
-            </a:pPr>
-            <a:r>
-              <a:rPr lang="en-US" sz="5400" b="1" u="none" strike="noStrike">
+              <a:tabLst>
+                <a:tab algn="l" pos="0"/>
+              </a:tabLst>
+            </a:pPr>
+            <a:r>
+              <a:rPr lang="en-GB" sz="5400" b="1" u="none" strike="noStrike">
                 <a:solidFill>
                   <a:schemeClr val="dk1"/>
                 </a:solidFill>
@@ -7352,20 +7579,20 @@
               </a:rPr>
               <a:t>Objectives</a:t>
             </a:r>
-            <a:endParaRPr lang="en-US" sz="5400" b="0" u="none" strike="noStrike">
-              <a:solidFill>
-                <a:schemeClr val="dk1"/>
-              </a:solidFill>
-              <a:effectLst/>
-              <a:uFillTx/>
-              <a:latin typeface="Times New Roman"/>
-            </a:endParaRPr>
-          </a:p>
-        </p:txBody>
-      </p:sp>
-      <p:sp>
-        <p:nvSpPr>
-          <p:cNvPr id="84" name="PlaceHolder 2"/>
+            <a:endParaRPr lang="en-GB" sz="5400" b="0" u="none" strike="noStrike">
+              <a:solidFill>
+                <a:srgbClr val="000000"/>
+              </a:solidFill>
+              <a:effectLst/>
+              <a:uFillTx/>
+              <a:latin typeface="Arial"/>
+            </a:endParaRPr>
+          </a:p>
+        </p:txBody>
+      </p:sp>
+      <p:sp>
+        <p:nvSpPr>
+          <p:cNvPr id="86" name="PlaceHolder 2"/>
           <p:cNvSpPr>
             <a:spLocks noGrp="1"/>
           </p:cNvSpPr>
@@ -7376,7 +7603,7 @@
         <p:spPr>
           <a:xfrm>
             <a:off x="1080000" y="2340000"/>
-            <a:ext cx="10273320" cy="4140000"/>
+            <a:ext cx="10272960" cy="4139640"/>
           </a:xfrm>
           <a:prstGeom prst="rect">
             <a:avLst/>
@@ -7404,7 +7631,7 @@
               </a:tabLst>
             </a:pPr>
             <a:r>
-              <a:rPr lang="en-US" sz="3200" b="0" u="none" strike="noStrike">
+              <a:rPr lang="en-GB" sz="3200" b="0" u="none" strike="noStrike">
                 <a:solidFill>
                   <a:schemeClr val="dk1"/>
                 </a:solidFill>
@@ -7414,13 +7641,13 @@
               </a:rPr>
               <a:t>Main Objective</a:t>
             </a:r>
-            <a:endParaRPr lang="en-US" sz="3200" b="0" u="none" strike="noStrike">
-              <a:solidFill>
-                <a:schemeClr val="dk1"/>
-              </a:solidFill>
-              <a:effectLst/>
-              <a:uFillTx/>
-              <a:latin typeface="Times New Roman"/>
+            <a:endParaRPr lang="en-GB" sz="3200" b="0" u="none" strike="noStrike">
+              <a:solidFill>
+                <a:srgbClr val="000000"/>
+              </a:solidFill>
+              <a:effectLst/>
+              <a:uFillTx/>
+              <a:latin typeface="Arial"/>
             </a:endParaRPr>
           </a:p>
           <a:p>
@@ -7441,7 +7668,7 @@
               </a:tabLst>
             </a:pPr>
             <a:r>
-              <a:rPr lang="en-US" sz="3200" b="0" u="none" strike="noStrike">
+              <a:rPr lang="en-GB" sz="3200" b="0" u="none" strike="noStrike">
                 <a:solidFill>
                   <a:schemeClr val="dk1"/>
                 </a:solidFill>
@@ -7449,26 +7676,15 @@
                 <a:uFillTx/>
                 <a:latin typeface="Times New Roman"/>
               </a:rPr>
-              <a:t>To design and implement an Automated Card Issuance System </a:t>
-            </a:r>
-            <a:r>
-              <a:rPr lang="en-US" sz="3200" b="0" u="none" strike="noStrike">
-                <a:solidFill>
-                  <a:schemeClr val="dk1"/>
-                </a:solidFill>
-                <a:effectLst/>
-                <a:uFillTx/>
-                <a:latin typeface="Times New Roman"/>
-              </a:rPr>
-              <a:t>for students’ pre-printed ID Cards </a:t>
-            </a:r>
-            <a:endParaRPr lang="en-US" sz="3200" b="0" u="none" strike="noStrike">
-              <a:solidFill>
-                <a:schemeClr val="dk1"/>
-              </a:solidFill>
-              <a:effectLst/>
-              <a:uFillTx/>
-              <a:latin typeface="Times New Roman"/>
+              <a:t>To design and implement an Automated ID Card Issuance System for students’ pre-printed ID Cards </a:t>
+            </a:r>
+            <a:endParaRPr lang="en-GB" sz="3200" b="0" u="none" strike="noStrike">
+              <a:solidFill>
+                <a:srgbClr val="000000"/>
+              </a:solidFill>
+              <a:effectLst/>
+              <a:uFillTx/>
+              <a:latin typeface="Arial"/>
             </a:endParaRPr>
           </a:p>
           <a:p>
@@ -7484,13 +7700,13 @@
                 <a:tab algn="l" pos="0"/>
               </a:tabLst>
             </a:pPr>
-            <a:endParaRPr lang="en-US" sz="1300" b="0" u="none" strike="noStrike">
-              <a:solidFill>
-                <a:schemeClr val="dk1"/>
-              </a:solidFill>
-              <a:effectLst/>
-              <a:uFillTx/>
-              <a:latin typeface="Times New Roman"/>
+            <a:endParaRPr lang="en-GB" sz="1300" b="0" u="none" strike="noStrike">
+              <a:solidFill>
+                <a:srgbClr val="000000"/>
+              </a:solidFill>
+              <a:effectLst/>
+              <a:uFillTx/>
+              <a:latin typeface="Arial"/>
             </a:endParaRPr>
           </a:p>
           <a:p>
@@ -7507,7 +7723,7 @@
               </a:tabLst>
             </a:pPr>
             <a:r>
-              <a:rPr lang="en-US" sz="3200" b="0" u="none" strike="noStrike">
+              <a:rPr lang="en-GB" sz="3200" b="0" u="none" strike="noStrike">
                 <a:solidFill>
                   <a:schemeClr val="dk1"/>
                 </a:solidFill>
@@ -7517,13 +7733,13 @@
               </a:rPr>
               <a:t>Specific Objectives</a:t>
             </a:r>
-            <a:endParaRPr lang="en-US" sz="3200" b="0" u="none" strike="noStrike">
-              <a:solidFill>
-                <a:schemeClr val="dk1"/>
-              </a:solidFill>
-              <a:effectLst/>
-              <a:uFillTx/>
-              <a:latin typeface="Times New Roman"/>
+            <a:endParaRPr lang="en-GB" sz="3200" b="0" u="none" strike="noStrike">
+              <a:solidFill>
+                <a:srgbClr val="000000"/>
+              </a:solidFill>
+              <a:effectLst/>
+              <a:uFillTx/>
+              <a:latin typeface="Arial"/>
             </a:endParaRPr>
           </a:p>
           <a:p>
@@ -7544,7 +7760,7 @@
               </a:tabLst>
             </a:pPr>
             <a:r>
-              <a:rPr lang="en-US" sz="3200" b="0" u="none" strike="noStrike">
+              <a:rPr lang="en-GB" sz="3200" b="0" u="none" strike="noStrike">
                 <a:solidFill>
                   <a:schemeClr val="dk1"/>
                 </a:solidFill>
@@ -7554,13 +7770,13 @@
               </a:rPr>
               <a:t>To implement a reliable actuator control system</a:t>
             </a:r>
-            <a:endParaRPr lang="en-US" sz="3200" b="0" u="none" strike="noStrike">
-              <a:solidFill>
-                <a:schemeClr val="dk1"/>
-              </a:solidFill>
-              <a:effectLst/>
-              <a:uFillTx/>
-              <a:latin typeface="Times New Roman"/>
+            <a:endParaRPr lang="en-GB" sz="3200" b="0" u="none" strike="noStrike">
+              <a:solidFill>
+                <a:srgbClr val="000000"/>
+              </a:solidFill>
+              <a:effectLst/>
+              <a:uFillTx/>
+              <a:latin typeface="Arial"/>
             </a:endParaRPr>
           </a:p>
           <a:p>
@@ -7581,7 +7797,7 @@
               </a:tabLst>
             </a:pPr>
             <a:r>
-              <a:rPr lang="en-US" sz="3200" b="0" u="none" strike="noStrike">
+              <a:rPr lang="en-GB" sz="3200" b="0" u="none" strike="noStrike">
                 <a:solidFill>
                   <a:schemeClr val="dk1"/>
                 </a:solidFill>
@@ -7591,13 +7807,13 @@
               </a:rPr>
               <a:t>To implement authentication application</a:t>
             </a:r>
-            <a:endParaRPr lang="en-US" sz="3200" b="0" u="none" strike="noStrike">
-              <a:solidFill>
-                <a:schemeClr val="dk1"/>
-              </a:solidFill>
-              <a:effectLst/>
-              <a:uFillTx/>
-              <a:latin typeface="Times New Roman"/>
+            <a:endParaRPr lang="en-GB" sz="3200" b="0" u="none" strike="noStrike">
+              <a:solidFill>
+                <a:srgbClr val="000000"/>
+              </a:solidFill>
+              <a:effectLst/>
+              <a:uFillTx/>
+              <a:latin typeface="Arial"/>
             </a:endParaRPr>
           </a:p>
           <a:p>
@@ -7618,7 +7834,7 @@
               </a:tabLst>
             </a:pPr>
             <a:r>
-              <a:rPr lang="en-US" sz="3200" b="0" u="none" strike="noStrike">
+              <a:rPr lang="en-GB" sz="3200" b="0" u="none" strike="noStrike">
                 <a:solidFill>
                   <a:schemeClr val="dk1"/>
                 </a:solidFill>
@@ -7628,13 +7844,13 @@
               </a:rPr>
               <a:t>To implement activity logging</a:t>
             </a:r>
-            <a:endParaRPr lang="en-US" sz="3200" b="0" u="none" strike="noStrike">
-              <a:solidFill>
-                <a:schemeClr val="dk1"/>
-              </a:solidFill>
-              <a:effectLst/>
-              <a:uFillTx/>
-              <a:latin typeface="Times New Roman"/>
+            <a:endParaRPr lang="en-GB" sz="3200" b="0" u="none" strike="noStrike">
+              <a:solidFill>
+                <a:srgbClr val="000000"/>
+              </a:solidFill>
+              <a:effectLst/>
+              <a:uFillTx/>
+              <a:latin typeface="Arial"/>
             </a:endParaRPr>
           </a:p>
           <a:p>
@@ -7655,7 +7871,7 @@
               </a:tabLst>
             </a:pPr>
             <a:r>
-              <a:rPr lang="en-US" sz="3200" b="0" u="none" strike="noStrike">
+              <a:rPr lang="en-GB" sz="3200" b="0" u="none" strike="noStrike">
                 <a:solidFill>
                   <a:schemeClr val="dk1"/>
                 </a:solidFill>
@@ -7665,13 +7881,13 @@
               </a:rPr>
               <a:t>To enforce security policy</a:t>
             </a:r>
-            <a:endParaRPr lang="en-US" sz="3200" b="0" u="none" strike="noStrike">
-              <a:solidFill>
-                <a:schemeClr val="dk1"/>
-              </a:solidFill>
-              <a:effectLst/>
-              <a:uFillTx/>
-              <a:latin typeface="Times New Roman"/>
+            <a:endParaRPr lang="en-GB" sz="3200" b="0" u="none" strike="noStrike">
+              <a:solidFill>
+                <a:srgbClr val="000000"/>
+              </a:solidFill>
+              <a:effectLst/>
+              <a:uFillTx/>
+              <a:latin typeface="Arial"/>
             </a:endParaRPr>
           </a:p>
           <a:p>
@@ -7692,7 +7908,7 @@
               </a:tabLst>
             </a:pPr>
             <a:r>
-              <a:rPr lang="en-US" sz="3200" b="0" u="none" strike="noStrike">
+              <a:rPr lang="en-GB" sz="3200" b="0" u="none" strike="noStrike">
                 <a:solidFill>
                   <a:schemeClr val="dk1"/>
                 </a:solidFill>
@@ -7702,13 +7918,13 @@
               </a:rPr>
               <a:t>System performance evaluation</a:t>
             </a:r>
-            <a:endParaRPr lang="en-US" sz="3200" b="0" u="none" strike="noStrike">
-              <a:solidFill>
-                <a:schemeClr val="dk1"/>
-              </a:solidFill>
-              <a:effectLst/>
-              <a:uFillTx/>
-              <a:latin typeface="Times New Roman"/>
+            <a:endParaRPr lang="en-GB" sz="3200" b="0" u="none" strike="noStrike">
+              <a:solidFill>
+                <a:srgbClr val="000000"/>
+              </a:solidFill>
+              <a:effectLst/>
+              <a:uFillTx/>
+              <a:latin typeface="Arial"/>
             </a:endParaRPr>
           </a:p>
         </p:txBody>
@@ -7727,7 +7943,7 @@
         <p:txBody>
           <a:bodyPr/>
           <a:p>
-            <a:fld id="{16925422-208A-461F-A976-40DF8120F6FB}" type="slidenum">
+            <a:fld id="{15312449-D675-4326-906B-044C955B3742}" type="slidenum">
               <a:t>5</a:t>
             </a:fld>
           </a:p>
@@ -7747,7 +7963,7 @@
         <p:txBody>
           <a:bodyPr/>
           <a:p>
-            <a:fld id="{DD15735A-33F1-42DB-B592-92CC39924442}" type="datetime1">
+            <a:fld id="{848E1A68-2FDA-43DB-B0A9-009A12C70595}" type="datetime1">
               <a:rPr lang="en-GB"/>
               <a:t>16/01/2026</a:t>
             </a:fld>
@@ -7756,6 +7972,14 @@
       </p:sp>
     </p:spTree>
   </p:cSld>
+  <mc:AlternateContent>
+    <mc:Choice Requires="p14">
+      <p:transition spd="slow" p14:dur="2000"/>
+    </mc:Choice>
+    <mc:Fallback>
+      <p:transition spd="slow"/>
+    </mc:Fallback>
+  </mc:AlternateContent>
 </p:sld>
 </file>
 
@@ -7778,7 +8002,7 @@
       </p:grpSpPr>
       <p:sp>
         <p:nvSpPr>
-          <p:cNvPr id="85" name="PlaceHolder 1"/>
+          <p:cNvPr id="87" name="PlaceHolder 1"/>
           <p:cNvSpPr>
             <a:spLocks noGrp="1"/>
           </p:cNvSpPr>
@@ -7789,7 +8013,7 @@
         <p:spPr>
           <a:xfrm>
             <a:off x="838080" y="1401480"/>
-            <a:ext cx="10515240" cy="1325160"/>
+            <a:ext cx="10514880" cy="1324800"/>
           </a:xfrm>
           <a:prstGeom prst="rect">
             <a:avLst/>
@@ -7809,9 +8033,12 @@
                 <a:spcPct val="90000"/>
               </a:lnSpc>
               <a:buNone/>
-            </a:pPr>
-            <a:r>
-              <a:rPr lang="en-US" sz="4800" b="1" u="none" strike="noStrike">
+              <a:tabLst>
+                <a:tab algn="l" pos="0"/>
+              </a:tabLst>
+            </a:pPr>
+            <a:r>
+              <a:rPr lang="en-GB" sz="4800" b="1" u="none" strike="noStrike">
                 <a:solidFill>
                   <a:schemeClr val="dk1"/>
                 </a:solidFill>
@@ -7821,20 +8048,20 @@
               </a:rPr>
               <a:t>Related Projects</a:t>
             </a:r>
-            <a:endParaRPr lang="en-US" sz="4800" b="0" u="none" strike="noStrike">
-              <a:solidFill>
-                <a:schemeClr val="dk1"/>
-              </a:solidFill>
-              <a:effectLst/>
-              <a:uFillTx/>
-              <a:latin typeface="Times New Roman"/>
-            </a:endParaRPr>
-          </a:p>
-        </p:txBody>
-      </p:sp>
-      <p:sp>
-        <p:nvSpPr>
-          <p:cNvPr id="86" name="PlaceHolder 2"/>
+            <a:endParaRPr lang="en-GB" sz="4800" b="0" u="none" strike="noStrike">
+              <a:solidFill>
+                <a:srgbClr val="000000"/>
+              </a:solidFill>
+              <a:effectLst/>
+              <a:uFillTx/>
+              <a:latin typeface="Arial"/>
+            </a:endParaRPr>
+          </a:p>
+        </p:txBody>
+      </p:sp>
+      <p:sp>
+        <p:nvSpPr>
+          <p:cNvPr id="88" name="PlaceHolder 2"/>
           <p:cNvSpPr>
             <a:spLocks noGrp="1"/>
           </p:cNvSpPr>
@@ -7845,7 +8072,7 @@
         <p:spPr>
           <a:xfrm>
             <a:off x="838080" y="2520000"/>
-            <a:ext cx="10515240" cy="3656880"/>
+            <a:ext cx="10514880" cy="3656520"/>
           </a:xfrm>
           <a:prstGeom prst="rect">
             <a:avLst/>
@@ -7875,7 +8102,7 @@
               <a:buChar char=""/>
             </a:pPr>
             <a:r>
-              <a:rPr lang="en-US" sz="2600" b="0" u="none" strike="noStrike">
+              <a:rPr lang="en-GB" sz="2600" b="0" u="none" strike="noStrike">
                 <a:solidFill>
                   <a:schemeClr val="dk1"/>
                 </a:solidFill>
@@ -7883,15 +8110,26 @@
                 <a:uFillTx/>
                 <a:latin typeface="Times New Roman"/>
               </a:rPr>
-              <a:t>Automatic and Smart Vending Systems: self-service, cashless payment (IoT), and object detection (image processing).</a:t>
-            </a:r>
-            <a:endParaRPr lang="en-US" sz="2600" b="0" u="none" strike="noStrike">
-              <a:solidFill>
-                <a:schemeClr val="dk1"/>
-              </a:solidFill>
-              <a:effectLst/>
-              <a:uFillTx/>
-              <a:latin typeface="Times New Roman"/>
+              <a:t>Automatic and Smart Vending Systems: self-service, cashless payment (IoT), </a:t>
+            </a:r>
+            <a:r>
+              <a:rPr lang="en-GB" sz="2600" b="0" u="none" strike="noStrike">
+                <a:solidFill>
+                  <a:schemeClr val="dk1"/>
+                </a:solidFill>
+                <a:effectLst/>
+                <a:uFillTx/>
+                <a:latin typeface="Times New Roman"/>
+              </a:rPr>
+              <a:t>and object detection (image processing).</a:t>
+            </a:r>
+            <a:endParaRPr lang="en-GB" sz="2600" b="0" u="none" strike="noStrike">
+              <a:solidFill>
+                <a:srgbClr val="000000"/>
+              </a:solidFill>
+              <a:effectLst/>
+              <a:uFillTx/>
+              <a:latin typeface="Arial"/>
             </a:endParaRPr>
           </a:p>
           <a:p>
@@ -7910,7 +8148,7 @@
               <a:buChar char=""/>
             </a:pPr>
             <a:r>
-              <a:rPr lang="en-US" sz="2600" b="0" u="none" strike="noStrike">
+              <a:rPr lang="en-GB" sz="2600" b="0" u="none" strike="noStrike">
                 <a:solidFill>
                   <a:schemeClr val="dk1"/>
                 </a:solidFill>
@@ -7918,15 +8156,26 @@
                 <a:uFillTx/>
                 <a:latin typeface="Times New Roman"/>
               </a:rPr>
-              <a:t>ATM with authentication and security: multi-factor approaches, like OTPs and biometrics to enhance security in automated environments.</a:t>
-            </a:r>
-            <a:endParaRPr lang="en-US" sz="2600" b="0" u="none" strike="noStrike">
-              <a:solidFill>
-                <a:schemeClr val="dk1"/>
-              </a:solidFill>
-              <a:effectLst/>
-              <a:uFillTx/>
-              <a:latin typeface="Times New Roman"/>
+              <a:t>ATM with authentication and security: multi-factor approaches, like OTPs </a:t>
+            </a:r>
+            <a:r>
+              <a:rPr lang="en-GB" sz="2600" b="0" u="none" strike="noStrike">
+                <a:solidFill>
+                  <a:schemeClr val="dk1"/>
+                </a:solidFill>
+                <a:effectLst/>
+                <a:uFillTx/>
+                <a:latin typeface="Times New Roman"/>
+              </a:rPr>
+              <a:t>and biometrics to enhance security in automated environments.</a:t>
+            </a:r>
+            <a:endParaRPr lang="en-GB" sz="2600" b="0" u="none" strike="noStrike">
+              <a:solidFill>
+                <a:srgbClr val="000000"/>
+              </a:solidFill>
+              <a:effectLst/>
+              <a:uFillTx/>
+              <a:latin typeface="Arial"/>
             </a:endParaRPr>
           </a:p>
         </p:txBody>
@@ -7945,7 +8194,7 @@
         <p:txBody>
           <a:bodyPr/>
           <a:p>
-            <a:fld id="{73B8C573-DE22-449C-A4D1-D326886FD730}" type="slidenum">
+            <a:fld id="{0834DDF2-B7E3-478B-9634-6912B2180D3B}" type="slidenum">
               <a:t>6</a:t>
             </a:fld>
           </a:p>
@@ -7965,7 +8214,7 @@
         <p:txBody>
           <a:bodyPr/>
           <a:p>
-            <a:fld id="{7244C52D-71C9-4745-8FA5-F037191C9FBE}" type="datetime1">
+            <a:fld id="{79CA1F30-5CCF-43B7-8E38-5B6F7D2DAD3A}" type="datetime1">
               <a:rPr lang="en-GB"/>
               <a:t>16/01/2026</a:t>
             </a:fld>
@@ -7974,6 +8223,14 @@
       </p:sp>
     </p:spTree>
   </p:cSld>
+  <mc:AlternateContent>
+    <mc:Choice Requires="p14">
+      <p:transition spd="slow" p14:dur="2000"/>
+    </mc:Choice>
+    <mc:Fallback>
+      <p:transition spd="slow"/>
+    </mc:Fallback>
+  </mc:AlternateContent>
 </p:sld>
 </file>
 
@@ -7996,7 +8253,7 @@
       </p:grpSpPr>
       <p:sp>
         <p:nvSpPr>
-          <p:cNvPr id="87" name="PlaceHolder 1"/>
+          <p:cNvPr id="89" name="PlaceHolder 1"/>
           <p:cNvSpPr>
             <a:spLocks noGrp="1"/>
           </p:cNvSpPr>
@@ -8007,7 +8264,7 @@
         <p:spPr>
           <a:xfrm>
             <a:off x="824760" y="1440000"/>
-            <a:ext cx="10515240" cy="1145160"/>
+            <a:ext cx="10514880" cy="1144800"/>
           </a:xfrm>
           <a:prstGeom prst="rect">
             <a:avLst/>
@@ -8027,9 +8284,12 @@
                 <a:spcPct val="90000"/>
               </a:lnSpc>
               <a:buNone/>
-            </a:pPr>
-            <a:r>
-              <a:rPr lang="en-US" sz="4800" b="1" u="none" strike="noStrike">
+              <a:tabLst>
+                <a:tab algn="l" pos="0"/>
+              </a:tabLst>
+            </a:pPr>
+            <a:r>
+              <a:rPr lang="en-GB" sz="4800" b="1" u="none" strike="noStrike">
                 <a:solidFill>
                   <a:schemeClr val="dk1"/>
                 </a:solidFill>
@@ -8039,20 +8299,20 @@
               </a:rPr>
               <a:t>Methodology – System architecture</a:t>
             </a:r>
-            <a:endParaRPr lang="en-US" sz="4800" b="0" u="none" strike="noStrike">
-              <a:solidFill>
-                <a:schemeClr val="dk1"/>
-              </a:solidFill>
-              <a:effectLst/>
-              <a:uFillTx/>
-              <a:latin typeface="Calibri"/>
-            </a:endParaRPr>
-          </a:p>
-        </p:txBody>
-      </p:sp>
-      <p:sp>
-        <p:nvSpPr>
-          <p:cNvPr id="88" name="PlaceHolder 2"/>
+            <a:endParaRPr lang="en-GB" sz="4800" b="0" u="none" strike="noStrike">
+              <a:solidFill>
+                <a:srgbClr val="000000"/>
+              </a:solidFill>
+              <a:effectLst/>
+              <a:uFillTx/>
+              <a:latin typeface="Arial"/>
+            </a:endParaRPr>
+          </a:p>
+        </p:txBody>
+      </p:sp>
+      <p:sp>
+        <p:nvSpPr>
+          <p:cNvPr id="90" name="PlaceHolder 2"/>
           <p:cNvSpPr>
             <a:spLocks noGrp="1"/>
           </p:cNvSpPr>
@@ -8063,7 +8323,7 @@
         <p:spPr>
           <a:xfrm>
             <a:off x="469080" y="2367360"/>
-            <a:ext cx="11160000" cy="872640"/>
+            <a:ext cx="11159640" cy="872280"/>
           </a:xfrm>
           <a:prstGeom prst="rect">
             <a:avLst/>
@@ -8086,9 +8346,12 @@
                 <a:spcPts val="1001"/>
               </a:spcBef>
               <a:buNone/>
-            </a:pPr>
-            <a:r>
-              <a:rPr lang="en-US" sz="2800" b="0" u="none" strike="noStrike">
+              <a:tabLst>
+                <a:tab algn="l" pos="0"/>
+              </a:tabLst>
+            </a:pPr>
+            <a:r>
+              <a:rPr lang="en-GB" sz="2800" b="0" u="none" strike="noStrike">
                 <a:solidFill>
                   <a:schemeClr val="dk1"/>
                 </a:solidFill>
@@ -8096,40 +8359,29 @@
                 <a:uFillTx/>
                 <a:latin typeface="Times New Roman"/>
               </a:rPr>
-              <a:t>The proposed system uses dual-controller architecture for robust </a:t>
-            </a:r>
-            <a:r>
-              <a:rPr lang="en-US" sz="2800" b="0" u="none" strike="noStrike">
-                <a:solidFill>
-                  <a:schemeClr val="dk1"/>
-                </a:solidFill>
-                <a:effectLst/>
-                <a:uFillTx/>
-                <a:latin typeface="Times New Roman"/>
-              </a:rPr>
-              <a:t>operation.</a:t>
-            </a:r>
-            <a:endParaRPr lang="en-US" sz="2800" b="0" u="none" strike="noStrike">
-              <a:solidFill>
-                <a:schemeClr val="dk1"/>
-              </a:solidFill>
-              <a:effectLst/>
-              <a:uFillTx/>
-              <a:latin typeface="Times New Roman"/>
-            </a:endParaRPr>
-          </a:p>
-        </p:txBody>
-      </p:sp>
-      <p:sp>
-        <p:nvSpPr>
-          <p:cNvPr id="89" name=""/>
+              <a:t>The proposed system uses dual-controller architecture for robust operation.</a:t>
+            </a:r>
+            <a:endParaRPr lang="en-GB" sz="2800" b="0" u="none" strike="noStrike">
+              <a:solidFill>
+                <a:srgbClr val="000000"/>
+              </a:solidFill>
+              <a:effectLst/>
+              <a:uFillTx/>
+              <a:latin typeface="Arial"/>
+            </a:endParaRPr>
+          </a:p>
+        </p:txBody>
+      </p:sp>
+      <p:sp>
+        <p:nvSpPr>
+          <p:cNvPr id="91" name=""/>
           <p:cNvSpPr/>
           <p:nvPr/>
         </p:nvSpPr>
         <p:spPr>
           <a:xfrm>
             <a:off x="1620000" y="3240000"/>
-            <a:ext cx="4320000" cy="2700000"/>
+            <a:ext cx="4319640" cy="2699640"/>
           </a:xfrm>
           <a:prstGeom prst="flowChartAlternateProcess">
             <a:avLst/>
@@ -8151,7 +8403,7 @@
             </a:solidFill>
           </a:ln>
           <a:effectLst>
-            <a:outerShdw dist="101823" dir="2700000" rotWithShape="0">
+            <a:outerShdw dir="2700000" dist="101823" rotWithShape="0">
               <a:srgbClr val="808080"/>
             </a:outerShdw>
           </a:effectLst>
@@ -8207,40 +8459,7 @@
                 <a:uFillTx/>
                 <a:latin typeface="Times New Roman"/>
               </a:rPr>
-              <a:t>Manages UI, network, SMS </a:t>
-            </a:r>
-            <a:r>
-              <a:rPr lang="en-GB" sz="2200" b="0" u="none" strike="noStrike">
-                <a:solidFill>
-                  <a:srgbClr val="000000"/>
-                </a:solidFill>
-                <a:effectLst/>
-                <a:uFillTx/>
-                <a:latin typeface="Times New Roman"/>
-              </a:rPr>
-              <a:t>OTP, database access, computer </a:t>
-            </a:r>
-            <a:r>
-              <a:rPr lang="en-GB" sz="2200" b="0" u="none" strike="noStrike">
-                <a:solidFill>
-                  <a:srgbClr val="000000"/>
-                </a:solidFill>
-                <a:effectLst/>
-                <a:uFillTx/>
-                <a:latin typeface="Times New Roman"/>
-              </a:rPr>
-              <a:t>vision, logging and commands </a:t>
-            </a:r>
-            <a:r>
-              <a:rPr lang="en-GB" sz="2200" b="0" u="none" strike="noStrike">
-                <a:solidFill>
-                  <a:srgbClr val="000000"/>
-                </a:solidFill>
-                <a:effectLst/>
-                <a:uFillTx/>
-                <a:latin typeface="Times New Roman"/>
-              </a:rPr>
-              <a:t>to real-time controller</a:t>
+              <a:t>Manages UI, network, SMS OTP, database access, computer vision, logging and commands to real-time controller</a:t>
             </a:r>
             <a:endParaRPr lang="en-GB" sz="2200" b="0" u="none" strike="noStrike">
               <a:solidFill>
@@ -8255,14 +8474,14 @@
       </p:sp>
       <p:sp>
         <p:nvSpPr>
-          <p:cNvPr id="90" name=""/>
+          <p:cNvPr id="92" name=""/>
           <p:cNvSpPr/>
           <p:nvPr/>
         </p:nvSpPr>
         <p:spPr>
           <a:xfrm>
             <a:off x="6480000" y="3240000"/>
-            <a:ext cx="4320000" cy="2700000"/>
+            <a:ext cx="4319640" cy="2699640"/>
           </a:xfrm>
           <a:prstGeom prst="flowChartAlternateProcess">
             <a:avLst/>
@@ -8284,7 +8503,7 @@
             </a:solidFill>
           </a:ln>
           <a:effectLst>
-            <a:outerShdw dist="101823" dir="2700000" rotWithShape="0">
+            <a:outerShdw dir="2700000" dist="101823" rotWithShape="0">
               <a:srgbClr val="808080"/>
             </a:outerShdw>
           </a:effectLst>
@@ -8340,40 +8559,7 @@
                 <a:uFillTx/>
                 <a:latin typeface="Times New Roman"/>
               </a:rPr>
-              <a:t>Directly controls motors, </a:t>
-            </a:r>
-            <a:r>
-              <a:rPr lang="en-GB" sz="2200" b="0" u="none" strike="noStrike">
-                <a:solidFill>
-                  <a:srgbClr val="000000"/>
-                </a:solidFill>
-                <a:effectLst/>
-                <a:uFillTx/>
-                <a:latin typeface="Times New Roman"/>
-              </a:rPr>
-              <a:t>safety monitoring and status </a:t>
-            </a:r>
-            <a:r>
-              <a:rPr lang="en-GB" sz="2200" b="0" u="none" strike="noStrike">
-                <a:solidFill>
-                  <a:srgbClr val="000000"/>
-                </a:solidFill>
-                <a:effectLst/>
-                <a:uFillTx/>
-                <a:latin typeface="Times New Roman"/>
-              </a:rPr>
-              <a:t>reporting to high-level </a:t>
-            </a:r>
-            <a:r>
-              <a:rPr lang="en-GB" sz="2200" b="0" u="none" strike="noStrike">
-                <a:solidFill>
-                  <a:srgbClr val="000000"/>
-                </a:solidFill>
-                <a:effectLst/>
-                <a:uFillTx/>
-                <a:latin typeface="Times New Roman"/>
-              </a:rPr>
-              <a:t>controller.</a:t>
+              <a:t>Directly controls motors, safety monitoring and status reporting to high-level controller.</a:t>
             </a:r>
             <a:endParaRPr lang="en-GB" sz="2200" b="0" u="none" strike="noStrike">
               <a:solidFill>
@@ -8400,7 +8586,7 @@
         <p:txBody>
           <a:bodyPr/>
           <a:p>
-            <a:fld id="{DAE425A6-46C4-4D62-8C37-239F1C110D47}" type="slidenum">
+            <a:fld id="{7B6F2C40-5E74-4632-AB5A-9CD212E7470A}" type="slidenum">
               <a:t>7</a:t>
             </a:fld>
           </a:p>
@@ -8420,7 +8606,7 @@
         <p:txBody>
           <a:bodyPr/>
           <a:p>
-            <a:fld id="{D523837D-B25A-46F1-BCC0-52734E28E169}" type="datetime1">
+            <a:fld id="{9C149571-9127-4361-AA24-C8E61CCD5F3C}" type="datetime1">
               <a:rPr lang="en-GB"/>
               <a:t>16/01/2026</a:t>
             </a:fld>
@@ -8429,6 +8615,14 @@
       </p:sp>
     </p:spTree>
   </p:cSld>
+  <mc:AlternateContent>
+    <mc:Choice Requires="p14">
+      <p:transition spd="slow" p14:dur="2000"/>
+    </mc:Choice>
+    <mc:Fallback>
+      <p:transition spd="slow"/>
+    </mc:Fallback>
+  </mc:AlternateContent>
 </p:sld>
 </file>
 
@@ -8451,7 +8645,7 @@
       </p:grpSpPr>
       <p:sp>
         <p:nvSpPr>
-          <p:cNvPr id="91" name="PlaceHolder 1"/>
+          <p:cNvPr id="93" name="PlaceHolder 1"/>
           <p:cNvSpPr>
             <a:spLocks noGrp="1"/>
           </p:cNvSpPr>
@@ -8462,7 +8656,7 @@
         <p:spPr>
           <a:xfrm>
             <a:off x="838080" y="1401480"/>
-            <a:ext cx="10515240" cy="1118520"/>
+            <a:ext cx="10514880" cy="1118160"/>
           </a:xfrm>
           <a:prstGeom prst="rect">
             <a:avLst/>
@@ -8482,9 +8676,12 @@
                 <a:spcPct val="90000"/>
               </a:lnSpc>
               <a:buNone/>
-            </a:pPr>
-            <a:r>
-              <a:rPr lang="en-US" sz="4800" b="1" u="none" strike="noStrike">
+              <a:tabLst>
+                <a:tab algn="l" pos="0"/>
+              </a:tabLst>
+            </a:pPr>
+            <a:r>
+              <a:rPr lang="en-GB" sz="4800" b="1" u="none" strike="noStrike">
                 <a:solidFill>
                   <a:schemeClr val="dk1"/>
                 </a:solidFill>
@@ -8494,27 +8691,27 @@
               </a:rPr>
               <a:t>Methodology - Workflow</a:t>
             </a:r>
-            <a:endParaRPr lang="en-US" sz="4800" b="1" u="none" strike="noStrike">
-              <a:solidFill>
-                <a:schemeClr val="dk1"/>
-              </a:solidFill>
-              <a:effectLst/>
-              <a:uFillTx/>
-              <a:latin typeface="Times New Roman"/>
-            </a:endParaRPr>
-          </a:p>
-        </p:txBody>
-      </p:sp>
-      <p:sp>
-        <p:nvSpPr>
-          <p:cNvPr id="92" name=""/>
+            <a:endParaRPr lang="en-GB" sz="4800" b="0" u="none" strike="noStrike">
+              <a:solidFill>
+                <a:srgbClr val="000000"/>
+              </a:solidFill>
+              <a:effectLst/>
+              <a:uFillTx/>
+              <a:latin typeface="Arial"/>
+            </a:endParaRPr>
+          </a:p>
+        </p:txBody>
+      </p:sp>
+      <p:sp>
+        <p:nvSpPr>
+          <p:cNvPr id="94" name=""/>
           <p:cNvSpPr/>
           <p:nvPr/>
         </p:nvSpPr>
         <p:spPr>
           <a:xfrm>
             <a:off x="1080000" y="2520000"/>
-            <a:ext cx="2700000" cy="1800000"/>
+            <a:ext cx="2699640" cy="1799640"/>
           </a:xfrm>
           <a:prstGeom prst="flowChartAlternateProcess">
             <a:avLst/>
@@ -8536,7 +8733,7 @@
             </a:solidFill>
           </a:ln>
           <a:effectLst>
-            <a:outerShdw dist="101823" dir="2700000" rotWithShape="0">
+            <a:outerShdw dir="2700000" dist="101823" rotWithShape="0">
               <a:srgbClr val="808080"/>
             </a:outerShdw>
           </a:effectLst>
@@ -8581,7 +8778,6 @@
               <a:effectLst/>
               <a:uFillTx/>
               <a:latin typeface="Arial"/>
-              <a:ea typeface="Noto Sans CJK SC"/>
             </a:endParaRPr>
           </a:p>
           <a:p>
@@ -8605,18 +8801,7 @@
                 <a:uFillTx/>
                 <a:latin typeface="Times New Roman"/>
               </a:rPr>
-              <a:t>Staff inserts cards, cards are </a:t>
-            </a:r>
-            <a:r>
-              <a:rPr lang="en-GB" sz="2000" b="0" u="none" strike="noStrike">
-                <a:solidFill>
-                  <a:srgbClr val="000000"/>
-                </a:solidFill>
-                <a:effectLst/>
-                <a:uFillTx/>
-                <a:latin typeface="Times New Roman"/>
-              </a:rPr>
-              <a:t>scanned and mapped to storage</a:t>
+              <a:t>Staff inserts cards, cards are scanned and mapped to storage</a:t>
             </a:r>
             <a:endParaRPr lang="en-GB" sz="2000" b="0" u="none" strike="noStrike">
               <a:solidFill>
@@ -8625,21 +8810,20 @@
               <a:effectLst/>
               <a:uFillTx/>
               <a:latin typeface="Arial"/>
-              <a:ea typeface="Noto Sans CJK SC"/>
-            </a:endParaRPr>
-          </a:p>
-        </p:txBody>
-      </p:sp>
-      <p:sp>
-        <p:nvSpPr>
-          <p:cNvPr id="93" name=""/>
+            </a:endParaRPr>
+          </a:p>
+        </p:txBody>
+      </p:sp>
+      <p:sp>
+        <p:nvSpPr>
+          <p:cNvPr id="95" name=""/>
           <p:cNvSpPr/>
           <p:nvPr/>
         </p:nvSpPr>
         <p:spPr>
           <a:xfrm>
             <a:off x="4680000" y="3420000"/>
-            <a:ext cx="2700000" cy="1800000"/>
+            <a:ext cx="2699640" cy="1799640"/>
           </a:xfrm>
           <a:prstGeom prst="flowChartAlternateProcess">
             <a:avLst/>
@@ -8661,7 +8845,7 @@
             </a:solidFill>
           </a:ln>
           <a:effectLst>
-            <a:outerShdw dist="101823" dir="2700000" rotWithShape="0">
+            <a:outerShdw dir="2700000" dist="101823" rotWithShape="0">
               <a:srgbClr val="808080"/>
             </a:outerShdw>
           </a:effectLst>
@@ -8697,18 +8881,7 @@
                 <a:uFillTx/>
                 <a:latin typeface="Times New Roman"/>
               </a:rPr>
-              <a:t>Notification </a:t>
-            </a:r>
-            <a:r>
-              <a:rPr lang="en-GB" sz="2100" b="1" u="none" strike="noStrike">
-                <a:solidFill>
-                  <a:srgbClr val="000000"/>
-                </a:solidFill>
-                <a:effectLst/>
-                <a:uFillTx/>
-                <a:latin typeface="Times New Roman"/>
-              </a:rPr>
-              <a:t>Phase:</a:t>
+              <a:t>Notification Phase:</a:t>
             </a:r>
             <a:endParaRPr lang="en-GB" sz="2100" b="0" u="none" strike="noStrike">
               <a:solidFill>
@@ -8717,7 +8890,6 @@
               <a:effectLst/>
               <a:uFillTx/>
               <a:latin typeface="Arial"/>
-              <a:ea typeface="Noto Sans CJK SC"/>
             </a:endParaRPr>
           </a:p>
           <a:p>
@@ -8741,40 +8913,7 @@
                 <a:uFillTx/>
                 <a:latin typeface="Times New Roman"/>
               </a:rPr>
-              <a:t>High-level </a:t>
-            </a:r>
-            <a:r>
-              <a:rPr lang="en-GB" sz="2100" b="0" u="none" strike="noStrike">
-                <a:solidFill>
-                  <a:srgbClr val="000000"/>
-                </a:solidFill>
-                <a:effectLst/>
-                <a:uFillTx/>
-                <a:latin typeface="Times New Roman"/>
-              </a:rPr>
-              <a:t>controller sends </a:t>
-            </a:r>
-            <a:r>
-              <a:rPr lang="en-GB" sz="2100" b="0" u="none" strike="noStrike">
-                <a:solidFill>
-                  <a:srgbClr val="000000"/>
-                </a:solidFill>
-                <a:effectLst/>
-                <a:uFillTx/>
-                <a:latin typeface="Times New Roman"/>
-              </a:rPr>
-              <a:t>SMS that cards are </a:t>
-            </a:r>
-            <a:r>
-              <a:rPr lang="en-GB" sz="2100" b="0" u="none" strike="noStrike">
-                <a:solidFill>
-                  <a:srgbClr val="000000"/>
-                </a:solidFill>
-                <a:effectLst/>
-                <a:uFillTx/>
-                <a:latin typeface="Times New Roman"/>
-              </a:rPr>
-              <a:t>ready</a:t>
+              <a:t>High-level controller sends SMS that cards are ready</a:t>
             </a:r>
             <a:endParaRPr lang="en-GB" sz="2100" b="0" u="none" strike="noStrike">
               <a:solidFill>
@@ -8783,21 +8922,20 @@
               <a:effectLst/>
               <a:uFillTx/>
               <a:latin typeface="Arial"/>
-              <a:ea typeface="Noto Sans CJK SC"/>
-            </a:endParaRPr>
-          </a:p>
-        </p:txBody>
-      </p:sp>
-      <p:sp>
-        <p:nvSpPr>
-          <p:cNvPr id="94" name=""/>
+            </a:endParaRPr>
+          </a:p>
+        </p:txBody>
+      </p:sp>
+      <p:sp>
+        <p:nvSpPr>
+          <p:cNvPr id="96" name=""/>
           <p:cNvSpPr/>
           <p:nvPr/>
         </p:nvSpPr>
         <p:spPr>
           <a:xfrm>
             <a:off x="8460000" y="4320000"/>
-            <a:ext cx="2700000" cy="1800000"/>
+            <a:ext cx="2699640" cy="1799640"/>
           </a:xfrm>
           <a:prstGeom prst="flowChartAlternateProcess">
             <a:avLst/>
@@ -8819,7 +8957,7 @@
             </a:solidFill>
           </a:ln>
           <a:effectLst>
-            <a:outerShdw dist="101823" dir="2700000" rotWithShape="0">
+            <a:outerShdw dir="2700000" dist="101823" rotWithShape="0">
               <a:srgbClr val="808080"/>
             </a:outerShdw>
           </a:effectLst>
@@ -8835,7 +8973,11 @@
             <a:noAutofit/>
           </a:bodyPr>
           <a:p>
-            <a:pPr algn="ctr"/>
+            <a:pPr algn="ctr">
+              <a:lnSpc>
+                <a:spcPct val="100000"/>
+              </a:lnSpc>
+            </a:pPr>
             <a:r>
               <a:rPr lang="en-GB" sz="2100" b="1" u="none" strike="noStrike">
                 <a:solidFill>
@@ -8845,10 +8987,25 @@
                 <a:uFillTx/>
                 <a:latin typeface="Times New Roman"/>
               </a:rPr>
-              <a:t>Retrieval </a:t>
-            </a:r>
-            <a:r>
-              <a:rPr lang="en-GB" sz="2100" b="1" u="none" strike="noStrike">
+              <a:t>Retrieval Phase:</a:t>
+            </a:r>
+            <a:endParaRPr lang="en-GB" sz="2100" b="0" u="none" strike="noStrike">
+              <a:solidFill>
+                <a:srgbClr val="000000"/>
+              </a:solidFill>
+              <a:effectLst/>
+              <a:uFillTx/>
+              <a:latin typeface="Arial"/>
+            </a:endParaRPr>
+          </a:p>
+          <a:p>
+            <a:pPr algn="just">
+              <a:lnSpc>
+                <a:spcPct val="100000"/>
+              </a:lnSpc>
+            </a:pPr>
+            <a:r>
+              <a:rPr lang="en-GB" sz="2100" b="0" u="none" strike="noStrike">
                 <a:solidFill>
                   <a:srgbClr val="000000"/>
                 </a:solidFill>
@@ -8856,7 +9013,7 @@
                 <a:uFillTx/>
                 <a:latin typeface="Times New Roman"/>
               </a:rPr>
-              <a:t>Phase:</a:t>
+              <a:t>Student returns card, enters OTP, gets card and logs.</a:t>
             </a:r>
             <a:endParaRPr lang="en-GB" sz="2100" b="0" u="none" strike="noStrike">
               <a:solidFill>
@@ -8864,83 +9021,28 @@
               </a:solidFill>
               <a:effectLst/>
               <a:uFillTx/>
-              <a:latin typeface="Times New Roman"/>
-            </a:endParaRPr>
-          </a:p>
-          <a:p>
-            <a:pPr algn="just"/>
-            <a:r>
-              <a:rPr lang="en-GB" sz="2100" b="0" u="none" strike="noStrike">
-                <a:solidFill>
-                  <a:srgbClr val="000000"/>
-                </a:solidFill>
-                <a:effectLst/>
-                <a:uFillTx/>
-                <a:latin typeface="Times New Roman"/>
-              </a:rPr>
-              <a:t>Student returns </a:t>
-            </a:r>
-            <a:r>
-              <a:rPr lang="en-GB" sz="2100" b="0" u="none" strike="noStrike">
-                <a:solidFill>
-                  <a:srgbClr val="000000"/>
-                </a:solidFill>
-                <a:effectLst/>
-                <a:uFillTx/>
-                <a:latin typeface="Times New Roman"/>
-              </a:rPr>
-              <a:t>card, enters </a:t>
-            </a:r>
-            <a:r>
-              <a:rPr lang="en-GB" sz="2100" b="0" u="none" strike="noStrike">
-                <a:solidFill>
-                  <a:srgbClr val="000000"/>
-                </a:solidFill>
-                <a:effectLst/>
-                <a:uFillTx/>
-                <a:latin typeface="Times New Roman"/>
-              </a:rPr>
-              <a:t>OTP, gets card </a:t>
-            </a:r>
-            <a:r>
-              <a:rPr lang="en-GB" sz="2100" b="0" u="none" strike="noStrike">
-                <a:solidFill>
-                  <a:srgbClr val="000000"/>
-                </a:solidFill>
-                <a:effectLst/>
-                <a:uFillTx/>
-                <a:latin typeface="Times New Roman"/>
-              </a:rPr>
-              <a:t>and logs.</a:t>
-            </a:r>
-            <a:endParaRPr lang="en-GB" sz="2100" b="0" u="none" strike="noStrike">
-              <a:solidFill>
-                <a:srgbClr val="000000"/>
-              </a:solidFill>
-              <a:effectLst/>
-              <a:uFillTx/>
-              <a:latin typeface="Times New Roman"/>
+              <a:latin typeface="Arial"/>
             </a:endParaRPr>
           </a:p>
         </p:txBody>
       </p:sp>
       <p:cxnSp>
         <p:nvCxnSpPr>
-          <p:cNvPr id="95" name=""/>
+          <p:cNvPr id="97" name=""/>
           <p:cNvCxnSpPr>
-            <a:stCxn id="92" idx="3"/>
-            <a:endCxn id="93" idx="1"/>
+            <a:stCxn id="94" idx="3"/>
+            <a:endCxn id="95" idx="1"/>
           </p:cNvCxnSpPr>
           <p:nvPr/>
         </p:nvCxnSpPr>
         <p:spPr>
           <a:xfrm>
-            <a:off x="3780000" y="3420000"/>
-            <a:ext cx="900360" cy="900360"/>
+            <a:off x="3779640" y="3420000"/>
+            <a:ext cx="900720" cy="900360"/>
           </a:xfrm>
           <a:prstGeom prst="bentConnector3">
             <a:avLst>
-              <a:gd name="adj1" fmla="val 50000"/>
+              <a:gd name="adj1" fmla="val 50059"/>
             </a:avLst>
           </a:prstGeom>
           <a:ln w="0">
@@ -8953,21 +9055,21 @@
       </p:cxnSp>
       <p:cxnSp>
         <p:nvCxnSpPr>
-          <p:cNvPr id="96" name=""/>
+          <p:cNvPr id="98" name=""/>
           <p:cNvCxnSpPr>
-            <a:stCxn id="93" idx="3"/>
-            <a:endCxn id="94" idx="1"/>
+            <a:stCxn id="95" idx="3"/>
+            <a:endCxn id="96" idx="1"/>
           </p:cNvCxnSpPr>
           <p:nvPr/>
         </p:nvCxnSpPr>
         <p:spPr>
           <a:xfrm>
-            <a:off x="7380000" y="4320000"/>
-            <a:ext cx="1080360" cy="900360"/>
+            <a:off x="7379640" y="4320000"/>
+            <a:ext cx="1080720" cy="900360"/>
           </a:xfrm>
           <a:prstGeom prst="bentConnector3">
             <a:avLst>
-              <a:gd name="adj1" fmla="val 50000"/>
+              <a:gd name="adj1" fmla="val 50049"/>
             </a:avLst>
           </a:prstGeom>
           <a:ln w="0">
@@ -8992,7 +9094,7 @@
         <p:txBody>
           <a:bodyPr/>
           <a:p>
-            <a:fld id="{1D5115F4-2C1B-4402-AE52-86032B49BDA6}" type="slidenum">
+            <a:fld id="{F59D6D18-A39B-4F02-BBF2-DCC3CFAA3C04}" type="slidenum">
               <a:t>8</a:t>
             </a:fld>
           </a:p>
@@ -9012,7 +9114,7 @@
         <p:txBody>
           <a:bodyPr/>
           <a:p>
-            <a:fld id="{7161772B-98B7-47E4-82D7-17EBDDC9618A}" type="datetime1">
+            <a:fld id="{149C15DC-EEDB-4E03-AB8A-FF15E57D84FB}" type="datetime1">
               <a:rPr lang="en-GB"/>
               <a:t>16/01/2026</a:t>
             </a:fld>
@@ -9021,6 +9123,14 @@
       </p:sp>
     </p:spTree>
   </p:cSld>
+  <mc:AlternateContent>
+    <mc:Choice Requires="p14">
+      <p:transition spd="slow" p14:dur="2000"/>
+    </mc:Choice>
+    <mc:Fallback>
+      <p:transition spd="slow"/>
+    </mc:Fallback>
+  </mc:AlternateContent>
 </p:sld>
 </file>
 
@@ -9043,7 +9153,7 @@
       </p:grpSpPr>
       <p:sp>
         <p:nvSpPr>
-          <p:cNvPr id="97" name="PlaceHolder 1"/>
+          <p:cNvPr id="99" name="PlaceHolder 1"/>
           <p:cNvSpPr>
             <a:spLocks noGrp="1"/>
           </p:cNvSpPr>
@@ -9054,7 +9164,7 @@
         <p:spPr>
           <a:xfrm>
             <a:off x="838080" y="1401480"/>
-            <a:ext cx="10515240" cy="1325160"/>
+            <a:ext cx="10514880" cy="1324800"/>
           </a:xfrm>
           <a:prstGeom prst="rect">
             <a:avLst/>
@@ -9074,9 +9184,12 @@
                 <a:spcPct val="90000"/>
               </a:lnSpc>
               <a:buNone/>
-            </a:pPr>
-            <a:r>
-              <a:rPr lang="en-US" sz="5400" b="1" u="none" strike="noStrike">
+              <a:tabLst>
+                <a:tab algn="l" pos="0"/>
+              </a:tabLst>
+            </a:pPr>
+            <a:r>
+              <a:rPr lang="en-GB" sz="5400" b="1" u="none" strike="noStrike">
                 <a:solidFill>
                   <a:schemeClr val="dk1"/>
                 </a:solidFill>
@@ -9086,20 +9199,20 @@
               </a:rPr>
               <a:t>Conclusion</a:t>
             </a:r>
-            <a:endParaRPr lang="en-US" sz="5400" b="0" u="none" strike="noStrike">
-              <a:solidFill>
-                <a:schemeClr val="dk1"/>
-              </a:solidFill>
-              <a:effectLst/>
-              <a:uFillTx/>
-              <a:latin typeface="Times New Roman"/>
-            </a:endParaRPr>
-          </a:p>
-        </p:txBody>
-      </p:sp>
-      <p:sp>
-        <p:nvSpPr>
-          <p:cNvPr id="98" name="PlaceHolder 2"/>
+            <a:endParaRPr lang="en-GB" sz="5400" b="0" u="none" strike="noStrike">
+              <a:solidFill>
+                <a:srgbClr val="000000"/>
+              </a:solidFill>
+              <a:effectLst/>
+              <a:uFillTx/>
+              <a:latin typeface="Arial"/>
+            </a:endParaRPr>
+          </a:p>
+        </p:txBody>
+      </p:sp>
+      <p:sp>
+        <p:nvSpPr>
+          <p:cNvPr id="100" name="PlaceHolder 2"/>
           <p:cNvSpPr>
             <a:spLocks noGrp="1"/>
           </p:cNvSpPr>
@@ -9110,7 +9223,7 @@
         <p:spPr>
           <a:xfrm>
             <a:off x="838080" y="2727360"/>
-            <a:ext cx="10515240" cy="3449520"/>
+            <a:ext cx="10514880" cy="3449160"/>
           </a:xfrm>
           <a:prstGeom prst="rect">
             <a:avLst/>
@@ -9133,9 +9246,12 @@
                 <a:spcPts val="1001"/>
               </a:spcBef>
               <a:buNone/>
-            </a:pPr>
-            <a:r>
-              <a:rPr lang="en-US" sz="3200" b="0" u="none" strike="noStrike">
+              <a:tabLst>
+                <a:tab algn="l" pos="0"/>
+              </a:tabLst>
+            </a:pPr>
+            <a:r>
+              <a:rPr lang="en-GB" sz="3200" b="0" u="none" strike="noStrike">
                 <a:solidFill>
                   <a:schemeClr val="dk1"/>
                 </a:solidFill>
@@ -9143,37 +9259,15 @@
                 <a:uFillTx/>
                 <a:latin typeface="Times New Roman"/>
               </a:rPr>
-              <a:t>The proposed project shows that an Automated ID Card </a:t>
-            </a:r>
-            <a:r>
-              <a:rPr lang="en-US" sz="3200" b="0" u="none" strike="noStrike">
-                <a:solidFill>
-                  <a:schemeClr val="dk1"/>
-                </a:solidFill>
-                <a:effectLst/>
-                <a:uFillTx/>
-                <a:latin typeface="Times New Roman"/>
-              </a:rPr>
-              <a:t>Issuance System can streamline card distribution and </a:t>
-            </a:r>
-            <a:r>
-              <a:rPr lang="en-US" sz="3200" b="0" u="none" strike="noStrike">
-                <a:solidFill>
-                  <a:schemeClr val="dk1"/>
-                </a:solidFill>
-                <a:effectLst/>
-                <a:uFillTx/>
-                <a:latin typeface="Times New Roman"/>
-              </a:rPr>
-              <a:t>collection for University students.</a:t>
-            </a:r>
-            <a:endParaRPr lang="en-US" sz="3200" b="0" u="none" strike="noStrike">
-              <a:solidFill>
-                <a:schemeClr val="dk1"/>
-              </a:solidFill>
-              <a:effectLst/>
-              <a:uFillTx/>
-              <a:latin typeface="Times New Roman"/>
+              <a:t>The proposed project shows that an Automated ID Card Issuance System can streamline card distribution and collection for University students.</a:t>
+            </a:r>
+            <a:endParaRPr lang="en-GB" sz="3200" b="0" u="none" strike="noStrike">
+              <a:solidFill>
+                <a:srgbClr val="000000"/>
+              </a:solidFill>
+              <a:effectLst/>
+              <a:uFillTx/>
+              <a:latin typeface="Arial"/>
             </a:endParaRPr>
           </a:p>
           <a:p>
@@ -9185,14 +9279,17 @@
                 <a:spcPts val="1001"/>
               </a:spcBef>
               <a:buNone/>
-            </a:pPr>
-            <a:endParaRPr lang="en-US" sz="2800" b="0" u="none" strike="noStrike">
-              <a:solidFill>
-                <a:schemeClr val="dk1"/>
-              </a:solidFill>
-              <a:effectLst/>
-              <a:uFillTx/>
-              <a:latin typeface="Times New Roman"/>
+              <a:tabLst>
+                <a:tab algn="l" pos="0"/>
+              </a:tabLst>
+            </a:pPr>
+            <a:endParaRPr lang="en-GB" sz="2800" b="0" u="none" strike="noStrike">
+              <a:solidFill>
+                <a:srgbClr val="000000"/>
+              </a:solidFill>
+              <a:effectLst/>
+              <a:uFillTx/>
+              <a:latin typeface="Arial"/>
             </a:endParaRPr>
           </a:p>
         </p:txBody>
@@ -9211,7 +9308,7 @@
         <p:txBody>
           <a:bodyPr/>
           <a:p>
-            <a:fld id="{0DAA3048-7E70-4807-9569-BB3FE3D48BF9}" type="slidenum">
+            <a:fld id="{DA799809-7FF4-47B9-BDEC-4D7D1089C471}" type="slidenum">
               <a:t>9</a:t>
             </a:fld>
           </a:p>
@@ -9231,7 +9328,7 @@
         <p:txBody>
           <a:bodyPr/>
           <a:p>
-            <a:fld id="{3BE337D6-7839-4B24-8418-579AA521796D}" type="datetime1">
+            <a:fld id="{A55A8868-A261-4E82-A283-2B29CC558ED9}" type="datetime1">
               <a:rPr lang="en-GB"/>
               <a:t>16/01/2026</a:t>
             </a:fld>
@@ -9240,6 +9337,14 @@
       </p:sp>
     </p:spTree>
   </p:cSld>
+  <mc:AlternateContent>
+    <mc:Choice Requires="p14">
+      <p:transition spd="slow" p14:dur="2000"/>
+    </mc:Choice>
+    <mc:Fallback>
+      <p:transition spd="slow"/>
+    </mc:Fallback>
+  </mc:AlternateContent>
 </p:sld>
 </file>
 
